--- a/VlogHub_Project_Report.pptx
+++ b/VlogHub_Project_Report.pptx
@@ -5,25 +5,18 @@
     <p:sldMasterId id="2147483648" r:id="rId1"/>
   </p:sldMasterIdLst>
   <p:sldIdLst>
-    <p:sldId id="256" r:id="rId7"/>
-    <p:sldId id="257" r:id="rId8"/>
-    <p:sldId id="258" r:id="rId9"/>
-    <p:sldId id="259" r:id="rId10"/>
-    <p:sldId id="260" r:id="rId11"/>
-    <p:sldId id="261" r:id="rId12"/>
-    <p:sldId id="262" r:id="rId13"/>
-    <p:sldId id="263" r:id="rId14"/>
-    <p:sldId id="264" r:id="rId15"/>
-    <p:sldId id="265" r:id="rId16"/>
-    <p:sldId id="266" r:id="rId17"/>
-    <p:sldId id="267" r:id="rId18"/>
-    <p:sldId id="268" r:id="rId19"/>
-    <p:sldId id="269" r:id="rId20"/>
-    <p:sldId id="270" r:id="rId21"/>
-    <p:sldId id="271" r:id="rId22"/>
-    <p:sldId id="272" r:id="rId23"/>
+    <p:sldId id="256" r:id="rId2"/>
+    <p:sldId id="257" r:id="rId3"/>
+    <p:sldId id="258" r:id="rId4"/>
+    <p:sldId id="259" r:id="rId5"/>
+    <p:sldId id="260" r:id="rId6"/>
+    <p:sldId id="261" r:id="rId7"/>
+    <p:sldId id="262" r:id="rId8"/>
+    <p:sldId id="263" r:id="rId9"/>
+    <p:sldId id="264" r:id="rId10"/>
+    <p:sldId id="265" r:id="rId11"/>
   </p:sldIdLst>
-  <p:sldSz cx="9144000" cy="6858000" type="screen4x3"/>
+  <p:sldSz cx="12192000" cy="6858000"/>
   <p:notesSz cx="6858000" cy="9144000"/>
   <p:defaultTextStyle>
     <a:defPPr>
@@ -120,6 +113,22 @@
       </a:defRPr>
     </a:lvl9pPr>
   </p:defaultTextStyle>
+  <p:extLst>
+    <p:ext uri="{EFAFB233-063F-42B5-8137-9DF3F51BA10A}">
+      <p15:sldGuideLst xmlns:p15="http://schemas.microsoft.com/office/powerpoint/2012/main">
+        <p15:guide id="1" orient="horz" pos="2160">
+          <p15:clr>
+            <a:srgbClr val="A4A3A4"/>
+          </p15:clr>
+        </p15:guide>
+        <p15:guide id="2" pos="2880">
+          <p15:clr>
+            <a:srgbClr val="A4A3A4"/>
+          </p15:clr>
+        </p15:guide>
+      </p15:sldGuideLst>
+    </p:ext>
+  </p:extLst>
 </p:presentation>
 </file>
 
@@ -161,10 +170,9 @@
           <a:lstStyle/>
           <a:p>
             <a:r>
-              <a:rPr lang="en-US" smtClean="0"/>
+              <a:rPr lang="en-US"/>
               <a:t>Click to edit Master title style</a:t>
             </a:r>
-            <a:endParaRPr lang="en-US"/>
           </a:p>
         </p:txBody>
       </p:sp>
@@ -280,10 +288,9 @@
           </a:lstStyle>
           <a:p>
             <a:r>
-              <a:rPr lang="en-US" smtClean="0"/>
+              <a:rPr lang="en-US"/>
               <a:t>Click to edit Master subtitle style</a:t>
             </a:r>
-            <a:endParaRPr lang="en-US"/>
           </a:p>
         </p:txBody>
       </p:sp>
@@ -304,7 +311,7 @@
           <a:p>
             <a:fld id="{5BCAD085-E8A6-8845-BD4E-CB4CCA059FC4}" type="datetimeFigureOut">
               <a:rPr lang="en-US" smtClean="0"/>
-              <a:t>1/27/13</a:t>
+              <a:t>7/15/2026</a:t>
             </a:fld>
             <a:endParaRPr lang="en-US"/>
           </a:p>
@@ -398,10 +405,9 @@
           <a:lstStyle/>
           <a:p>
             <a:r>
-              <a:rPr lang="en-US" smtClean="0"/>
+              <a:rPr lang="en-US"/>
               <a:t>Click to edit Master title style</a:t>
             </a:r>
-            <a:endParaRPr lang="en-US"/>
           </a:p>
         </p:txBody>
       </p:sp>
@@ -422,38 +428,37 @@
           <a:p>
             <a:pPr lvl="0"/>
             <a:r>
-              <a:rPr lang="en-US" smtClean="0"/>
+              <a:rPr lang="en-US"/>
               <a:t>Click to edit Master text styles</a:t>
             </a:r>
           </a:p>
           <a:p>
             <a:pPr lvl="1"/>
             <a:r>
-              <a:rPr lang="en-US" smtClean="0"/>
+              <a:rPr lang="en-US"/>
               <a:t>Second level</a:t>
             </a:r>
           </a:p>
           <a:p>
             <a:pPr lvl="2"/>
             <a:r>
-              <a:rPr lang="en-US" smtClean="0"/>
+              <a:rPr lang="en-US"/>
               <a:t>Third level</a:t>
             </a:r>
           </a:p>
           <a:p>
             <a:pPr lvl="3"/>
             <a:r>
-              <a:rPr lang="en-US" smtClean="0"/>
+              <a:rPr lang="en-US"/>
               <a:t>Fourth level</a:t>
             </a:r>
           </a:p>
           <a:p>
             <a:pPr lvl="4"/>
             <a:r>
-              <a:rPr lang="en-US" smtClean="0"/>
+              <a:rPr lang="en-US"/>
               <a:t>Fifth level</a:t>
             </a:r>
-            <a:endParaRPr lang="en-US"/>
           </a:p>
         </p:txBody>
       </p:sp>
@@ -474,7 +479,7 @@
           <a:p>
             <a:fld id="{5BCAD085-E8A6-8845-BD4E-CB4CCA059FC4}" type="datetimeFigureOut">
               <a:rPr lang="en-US" smtClean="0"/>
-              <a:t>1/27/13</a:t>
+              <a:t>7/15/2026</a:t>
             </a:fld>
             <a:endParaRPr lang="en-US"/>
           </a:p>
@@ -573,10 +578,9 @@
           <a:lstStyle/>
           <a:p>
             <a:r>
-              <a:rPr lang="en-US" smtClean="0"/>
+              <a:rPr lang="en-US"/>
               <a:t>Click to edit Master title style</a:t>
             </a:r>
-            <a:endParaRPr lang="en-US"/>
           </a:p>
         </p:txBody>
       </p:sp>
@@ -602,38 +606,37 @@
           <a:p>
             <a:pPr lvl="0"/>
             <a:r>
-              <a:rPr lang="en-US" smtClean="0"/>
+              <a:rPr lang="en-US"/>
               <a:t>Click to edit Master text styles</a:t>
             </a:r>
           </a:p>
           <a:p>
             <a:pPr lvl="1"/>
             <a:r>
-              <a:rPr lang="en-US" smtClean="0"/>
+              <a:rPr lang="en-US"/>
               <a:t>Second level</a:t>
             </a:r>
           </a:p>
           <a:p>
             <a:pPr lvl="2"/>
             <a:r>
-              <a:rPr lang="en-US" smtClean="0"/>
+              <a:rPr lang="en-US"/>
               <a:t>Third level</a:t>
             </a:r>
           </a:p>
           <a:p>
             <a:pPr lvl="3"/>
             <a:r>
-              <a:rPr lang="en-US" smtClean="0"/>
+              <a:rPr lang="en-US"/>
               <a:t>Fourth level</a:t>
             </a:r>
           </a:p>
           <a:p>
             <a:pPr lvl="4"/>
             <a:r>
-              <a:rPr lang="en-US" smtClean="0"/>
+              <a:rPr lang="en-US"/>
               <a:t>Fifth level</a:t>
             </a:r>
-            <a:endParaRPr lang="en-US"/>
           </a:p>
         </p:txBody>
       </p:sp>
@@ -654,7 +657,7 @@
           <a:p>
             <a:fld id="{5BCAD085-E8A6-8845-BD4E-CB4CCA059FC4}" type="datetimeFigureOut">
               <a:rPr lang="en-US" smtClean="0"/>
-              <a:t>1/27/13</a:t>
+              <a:t>7/15/2026</a:t>
             </a:fld>
             <a:endParaRPr lang="en-US"/>
           </a:p>
@@ -748,10 +751,9 @@
           <a:lstStyle/>
           <a:p>
             <a:r>
-              <a:rPr lang="en-US" smtClean="0"/>
+              <a:rPr lang="en-US"/>
               <a:t>Click to edit Master title style</a:t>
             </a:r>
-            <a:endParaRPr lang="en-US"/>
           </a:p>
         </p:txBody>
       </p:sp>
@@ -772,38 +774,37 @@
           <a:p>
             <a:pPr lvl="0"/>
             <a:r>
-              <a:rPr lang="en-US" smtClean="0"/>
+              <a:rPr lang="en-US"/>
               <a:t>Click to edit Master text styles</a:t>
             </a:r>
           </a:p>
           <a:p>
             <a:pPr lvl="1"/>
             <a:r>
-              <a:rPr lang="en-US" smtClean="0"/>
+              <a:rPr lang="en-US"/>
               <a:t>Second level</a:t>
             </a:r>
           </a:p>
           <a:p>
             <a:pPr lvl="2"/>
             <a:r>
-              <a:rPr lang="en-US" smtClean="0"/>
+              <a:rPr lang="en-US"/>
               <a:t>Third level</a:t>
             </a:r>
           </a:p>
           <a:p>
             <a:pPr lvl="3"/>
             <a:r>
-              <a:rPr lang="en-US" smtClean="0"/>
+              <a:rPr lang="en-US"/>
               <a:t>Fourth level</a:t>
             </a:r>
           </a:p>
           <a:p>
             <a:pPr lvl="4"/>
             <a:r>
-              <a:rPr lang="en-US" smtClean="0"/>
+              <a:rPr lang="en-US"/>
               <a:t>Fifth level</a:t>
             </a:r>
-            <a:endParaRPr lang="en-US"/>
           </a:p>
         </p:txBody>
       </p:sp>
@@ -824,7 +825,7 @@
           <a:p>
             <a:fld id="{5BCAD085-E8A6-8845-BD4E-CB4CCA059FC4}" type="datetimeFigureOut">
               <a:rPr lang="en-US" smtClean="0"/>
-              <a:t>1/27/13</a:t>
+              <a:t>7/15/2026</a:t>
             </a:fld>
             <a:endParaRPr lang="en-US"/>
           </a:p>
@@ -927,10 +928,9 @@
           </a:lstStyle>
           <a:p>
             <a:r>
-              <a:rPr lang="en-US" smtClean="0"/>
+              <a:rPr lang="en-US"/>
               <a:t>Click to edit Master title style</a:t>
             </a:r>
-            <a:endParaRPr lang="en-US"/>
           </a:p>
         </p:txBody>
       </p:sp>
@@ -1047,7 +1047,7 @@
           <a:p>
             <a:pPr lvl="0"/>
             <a:r>
-              <a:rPr lang="en-US" smtClean="0"/>
+              <a:rPr lang="en-US"/>
               <a:t>Click to edit Master text styles</a:t>
             </a:r>
           </a:p>
@@ -1070,7 +1070,7 @@
           <a:p>
             <a:fld id="{5BCAD085-E8A6-8845-BD4E-CB4CCA059FC4}" type="datetimeFigureOut">
               <a:rPr lang="en-US" smtClean="0"/>
-              <a:t>1/27/13</a:t>
+              <a:t>7/15/2026</a:t>
             </a:fld>
             <a:endParaRPr lang="en-US"/>
           </a:p>
@@ -1164,10 +1164,9 @@
           <a:lstStyle/>
           <a:p>
             <a:r>
-              <a:rPr lang="en-US" smtClean="0"/>
+              <a:rPr lang="en-US"/>
               <a:t>Click to edit Master title style</a:t>
             </a:r>
-            <a:endParaRPr lang="en-US"/>
           </a:p>
         </p:txBody>
       </p:sp>
@@ -1221,38 +1220,37 @@
           <a:p>
             <a:pPr lvl="0"/>
             <a:r>
-              <a:rPr lang="en-US" smtClean="0"/>
+              <a:rPr lang="en-US"/>
               <a:t>Click to edit Master text styles</a:t>
             </a:r>
           </a:p>
           <a:p>
             <a:pPr lvl="1"/>
             <a:r>
-              <a:rPr lang="en-US" smtClean="0"/>
+              <a:rPr lang="en-US"/>
               <a:t>Second level</a:t>
             </a:r>
           </a:p>
           <a:p>
             <a:pPr lvl="2"/>
             <a:r>
-              <a:rPr lang="en-US" smtClean="0"/>
+              <a:rPr lang="en-US"/>
               <a:t>Third level</a:t>
             </a:r>
           </a:p>
           <a:p>
             <a:pPr lvl="3"/>
             <a:r>
-              <a:rPr lang="en-US" smtClean="0"/>
+              <a:rPr lang="en-US"/>
               <a:t>Fourth level</a:t>
             </a:r>
           </a:p>
           <a:p>
             <a:pPr lvl="4"/>
             <a:r>
-              <a:rPr lang="en-US" smtClean="0"/>
+              <a:rPr lang="en-US"/>
               <a:t>Fifth level</a:t>
             </a:r>
-            <a:endParaRPr lang="en-US"/>
           </a:p>
         </p:txBody>
       </p:sp>
@@ -1306,38 +1304,37 @@
           <a:p>
             <a:pPr lvl="0"/>
             <a:r>
-              <a:rPr lang="en-US" smtClean="0"/>
+              <a:rPr lang="en-US"/>
               <a:t>Click to edit Master text styles</a:t>
             </a:r>
           </a:p>
           <a:p>
             <a:pPr lvl="1"/>
             <a:r>
-              <a:rPr lang="en-US" smtClean="0"/>
+              <a:rPr lang="en-US"/>
               <a:t>Second level</a:t>
             </a:r>
           </a:p>
           <a:p>
             <a:pPr lvl="2"/>
             <a:r>
-              <a:rPr lang="en-US" smtClean="0"/>
+              <a:rPr lang="en-US"/>
               <a:t>Third level</a:t>
             </a:r>
           </a:p>
           <a:p>
             <a:pPr lvl="3"/>
             <a:r>
-              <a:rPr lang="en-US" smtClean="0"/>
+              <a:rPr lang="en-US"/>
               <a:t>Fourth level</a:t>
             </a:r>
           </a:p>
           <a:p>
             <a:pPr lvl="4"/>
             <a:r>
-              <a:rPr lang="en-US" smtClean="0"/>
+              <a:rPr lang="en-US"/>
               <a:t>Fifth level</a:t>
             </a:r>
-            <a:endParaRPr lang="en-US"/>
           </a:p>
         </p:txBody>
       </p:sp>
@@ -1358,7 +1355,7 @@
           <a:p>
             <a:fld id="{5BCAD085-E8A6-8845-BD4E-CB4CCA059FC4}" type="datetimeFigureOut">
               <a:rPr lang="en-US" smtClean="0"/>
-              <a:t>1/27/13</a:t>
+              <a:t>7/15/2026</a:t>
             </a:fld>
             <a:endParaRPr lang="en-US"/>
           </a:p>
@@ -1456,10 +1453,9 @@
           </a:lstStyle>
           <a:p>
             <a:r>
-              <a:rPr lang="en-US" smtClean="0"/>
+              <a:rPr lang="en-US"/>
               <a:t>Click to edit Master title style</a:t>
             </a:r>
-            <a:endParaRPr lang="en-US"/>
           </a:p>
         </p:txBody>
       </p:sp>
@@ -1522,7 +1518,7 @@
           <a:p>
             <a:pPr lvl="0"/>
             <a:r>
-              <a:rPr lang="en-US" smtClean="0"/>
+              <a:rPr lang="en-US"/>
               <a:t>Click to edit Master text styles</a:t>
             </a:r>
           </a:p>
@@ -1578,38 +1574,37 @@
           <a:p>
             <a:pPr lvl="0"/>
             <a:r>
-              <a:rPr lang="en-US" smtClean="0"/>
+              <a:rPr lang="en-US"/>
               <a:t>Click to edit Master text styles</a:t>
             </a:r>
           </a:p>
           <a:p>
             <a:pPr lvl="1"/>
             <a:r>
-              <a:rPr lang="en-US" smtClean="0"/>
+              <a:rPr lang="en-US"/>
               <a:t>Second level</a:t>
             </a:r>
           </a:p>
           <a:p>
             <a:pPr lvl="2"/>
             <a:r>
-              <a:rPr lang="en-US" smtClean="0"/>
+              <a:rPr lang="en-US"/>
               <a:t>Third level</a:t>
             </a:r>
           </a:p>
           <a:p>
             <a:pPr lvl="3"/>
             <a:r>
-              <a:rPr lang="en-US" smtClean="0"/>
+              <a:rPr lang="en-US"/>
               <a:t>Fourth level</a:t>
             </a:r>
           </a:p>
           <a:p>
             <a:pPr lvl="4"/>
             <a:r>
-              <a:rPr lang="en-US" smtClean="0"/>
+              <a:rPr lang="en-US"/>
               <a:t>Fifth level</a:t>
             </a:r>
-            <a:endParaRPr lang="en-US"/>
           </a:p>
         </p:txBody>
       </p:sp>
@@ -1672,7 +1667,7 @@
           <a:p>
             <a:pPr lvl="0"/>
             <a:r>
-              <a:rPr lang="en-US" smtClean="0"/>
+              <a:rPr lang="en-US"/>
               <a:t>Click to edit Master text styles</a:t>
             </a:r>
           </a:p>
@@ -1728,38 +1723,37 @@
           <a:p>
             <a:pPr lvl="0"/>
             <a:r>
-              <a:rPr lang="en-US" smtClean="0"/>
+              <a:rPr lang="en-US"/>
               <a:t>Click to edit Master text styles</a:t>
             </a:r>
           </a:p>
           <a:p>
             <a:pPr lvl="1"/>
             <a:r>
-              <a:rPr lang="en-US" smtClean="0"/>
+              <a:rPr lang="en-US"/>
               <a:t>Second level</a:t>
             </a:r>
           </a:p>
           <a:p>
             <a:pPr lvl="2"/>
             <a:r>
-              <a:rPr lang="en-US" smtClean="0"/>
+              <a:rPr lang="en-US"/>
               <a:t>Third level</a:t>
             </a:r>
           </a:p>
           <a:p>
             <a:pPr lvl="3"/>
             <a:r>
-              <a:rPr lang="en-US" smtClean="0"/>
+              <a:rPr lang="en-US"/>
               <a:t>Fourth level</a:t>
             </a:r>
           </a:p>
           <a:p>
             <a:pPr lvl="4"/>
             <a:r>
-              <a:rPr lang="en-US" smtClean="0"/>
+              <a:rPr lang="en-US"/>
               <a:t>Fifth level</a:t>
             </a:r>
-            <a:endParaRPr lang="en-US"/>
           </a:p>
         </p:txBody>
       </p:sp>
@@ -1780,7 +1774,7 @@
           <a:p>
             <a:fld id="{5BCAD085-E8A6-8845-BD4E-CB4CCA059FC4}" type="datetimeFigureOut">
               <a:rPr lang="en-US" smtClean="0"/>
-              <a:t>1/27/13</a:t>
+              <a:t>7/15/2026</a:t>
             </a:fld>
             <a:endParaRPr lang="en-US"/>
           </a:p>
@@ -1874,10 +1868,9 @@
           <a:lstStyle/>
           <a:p>
             <a:r>
-              <a:rPr lang="en-US" smtClean="0"/>
+              <a:rPr lang="en-US"/>
               <a:t>Click to edit Master title style</a:t>
             </a:r>
-            <a:endParaRPr lang="en-US"/>
           </a:p>
         </p:txBody>
       </p:sp>
@@ -1898,7 +1891,7 @@
           <a:p>
             <a:fld id="{5BCAD085-E8A6-8845-BD4E-CB4CCA059FC4}" type="datetimeFigureOut">
               <a:rPr lang="en-US" smtClean="0"/>
-              <a:t>1/27/13</a:t>
+              <a:t>7/15/2026</a:t>
             </a:fld>
             <a:endParaRPr lang="en-US"/>
           </a:p>
@@ -1993,7 +1986,7 @@
           <a:p>
             <a:fld id="{5BCAD085-E8A6-8845-BD4E-CB4CCA059FC4}" type="datetimeFigureOut">
               <a:rPr lang="en-US" smtClean="0"/>
-              <a:t>1/27/13</a:t>
+              <a:t>7/15/2026</a:t>
             </a:fld>
             <a:endParaRPr lang="en-US"/>
           </a:p>
@@ -2096,10 +2089,9 @@
           </a:lstStyle>
           <a:p>
             <a:r>
-              <a:rPr lang="en-US" smtClean="0"/>
+              <a:rPr lang="en-US"/>
               <a:t>Click to edit Master title style</a:t>
             </a:r>
-            <a:endParaRPr lang="en-US"/>
           </a:p>
         </p:txBody>
       </p:sp>
@@ -2153,38 +2145,37 @@
           <a:p>
             <a:pPr lvl="0"/>
             <a:r>
-              <a:rPr lang="en-US" smtClean="0"/>
+              <a:rPr lang="en-US"/>
               <a:t>Click to edit Master text styles</a:t>
             </a:r>
           </a:p>
           <a:p>
             <a:pPr lvl="1"/>
             <a:r>
-              <a:rPr lang="en-US" smtClean="0"/>
+              <a:rPr lang="en-US"/>
               <a:t>Second level</a:t>
             </a:r>
           </a:p>
           <a:p>
             <a:pPr lvl="2"/>
             <a:r>
-              <a:rPr lang="en-US" smtClean="0"/>
+              <a:rPr lang="en-US"/>
               <a:t>Third level</a:t>
             </a:r>
           </a:p>
           <a:p>
             <a:pPr lvl="3"/>
             <a:r>
-              <a:rPr lang="en-US" smtClean="0"/>
+              <a:rPr lang="en-US"/>
               <a:t>Fourth level</a:t>
             </a:r>
           </a:p>
           <a:p>
             <a:pPr lvl="4"/>
             <a:r>
-              <a:rPr lang="en-US" smtClean="0"/>
+              <a:rPr lang="en-US"/>
               <a:t>Fifth level</a:t>
             </a:r>
-            <a:endParaRPr lang="en-US"/>
           </a:p>
         </p:txBody>
       </p:sp>
@@ -2247,7 +2238,7 @@
           <a:p>
             <a:pPr lvl="0"/>
             <a:r>
-              <a:rPr lang="en-US" smtClean="0"/>
+              <a:rPr lang="en-US"/>
               <a:t>Click to edit Master text styles</a:t>
             </a:r>
           </a:p>
@@ -2270,7 +2261,7 @@
           <a:p>
             <a:fld id="{5BCAD085-E8A6-8845-BD4E-CB4CCA059FC4}" type="datetimeFigureOut">
               <a:rPr lang="en-US" smtClean="0"/>
-              <a:t>1/27/13</a:t>
+              <a:t>7/15/2026</a:t>
             </a:fld>
             <a:endParaRPr lang="en-US"/>
           </a:p>
@@ -2373,10 +2364,9 @@
           </a:lstStyle>
           <a:p>
             <a:r>
-              <a:rPr lang="en-US" smtClean="0"/>
+              <a:rPr lang="en-US"/>
               <a:t>Click to edit Master title style</a:t>
             </a:r>
-            <a:endParaRPr lang="en-US"/>
           </a:p>
         </p:txBody>
       </p:sp>
@@ -2500,7 +2490,7 @@
           <a:p>
             <a:pPr lvl="0"/>
             <a:r>
-              <a:rPr lang="en-US" smtClean="0"/>
+              <a:rPr lang="en-US"/>
               <a:t>Click to edit Master text styles</a:t>
             </a:r>
           </a:p>
@@ -2523,7 +2513,7 @@
           <a:p>
             <a:fld id="{5BCAD085-E8A6-8845-BD4E-CB4CCA059FC4}" type="datetimeFigureOut">
               <a:rPr lang="en-US" smtClean="0"/>
-              <a:t>1/27/13</a:t>
+              <a:t>7/15/2026</a:t>
             </a:fld>
             <a:endParaRPr lang="en-US"/>
           </a:p>
@@ -2632,10 +2622,9 @@
           <a:lstStyle/>
           <a:p>
             <a:r>
-              <a:rPr lang="en-US" smtClean="0"/>
+              <a:rPr lang="en-US"/>
               <a:t>Click to edit Master title style</a:t>
             </a:r>
-            <a:endParaRPr lang="en-US"/>
           </a:p>
         </p:txBody>
       </p:sp>
@@ -2666,38 +2655,37 @@
           <a:p>
             <a:pPr lvl="0"/>
             <a:r>
-              <a:rPr lang="en-US" smtClean="0"/>
+              <a:rPr lang="en-US"/>
               <a:t>Click to edit Master text styles</a:t>
             </a:r>
           </a:p>
           <a:p>
             <a:pPr lvl="1"/>
             <a:r>
-              <a:rPr lang="en-US" smtClean="0"/>
+              <a:rPr lang="en-US"/>
               <a:t>Second level</a:t>
             </a:r>
           </a:p>
           <a:p>
             <a:pPr lvl="2"/>
             <a:r>
-              <a:rPr lang="en-US" smtClean="0"/>
+              <a:rPr lang="en-US"/>
               <a:t>Third level</a:t>
             </a:r>
           </a:p>
           <a:p>
             <a:pPr lvl="3"/>
             <a:r>
-              <a:rPr lang="en-US" smtClean="0"/>
+              <a:rPr lang="en-US"/>
               <a:t>Fourth level</a:t>
             </a:r>
           </a:p>
           <a:p>
             <a:pPr lvl="4"/>
             <a:r>
-              <a:rPr lang="en-US" smtClean="0"/>
+              <a:rPr lang="en-US"/>
               <a:t>Fifth level</a:t>
             </a:r>
-            <a:endParaRPr lang="en-US"/>
           </a:p>
         </p:txBody>
       </p:sp>
@@ -2736,7 +2724,7 @@
           <a:p>
             <a:fld id="{5BCAD085-E8A6-8845-BD4E-CB4CCA059FC4}" type="datetimeFigureOut">
               <a:rPr lang="en-US" smtClean="0"/>
-              <a:t>1/27/13</a:t>
+              <a:t>7/15/2026</a:t>
             </a:fld>
             <a:endParaRPr lang="en-US"/>
           </a:p>
@@ -3095,12 +3083,12 @@
 </file>
 
 <file path=ppt/slides/slide1.xml><?xml version="1.0" encoding="utf-8"?>
-<p:sld xmlns:a="http://schemas.openxmlformats.org/drawingml/2006/main" xmlns:p="http://schemas.openxmlformats.org/presentationml/2006/main" xmlns:r="http://schemas.openxmlformats.org/officeDocument/2006/relationships">
+<p:sld xmlns:a="http://schemas.openxmlformats.org/drawingml/2006/main" xmlns:r="http://schemas.openxmlformats.org/officeDocument/2006/relationships" xmlns:p="http://schemas.openxmlformats.org/presentationml/2006/main">
   <p:cSld>
     <p:bg>
       <p:bgPr>
         <a:solidFill>
-          <a:srgbClr val="1F4E79"/>
+          <a:srgbClr val="F8FAFC"/>
         </a:solidFill>
         <a:effectLst/>
       </p:bgPr>
@@ -3111,17 +3099,202 @@
         <p:cNvGrpSpPr/>
         <p:nvPr/>
       </p:nvGrpSpPr>
-      <p:grpSpPr/>
-      <p:sp>
-        <p:nvSpPr>
-          <p:cNvPr id="2" name="TextBox 1"/>
+      <p:grpSpPr>
+        <a:xfrm>
+          <a:off x="0" y="0"/>
+          <a:ext cx="0" cy="0"/>
+          <a:chOff x="0" y="0"/>
+          <a:chExt cx="0" cy="0"/>
+        </a:xfrm>
+      </p:grpSpPr>
+      <p:sp>
+        <p:nvSpPr>
+          <p:cNvPr id="2" name="Rectangle 1"/>
+          <p:cNvSpPr/>
+          <p:nvPr/>
+        </p:nvSpPr>
+        <p:spPr>
+          <a:xfrm>
+            <a:off x="0" y="0"/>
+            <a:ext cx="12191695" cy="347472"/>
+          </a:xfrm>
+          <a:prstGeom prst="rect">
+            <a:avLst/>
+          </a:prstGeom>
+          <a:solidFill>
+            <a:srgbClr val="0C183A"/>
+          </a:solidFill>
+          <a:ln>
+            <a:noFill/>
+          </a:ln>
+        </p:spPr>
+        <p:style>
+          <a:lnRef idx="1">
+            <a:schemeClr val="accent1"/>
+          </a:lnRef>
+          <a:fillRef idx="3">
+            <a:schemeClr val="accent1"/>
+          </a:fillRef>
+          <a:effectRef idx="2">
+            <a:schemeClr val="accent1"/>
+          </a:effectRef>
+          <a:fontRef idx="minor">
+            <a:schemeClr val="lt1"/>
+          </a:fontRef>
+        </p:style>
+        <p:txBody>
+          <a:bodyPr rtlCol="0" anchor="ctr"/>
+          <a:lstStyle/>
+          <a:p>
+            <a:pPr algn="ctr"/>
+            <a:endParaRPr/>
+          </a:p>
+        </p:txBody>
+      </p:sp>
+      <p:sp>
+        <p:nvSpPr>
+          <p:cNvPr id="3" name="Rectangle 2"/>
+          <p:cNvSpPr/>
+          <p:nvPr/>
+        </p:nvSpPr>
+        <p:spPr>
+          <a:xfrm>
+            <a:off x="10698480" y="137160"/>
+            <a:ext cx="1005840" cy="91440"/>
+          </a:xfrm>
+          <a:prstGeom prst="rect">
+            <a:avLst/>
+          </a:prstGeom>
+          <a:solidFill>
+            <a:srgbClr val="20B2AA"/>
+          </a:solidFill>
+          <a:ln>
+            <a:noFill/>
+          </a:ln>
+        </p:spPr>
+        <p:style>
+          <a:lnRef idx="1">
+            <a:schemeClr val="accent1"/>
+          </a:lnRef>
+          <a:fillRef idx="3">
+            <a:schemeClr val="accent1"/>
+          </a:fillRef>
+          <a:effectRef idx="2">
+            <a:schemeClr val="accent1"/>
+          </a:effectRef>
+          <a:fontRef idx="minor">
+            <a:schemeClr val="lt1"/>
+          </a:fontRef>
+        </p:style>
+        <p:txBody>
+          <a:bodyPr rtlCol="0" anchor="ctr"/>
+          <a:lstStyle/>
+          <a:p>
+            <a:pPr algn="ctr"/>
+            <a:endParaRPr/>
+          </a:p>
+        </p:txBody>
+      </p:sp>
+      <p:sp>
+        <p:nvSpPr>
+          <p:cNvPr id="4" name="Rectangle 3"/>
+          <p:cNvSpPr/>
+          <p:nvPr/>
+        </p:nvSpPr>
+        <p:spPr>
+          <a:xfrm>
+            <a:off x="685800" y="1005840"/>
+            <a:ext cx="10972800" cy="4480560"/>
+          </a:xfrm>
+          <a:prstGeom prst="rect">
+            <a:avLst/>
+          </a:prstGeom>
+          <a:solidFill>
+            <a:srgbClr val="FFFFFF"/>
+          </a:solidFill>
+          <a:ln>
+            <a:solidFill>
+              <a:srgbClr val="F5F7FA"/>
+            </a:solidFill>
+          </a:ln>
+        </p:spPr>
+        <p:style>
+          <a:lnRef idx="1">
+            <a:schemeClr val="accent1"/>
+          </a:lnRef>
+          <a:fillRef idx="3">
+            <a:schemeClr val="accent1"/>
+          </a:fillRef>
+          <a:effectRef idx="2">
+            <a:schemeClr val="accent1"/>
+          </a:effectRef>
+          <a:fontRef idx="minor">
+            <a:schemeClr val="lt1"/>
+          </a:fontRef>
+        </p:style>
+        <p:txBody>
+          <a:bodyPr rtlCol="0" anchor="ctr"/>
+          <a:lstStyle/>
+          <a:p>
+            <a:pPr algn="ctr"/>
+            <a:endParaRPr/>
+          </a:p>
+        </p:txBody>
+      </p:sp>
+      <p:sp>
+        <p:nvSpPr>
+          <p:cNvPr id="5" name="Rectangle 4"/>
+          <p:cNvSpPr/>
+          <p:nvPr/>
+        </p:nvSpPr>
+        <p:spPr>
+          <a:xfrm>
+            <a:off x="868680" y="1234440"/>
+            <a:ext cx="201168" cy="3840480"/>
+          </a:xfrm>
+          <a:prstGeom prst="rect">
+            <a:avLst/>
+          </a:prstGeom>
+          <a:solidFill>
+            <a:srgbClr val="20B2AA"/>
+          </a:solidFill>
+          <a:ln>
+            <a:noFill/>
+          </a:ln>
+        </p:spPr>
+        <p:style>
+          <a:lnRef idx="1">
+            <a:schemeClr val="accent1"/>
+          </a:lnRef>
+          <a:fillRef idx="3">
+            <a:schemeClr val="accent1"/>
+          </a:fillRef>
+          <a:effectRef idx="2">
+            <a:schemeClr val="accent1"/>
+          </a:effectRef>
+          <a:fontRef idx="minor">
+            <a:schemeClr val="lt1"/>
+          </a:fontRef>
+        </p:style>
+        <p:txBody>
+          <a:bodyPr rtlCol="0" anchor="ctr"/>
+          <a:lstStyle/>
+          <a:p>
+            <a:pPr algn="ctr"/>
+            <a:endParaRPr/>
+          </a:p>
+        </p:txBody>
+      </p:sp>
+      <p:sp>
+        <p:nvSpPr>
+          <p:cNvPr id="6" name="TextBox 5"/>
           <p:cNvSpPr txBox="1"/>
           <p:nvPr/>
         </p:nvSpPr>
         <p:spPr>
           <a:xfrm>
-            <a:off x="457200" y="1828800"/>
-            <a:ext cx="8229600" cy="1371600"/>
+            <a:off x="1234440" y="1325880"/>
+            <a:ext cx="9875520" cy="1828800"/>
           </a:xfrm>
           <a:prstGeom prst="rect">
             <a:avLst/>
@@ -3129,34 +3302,361 @@
           <a:noFill/>
         </p:spPr>
         <p:txBody>
-          <a:bodyPr wrap="square">
+          <a:bodyPr wrap="none">
             <a:spAutoFit/>
           </a:bodyPr>
           <a:lstStyle/>
           <a:p>
-            <a:pPr>
-              <a:defRPr sz="6000" b="1">
-                <a:solidFill>
-                  <a:srgbClr val="FFFFFF"/>
-                </a:solidFill>
-              </a:defRPr>
-            </a:pPr>
-            <a:r>
+            <a:r>
+              <a:rPr sz="3400" b="1">
+                <a:solidFill>
+                  <a:srgbClr val="0C183A"/>
+                </a:solidFill>
+                <a:latin typeface="Aptos Display"/>
+              </a:rPr>
               <a:t>VlogHub</a:t>
             </a:r>
           </a:p>
-        </p:txBody>
-      </p:sp>
-      <p:sp>
-        <p:nvSpPr>
-          <p:cNvPr id="3" name="TextBox 2"/>
+          <a:p>
+            <a:r>
+              <a:rPr sz="2400" b="1">
+                <a:solidFill>
+                  <a:srgbClr val="20B2AA"/>
+                </a:solidFill>
+                <a:latin typeface="Aptos Display"/>
+              </a:rPr>
+              <a:t>Full-Stack Vlogging Platform Project Report</a:t>
+            </a:r>
+          </a:p>
+          <a:p>
+            <a:r>
+              <a:rPr sz="1500">
+                <a:solidFill>
+                  <a:srgbClr val="2C3E50"/>
+                </a:solidFill>
+                <a:latin typeface="Aptos"/>
+              </a:rPr>
+              <a:t>Next.js frontend | Django backend | SQLite development database</a:t>
+            </a:r>
+          </a:p>
+        </p:txBody>
+      </p:sp>
+      <p:sp>
+        <p:nvSpPr>
+          <p:cNvPr id="7" name="Rectangle 6"/>
+          <p:cNvSpPr/>
+          <p:nvPr/>
+        </p:nvSpPr>
+        <p:spPr>
+          <a:xfrm>
+            <a:off x="1234440" y="3246120"/>
+            <a:ext cx="3017520" cy="1325880"/>
+          </a:xfrm>
+          <a:prstGeom prst="rect">
+            <a:avLst/>
+          </a:prstGeom>
+          <a:solidFill>
+            <a:srgbClr val="FFFFFF"/>
+          </a:solidFill>
+          <a:ln>
+            <a:solidFill>
+              <a:srgbClr val="F5F7FA"/>
+            </a:solidFill>
+          </a:ln>
+        </p:spPr>
+        <p:style>
+          <a:lnRef idx="1">
+            <a:schemeClr val="accent1"/>
+          </a:lnRef>
+          <a:fillRef idx="3">
+            <a:schemeClr val="accent1"/>
+          </a:fillRef>
+          <a:effectRef idx="2">
+            <a:schemeClr val="accent1"/>
+          </a:effectRef>
+          <a:fontRef idx="minor">
+            <a:schemeClr val="lt1"/>
+          </a:fontRef>
+        </p:style>
+        <p:txBody>
+          <a:bodyPr wrap="square" lIns="146304" tIns="109728" rIns="146304" rtlCol="0" anchor="ctr"/>
+          <a:lstStyle/>
+          <a:p>
+            <a:pPr algn="ctr"/>
+            <a:r>
+              <a:rPr sz="1600" b="1">
+                <a:solidFill>
+                  <a:srgbClr val="0C183A"/>
+                </a:solidFill>
+                <a:latin typeface="Aptos Display"/>
+              </a:rPr>
+              <a:t>Frontend</a:t>
+            </a:r>
+          </a:p>
+          <a:p>
+            <a:pPr>
+              <a:spcAft>
+                <a:spcPts val="200"/>
+              </a:spcAft>
+            </a:pPr>
+            <a:r>
+              <a:rPr sz="1200">
+                <a:solidFill>
+                  <a:srgbClr val="2C3E50"/>
+                </a:solidFill>
+                <a:latin typeface="Aptos"/>
+              </a:rPr>
+              <a:t>Next.js 16.2.1</a:t>
+            </a:r>
+          </a:p>
+          <a:p>
+            <a:pPr>
+              <a:spcAft>
+                <a:spcPts val="200"/>
+              </a:spcAft>
+            </a:pPr>
+            <a:r>
+              <a:rPr sz="1200">
+                <a:solidFill>
+                  <a:srgbClr val="2C3E50"/>
+                </a:solidFill>
+                <a:latin typeface="Aptos"/>
+              </a:rPr>
+              <a:t>React 19 + TypeScript</a:t>
+            </a:r>
+          </a:p>
+          <a:p>
+            <a:pPr>
+              <a:spcAft>
+                <a:spcPts val="200"/>
+              </a:spcAft>
+            </a:pPr>
+            <a:r>
+              <a:rPr sz="1200">
+                <a:solidFill>
+                  <a:srgbClr val="2C3E50"/>
+                </a:solidFill>
+                <a:latin typeface="Aptos"/>
+              </a:rPr>
+              <a:t>Tailwind CSS + Framer Motion</a:t>
+            </a:r>
+          </a:p>
+        </p:txBody>
+      </p:sp>
+      <p:sp>
+        <p:nvSpPr>
+          <p:cNvPr id="8" name="Rectangle 7"/>
+          <p:cNvSpPr/>
+          <p:nvPr/>
+        </p:nvSpPr>
+        <p:spPr>
+          <a:xfrm>
+            <a:off x="4434840" y="3246120"/>
+            <a:ext cx="3017520" cy="1325880"/>
+          </a:xfrm>
+          <a:prstGeom prst="rect">
+            <a:avLst/>
+          </a:prstGeom>
+          <a:solidFill>
+            <a:srgbClr val="FFFFFF"/>
+          </a:solidFill>
+          <a:ln>
+            <a:solidFill>
+              <a:srgbClr val="F5F7FA"/>
+            </a:solidFill>
+          </a:ln>
+        </p:spPr>
+        <p:style>
+          <a:lnRef idx="1">
+            <a:schemeClr val="accent1"/>
+          </a:lnRef>
+          <a:fillRef idx="3">
+            <a:schemeClr val="accent1"/>
+          </a:fillRef>
+          <a:effectRef idx="2">
+            <a:schemeClr val="accent1"/>
+          </a:effectRef>
+          <a:fontRef idx="minor">
+            <a:schemeClr val="lt1"/>
+          </a:fontRef>
+        </p:style>
+        <p:txBody>
+          <a:bodyPr wrap="square" lIns="146304" tIns="109728" rIns="146304" rtlCol="0" anchor="ctr"/>
+          <a:lstStyle/>
+          <a:p>
+            <a:pPr algn="ctr"/>
+            <a:r>
+              <a:rPr sz="1600" b="1">
+                <a:solidFill>
+                  <a:srgbClr val="0C183A"/>
+                </a:solidFill>
+                <a:latin typeface="Aptos Display"/>
+              </a:rPr>
+              <a:t>Backend</a:t>
+            </a:r>
+          </a:p>
+          <a:p>
+            <a:pPr>
+              <a:spcAft>
+                <a:spcPts val="200"/>
+              </a:spcAft>
+            </a:pPr>
+            <a:r>
+              <a:rPr sz="1200">
+                <a:solidFill>
+                  <a:srgbClr val="2C3E50"/>
+                </a:solidFill>
+                <a:latin typeface="Aptos"/>
+              </a:rPr>
+              <a:t>Django 6.0.4</a:t>
+            </a:r>
+          </a:p>
+          <a:p>
+            <a:pPr>
+              <a:spcAft>
+                <a:spcPts val="200"/>
+              </a:spcAft>
+            </a:pPr>
+            <a:r>
+              <a:rPr sz="1200">
+                <a:solidFill>
+                  <a:srgbClr val="2C3E50"/>
+                </a:solidFill>
+                <a:latin typeface="Aptos"/>
+              </a:rPr>
+              <a:t>Django REST API</a:t>
+            </a:r>
+          </a:p>
+          <a:p>
+            <a:pPr>
+              <a:spcAft>
+                <a:spcPts val="200"/>
+              </a:spcAft>
+            </a:pPr>
+            <a:r>
+              <a:rPr sz="1200">
+                <a:solidFill>
+                  <a:srgbClr val="2C3E50"/>
+                </a:solidFill>
+                <a:latin typeface="Aptos"/>
+              </a:rPr>
+              <a:t>Authentication, tracking, profiles</a:t>
+            </a:r>
+          </a:p>
+        </p:txBody>
+      </p:sp>
+      <p:sp>
+        <p:nvSpPr>
+          <p:cNvPr id="9" name="Rectangle 8"/>
+          <p:cNvSpPr/>
+          <p:nvPr/>
+        </p:nvSpPr>
+        <p:spPr>
+          <a:xfrm>
+            <a:off x="7635240" y="3246120"/>
+            <a:ext cx="3017520" cy="1325880"/>
+          </a:xfrm>
+          <a:prstGeom prst="rect">
+            <a:avLst/>
+          </a:prstGeom>
+          <a:solidFill>
+            <a:srgbClr val="FFFFFF"/>
+          </a:solidFill>
+          <a:ln>
+            <a:solidFill>
+              <a:srgbClr val="F5F7FA"/>
+            </a:solidFill>
+          </a:ln>
+        </p:spPr>
+        <p:style>
+          <a:lnRef idx="1">
+            <a:schemeClr val="accent1"/>
+          </a:lnRef>
+          <a:fillRef idx="3">
+            <a:schemeClr val="accent1"/>
+          </a:fillRef>
+          <a:effectRef idx="2">
+            <a:schemeClr val="accent1"/>
+          </a:effectRef>
+          <a:fontRef idx="minor">
+            <a:schemeClr val="lt1"/>
+          </a:fontRef>
+        </p:style>
+        <p:txBody>
+          <a:bodyPr wrap="square" lIns="146304" tIns="109728" rIns="146304" rtlCol="0" anchor="ctr"/>
+          <a:lstStyle/>
+          <a:p>
+            <a:pPr algn="ctr"/>
+            <a:r>
+              <a:rPr sz="1600" b="1">
+                <a:solidFill>
+                  <a:srgbClr val="0C183A"/>
+                </a:solidFill>
+                <a:latin typeface="Aptos Display"/>
+              </a:rPr>
+              <a:t>Scope</a:t>
+            </a:r>
+          </a:p>
+          <a:p>
+            <a:pPr>
+              <a:spcAft>
+                <a:spcPts val="200"/>
+              </a:spcAft>
+            </a:pPr>
+            <a:r>
+              <a:rPr sz="1200">
+                <a:solidFill>
+                  <a:srgbClr val="2C3E50"/>
+                </a:solidFill>
+                <a:latin typeface="Aptos"/>
+              </a:rPr>
+              <a:t>20+ routes</a:t>
+            </a:r>
+          </a:p>
+          <a:p>
+            <a:pPr>
+              <a:spcAft>
+                <a:spcPts val="200"/>
+              </a:spcAft>
+            </a:pPr>
+            <a:r>
+              <a:rPr sz="1200">
+                <a:solidFill>
+                  <a:srgbClr val="2C3E50"/>
+                </a:solidFill>
+                <a:latin typeface="Aptos"/>
+              </a:rPr>
+              <a:t>Creator-focused UX</a:t>
+            </a:r>
+          </a:p>
+          <a:p>
+            <a:pPr>
+              <a:spcAft>
+                <a:spcPts val="200"/>
+              </a:spcAft>
+            </a:pPr>
+            <a:r>
+              <a:rPr sz="1200">
+                <a:solidFill>
+                  <a:srgbClr val="2C3E50"/>
+                </a:solidFill>
+                <a:latin typeface="Aptos"/>
+              </a:rPr>
+              <a:t>Video, community, and analytics</a:t>
+            </a:r>
+          </a:p>
+        </p:txBody>
+      </p:sp>
+      <p:sp>
+        <p:nvSpPr>
+          <p:cNvPr id="10" name="TextBox 9"/>
           <p:cNvSpPr txBox="1"/>
           <p:nvPr/>
         </p:nvSpPr>
         <p:spPr>
           <a:xfrm>
-            <a:off x="457200" y="3383280"/>
-            <a:ext cx="8229600" cy="914400"/>
+            <a:off x="502920" y="6400800"/>
+            <a:ext cx="10972800" cy="228600"/>
           </a:xfrm>
           <a:prstGeom prst="rect">
             <a:avLst/>
@@ -3169,50 +3669,15 @@
           </a:bodyPr>
           <a:lstStyle/>
           <a:p>
-            <a:pPr>
-              <a:defRPr sz="2800">
-                <a:solidFill>
-                  <a:srgbClr val="DCDCDC"/>
-                </a:solidFill>
-              </a:defRPr>
-            </a:pPr>
-            <a:r>
-              <a:t>A Complete Vlogging Platform</a:t>
-            </a:r>
-          </a:p>
-        </p:txBody>
-      </p:sp>
-      <p:sp>
-        <p:nvSpPr>
-          <p:cNvPr id="4" name="TextBox 3"/>
-          <p:cNvSpPr txBox="1"/>
-          <p:nvPr/>
-        </p:nvSpPr>
-        <p:spPr>
-          <a:xfrm>
-            <a:off x="457200" y="5486400"/>
-            <a:ext cx="8229600" cy="457200"/>
-          </a:xfrm>
-          <a:prstGeom prst="rect">
-            <a:avLst/>
-          </a:prstGeom>
-          <a:noFill/>
-        </p:spPr>
-        <p:txBody>
-          <a:bodyPr wrap="none">
-            <a:spAutoFit/>
-          </a:bodyPr>
-          <a:lstStyle/>
-          <a:p>
-            <a:pPr>
-              <a:defRPr sz="1800">
-                <a:solidFill>
-                  <a:srgbClr val="C8C8C8"/>
-                </a:solidFill>
-              </a:defRPr>
-            </a:pPr>
-            <a:r>
-              <a:t>June 9, 2026</a:t>
+            <a:pPr algn="r"/>
+            <a:r>
+              <a:rPr sz="900">
+                <a:solidFill>
+                  <a:srgbClr val="788291"/>
+                </a:solidFill>
+                <a:latin typeface="Aptos"/>
+              </a:rPr>
+              <a:t>Project report generated from repository contents</a:t>
             </a:r>
           </a:p>
         </p:txBody>
@@ -3226,12 +3691,12 @@
 </file>
 
 <file path=ppt/slides/slide10.xml><?xml version="1.0" encoding="utf-8"?>
-<p:sld xmlns:a="http://schemas.openxmlformats.org/drawingml/2006/main" xmlns:p="http://schemas.openxmlformats.org/presentationml/2006/main" xmlns:r="http://schemas.openxmlformats.org/officeDocument/2006/relationships">
+<p:sld xmlns:a="http://schemas.openxmlformats.org/drawingml/2006/main" xmlns:r="http://schemas.openxmlformats.org/officeDocument/2006/relationships" xmlns:p="http://schemas.openxmlformats.org/presentationml/2006/main">
   <p:cSld>
     <p:bg>
       <p:bgPr>
         <a:solidFill>
-          <a:srgbClr val="FFFFFF"/>
+          <a:srgbClr val="F8FAFC"/>
         </a:solidFill>
         <a:effectLst/>
       </p:bgPr>
@@ -3242,7 +3707,14 @@
         <p:cNvGrpSpPr/>
         <p:nvPr/>
       </p:nvGrpSpPr>
-      <p:grpSpPr/>
+      <p:grpSpPr>
+        <a:xfrm>
+          <a:off x="0" y="0"/>
+          <a:ext cx="0" cy="0"/>
+          <a:chOff x="0" y="0"/>
+          <a:chExt cx="0" cy="0"/>
+        </a:xfrm>
+      </p:grpSpPr>
       <p:sp>
         <p:nvSpPr>
           <p:cNvPr id="2" name="Rectangle 1"/>
@@ -3252,18 +3724,16 @@
         <p:spPr>
           <a:xfrm>
             <a:off x="0" y="0"/>
-            <a:ext cx="9144000" cy="731520"/>
+            <a:ext cx="12191695" cy="347472"/>
           </a:xfrm>
           <a:prstGeom prst="rect">
             <a:avLst/>
           </a:prstGeom>
           <a:solidFill>
-            <a:srgbClr val="1F4E79"/>
+            <a:srgbClr val="0C183A"/>
           </a:solidFill>
           <a:ln>
-            <a:solidFill>
-              <a:srgbClr val="1F4E79"/>
-            </a:solidFill>
+            <a:noFill/>
           </a:ln>
         </p:spPr>
         <p:style>
@@ -3285,6 +3755,7 @@
           <a:lstStyle/>
           <a:p>
             <a:pPr algn="ctr"/>
+            <a:endParaRPr/>
           </a:p>
         </p:txBody>
       </p:sp>
@@ -3296,8 +3767,8 @@
         </p:nvSpPr>
         <p:spPr>
           <a:xfrm>
-            <a:off x="457200" y="137160"/>
-            <a:ext cx="8229600" cy="548640"/>
+            <a:off x="502920" y="502920"/>
+            <a:ext cx="10972800" cy="731520"/>
           </a:xfrm>
           <a:prstGeom prst="rect">
             <a:avLst/>
@@ -3310,29 +3781,178 @@
           </a:bodyPr>
           <a:lstStyle/>
           <a:p>
-            <a:pPr>
-              <a:defRPr sz="4000" b="1">
-                <a:solidFill>
-                  <a:srgbClr val="FFFFFF"/>
-                </a:solidFill>
-              </a:defRPr>
-            </a:pPr>
-            <a:r>
-              <a:t>Development Status</a:t>
-            </a:r>
-          </a:p>
-        </p:txBody>
-      </p:sp>
-      <p:sp>
-        <p:nvSpPr>
-          <p:cNvPr id="4" name="TextBox 3"/>
+            <a:r>
+              <a:rPr sz="2800" b="1">
+                <a:solidFill>
+                  <a:srgbClr val="0C183A"/>
+                </a:solidFill>
+                <a:latin typeface="Aptos Display"/>
+              </a:rPr>
+              <a:t>Roadmap</a:t>
+            </a:r>
+          </a:p>
+          <a:p>
+            <a:pPr>
+              <a:spcBef>
+                <a:spcPts val="400"/>
+              </a:spcBef>
+            </a:pPr>
+            <a:r>
+              <a:rPr sz="1200">
+                <a:solidFill>
+                  <a:srgbClr val="788291"/>
+                </a:solidFill>
+                <a:latin typeface="Aptos"/>
+              </a:rPr>
+              <a:t>Likely next implementation areas</a:t>
+            </a:r>
+          </a:p>
+        </p:txBody>
+      </p:sp>
+      <p:sp>
+        <p:nvSpPr>
+          <p:cNvPr id="4" name="Rectangle 3"/>
+          <p:cNvSpPr/>
+          <p:nvPr/>
+        </p:nvSpPr>
+        <p:spPr>
+          <a:xfrm>
+            <a:off x="640080" y="1280160"/>
+            <a:ext cx="10881360" cy="4480560"/>
+          </a:xfrm>
+          <a:prstGeom prst="rect">
+            <a:avLst/>
+          </a:prstGeom>
+          <a:solidFill>
+            <a:srgbClr val="FFFFFF"/>
+          </a:solidFill>
+          <a:ln>
+            <a:solidFill>
+              <a:srgbClr val="F5F7FA"/>
+            </a:solidFill>
+          </a:ln>
+        </p:spPr>
+        <p:style>
+          <a:lnRef idx="1">
+            <a:schemeClr val="accent1"/>
+          </a:lnRef>
+          <a:fillRef idx="3">
+            <a:schemeClr val="accent1"/>
+          </a:fillRef>
+          <a:effectRef idx="2">
+            <a:schemeClr val="accent1"/>
+          </a:effectRef>
+          <a:fontRef idx="minor">
+            <a:schemeClr val="lt1"/>
+          </a:fontRef>
+        </p:style>
+        <p:txBody>
+          <a:bodyPr wrap="square" lIns="146304" tIns="109728" rIns="146304" rtlCol="0" anchor="ctr"/>
+          <a:lstStyle/>
+          <a:p>
+            <a:pPr algn="ctr"/>
+            <a:r>
+              <a:rPr sz="1600" b="1">
+                <a:solidFill>
+                  <a:srgbClr val="0C183A"/>
+                </a:solidFill>
+                <a:latin typeface="Aptos Display"/>
+              </a:rPr>
+              <a:t>Planned Enhancements</a:t>
+            </a:r>
+          </a:p>
+          <a:p>
+            <a:pPr>
+              <a:spcAft>
+                <a:spcPts val="200"/>
+              </a:spcAft>
+            </a:pPr>
+            <a:r>
+              <a:rPr sz="1200">
+                <a:solidFill>
+                  <a:srgbClr val="2C3E50"/>
+                </a:solidFill>
+                <a:latin typeface="Aptos"/>
+              </a:rPr>
+              <a:t>Enable the creator merch shop and payment processing.</a:t>
+            </a:r>
+          </a:p>
+          <a:p>
+            <a:pPr>
+              <a:spcAft>
+                <a:spcPts val="200"/>
+              </a:spcAft>
+            </a:pPr>
+            <a:r>
+              <a:rPr sz="1200">
+                <a:solidFill>
+                  <a:srgbClr val="2C3E50"/>
+                </a:solidFill>
+                <a:latin typeface="Aptos"/>
+              </a:rPr>
+              <a:t>Add live streaming integration and richer Super Chat monetization.</a:t>
+            </a:r>
+          </a:p>
+          <a:p>
+            <a:pPr>
+              <a:spcAft>
+                <a:spcPts val="200"/>
+              </a:spcAft>
+            </a:pPr>
+            <a:r>
+              <a:rPr sz="1200">
+                <a:solidFill>
+                  <a:srgbClr val="2C3E50"/>
+                </a:solidFill>
+                <a:latin typeface="Aptos"/>
+              </a:rPr>
+              <a:t>Build a more advanced search experience with filters.</a:t>
+            </a:r>
+          </a:p>
+          <a:p>
+            <a:pPr>
+              <a:spcAft>
+                <a:spcPts val="200"/>
+              </a:spcAft>
+            </a:pPr>
+            <a:r>
+              <a:rPr sz="1200">
+                <a:solidFill>
+                  <a:srgbClr val="2C3E50"/>
+                </a:solidFill>
+                <a:latin typeface="Aptos"/>
+              </a:rPr>
+              <a:t>Add analytics dashboards, notifications, and recommendation features.</a:t>
+            </a:r>
+          </a:p>
+          <a:p>
+            <a:pPr>
+              <a:spcAft>
+                <a:spcPts val="200"/>
+              </a:spcAft>
+            </a:pPr>
+            <a:r>
+              <a:rPr sz="1200">
+                <a:solidFill>
+                  <a:srgbClr val="2C3E50"/>
+                </a:solidFill>
+                <a:latin typeface="Aptos"/>
+              </a:rPr>
+              <a:t>Improve video upload and transcoding pipelines.</a:t>
+            </a:r>
+          </a:p>
+        </p:txBody>
+      </p:sp>
+      <p:sp>
+        <p:nvSpPr>
+          <p:cNvPr id="5" name="TextBox 4"/>
           <p:cNvSpPr txBox="1"/>
           <p:nvPr/>
         </p:nvSpPr>
         <p:spPr>
           <a:xfrm>
-            <a:off x="274320" y="914400"/>
-            <a:ext cx="4114800" cy="5029200"/>
+            <a:off x="502920" y="6400800"/>
+            <a:ext cx="10972800" cy="228600"/>
           </a:xfrm>
           <a:prstGeom prst="rect">
             <a:avLst/>
@@ -3340,265 +3960,20 @@
           <a:noFill/>
         </p:spPr>
         <p:txBody>
-          <a:bodyPr wrap="square">
+          <a:bodyPr wrap="none">
             <a:spAutoFit/>
           </a:bodyPr>
           <a:lstStyle/>
           <a:p>
-            <a:pPr>
-              <a:defRPr sz="2200" b="1">
-                <a:solidFill>
-                  <a:srgbClr val="C00000"/>
-                </a:solidFill>
-              </a:defRPr>
-            </a:pPr>
-            <a:r>
-              <a:t>✅ Completed</a:t>
-            </a:r>
-          </a:p>
-          <a:p>
-            <a:pPr>
-              <a:spcBef>
-                <a:spcPts val="400"/>
-              </a:spcBef>
-              <a:defRPr sz="1400">
-                <a:solidFill>
-                  <a:srgbClr val="333333"/>
-                </a:solidFill>
-              </a:defRPr>
-            </a:pPr>
-            <a:r>
-              <a:t>✓ Frontend structure</a:t>
-            </a:r>
-          </a:p>
-          <a:p>
-            <a:pPr>
-              <a:spcBef>
-                <a:spcPts val="400"/>
-              </a:spcBef>
-              <a:defRPr sz="1400">
-                <a:solidFill>
-                  <a:srgbClr val="333333"/>
-                </a:solidFill>
-              </a:defRPr>
-            </a:pPr>
-            <a:r>
-              <a:t>✓ Backend API</a:t>
-            </a:r>
-          </a:p>
-          <a:p>
-            <a:pPr>
-              <a:spcBef>
-                <a:spcPts val="400"/>
-              </a:spcBef>
-              <a:defRPr sz="1400">
-                <a:solidFill>
-                  <a:srgbClr val="333333"/>
-                </a:solidFill>
-              </a:defRPr>
-            </a:pPr>
-            <a:r>
-              <a:t>✓ Database models</a:t>
-            </a:r>
-          </a:p>
-          <a:p>
-            <a:pPr>
-              <a:spcBef>
-                <a:spcPts val="400"/>
-              </a:spcBef>
-              <a:defRPr sz="1400">
-                <a:solidFill>
-                  <a:srgbClr val="333333"/>
-                </a:solidFill>
-              </a:defRPr>
-            </a:pPr>
-            <a:r>
-              <a:t>✓ OAuth integration</a:t>
-            </a:r>
-          </a:p>
-          <a:p>
-            <a:pPr>
-              <a:spcBef>
-                <a:spcPts val="400"/>
-              </a:spcBef>
-              <a:defRPr sz="1400">
-                <a:solidFill>
-                  <a:srgbClr val="333333"/>
-                </a:solidFill>
-              </a:defRPr>
-            </a:pPr>
-            <a:r>
-              <a:t>✓ Comment system</a:t>
-            </a:r>
-          </a:p>
-          <a:p>
-            <a:pPr>
-              <a:spcBef>
-                <a:spcPts val="400"/>
-              </a:spcBef>
-              <a:defRPr sz="1400">
-                <a:solidFill>
-                  <a:srgbClr val="333333"/>
-                </a:solidFill>
-              </a:defRPr>
-            </a:pPr>
-            <a:r>
-              <a:t>✓ Theme support</a:t>
-            </a:r>
-          </a:p>
-          <a:p>
-            <a:pPr>
-              <a:spcBef>
-                <a:spcPts val="400"/>
-              </a:spcBef>
-              <a:defRPr sz="1400">
-                <a:solidFill>
-                  <a:srgbClr val="333333"/>
-                </a:solidFill>
-              </a:defRPr>
-            </a:pPr>
-            <a:r>
-              <a:t>✓ Analytics tracking</a:t>
-            </a:r>
-          </a:p>
-        </p:txBody>
-      </p:sp>
-      <p:sp>
-        <p:nvSpPr>
-          <p:cNvPr id="5" name="TextBox 4"/>
-          <p:cNvSpPr txBox="1"/>
-          <p:nvPr/>
-        </p:nvSpPr>
-        <p:spPr>
-          <a:xfrm>
-            <a:off x="4754880" y="914400"/>
-            <a:ext cx="4114800" cy="5029200"/>
-          </a:xfrm>
-          <a:prstGeom prst="rect">
-            <a:avLst/>
-          </a:prstGeom>
-          <a:noFill/>
-        </p:spPr>
-        <p:txBody>
-          <a:bodyPr wrap="square">
-            <a:spAutoFit/>
-          </a:bodyPr>
-          <a:lstStyle/>
-          <a:p>
-            <a:pPr>
-              <a:defRPr sz="2200" b="1">
-                <a:solidFill>
-                  <a:srgbClr val="C00000"/>
-                </a:solidFill>
-              </a:defRPr>
-            </a:pPr>
-            <a:r>
-              <a:t>⚠️ Planned / 🔮 Future</a:t>
-            </a:r>
-          </a:p>
-          <a:p>
-            <a:pPr>
-              <a:spcBef>
-                <a:spcPts val="400"/>
-              </a:spcBef>
-              <a:defRPr sz="1400">
-                <a:solidFill>
-                  <a:srgbClr val="333333"/>
-                </a:solidFill>
-              </a:defRPr>
-            </a:pPr>
-            <a:r>
-              <a:t>⚠ Shop activation</a:t>
-            </a:r>
-          </a:p>
-          <a:p>
-            <a:pPr>
-              <a:spcBef>
-                <a:spcPts val="400"/>
-              </a:spcBef>
-              <a:defRPr sz="1400">
-                <a:solidFill>
-                  <a:srgbClr val="333333"/>
-                </a:solidFill>
-              </a:defRPr>
-            </a:pPr>
-            <a:r>
-              <a:t>⚠ Live streaming</a:t>
-            </a:r>
-          </a:p>
-          <a:p>
-            <a:pPr>
-              <a:spcBef>
-                <a:spcPts val="400"/>
-              </a:spcBef>
-              <a:defRPr sz="1400">
-                <a:solidFill>
-                  <a:srgbClr val="333333"/>
-                </a:solidFill>
-              </a:defRPr>
-            </a:pPr>
-            <a:r>
-              <a:t>⚠ Super Chat</a:t>
-            </a:r>
-          </a:p>
-          <a:p>
-            <a:pPr>
-              <a:spcBef>
-                <a:spcPts val="400"/>
-              </a:spcBef>
-              <a:defRPr sz="1400">
-                <a:solidFill>
-                  <a:srgbClr val="333333"/>
-                </a:solidFill>
-              </a:defRPr>
-            </a:pPr>
-            <a:r>
-              <a:t>🔮 Admin dashboard</a:t>
-            </a:r>
-          </a:p>
-          <a:p>
-            <a:pPr>
-              <a:spcBef>
-                <a:spcPts val="400"/>
-              </a:spcBef>
-              <a:defRPr sz="1400">
-                <a:solidFill>
-                  <a:srgbClr val="333333"/>
-                </a:solidFill>
-              </a:defRPr>
-            </a:pPr>
-            <a:r>
-              <a:t>🔮 Video upload</a:t>
-            </a:r>
-          </a:p>
-          <a:p>
-            <a:pPr>
-              <a:spcBef>
-                <a:spcPts val="400"/>
-              </a:spcBef>
-              <a:defRPr sz="1400">
-                <a:solidFill>
-                  <a:srgbClr val="333333"/>
-                </a:solidFill>
-              </a:defRPr>
-            </a:pPr>
-            <a:r>
-              <a:t>🔮 Recommendations</a:t>
-            </a:r>
-          </a:p>
-          <a:p>
-            <a:pPr>
-              <a:spcBef>
-                <a:spcPts val="400"/>
-              </a:spcBef>
-              <a:defRPr sz="1400">
-                <a:solidFill>
-                  <a:srgbClr val="333333"/>
-                </a:solidFill>
-              </a:defRPr>
-            </a:pPr>
-            <a:r>
-              <a:t>🔮 CDN integration</a:t>
+            <a:pPr algn="r"/>
+            <a:r>
+              <a:rPr sz="900">
+                <a:solidFill>
+                  <a:srgbClr val="788291"/>
+                </a:solidFill>
+                <a:latin typeface="Aptos"/>
+              </a:rPr>
+              <a:t>End of report</a:t>
             </a:r>
           </a:p>
         </p:txBody>
@@ -3611,13 +3986,13 @@
 </p:sld>
 </file>
 
-<file path=ppt/slides/slide11.xml><?xml version="1.0" encoding="utf-8"?>
-<p:sld xmlns:a="http://schemas.openxmlformats.org/drawingml/2006/main" xmlns:p="http://schemas.openxmlformats.org/presentationml/2006/main" xmlns:r="http://schemas.openxmlformats.org/officeDocument/2006/relationships">
+<file path=ppt/slides/slide2.xml><?xml version="1.0" encoding="utf-8"?>
+<p:sld xmlns:a="http://schemas.openxmlformats.org/drawingml/2006/main" xmlns:r="http://schemas.openxmlformats.org/officeDocument/2006/relationships" xmlns:p="http://schemas.openxmlformats.org/presentationml/2006/main">
   <p:cSld>
     <p:bg>
       <p:bgPr>
         <a:solidFill>
-          <a:srgbClr val="FFFFFF"/>
+          <a:srgbClr val="F8FAFC"/>
         </a:solidFill>
         <a:effectLst/>
       </p:bgPr>
@@ -3628,7 +4003,14 @@
         <p:cNvGrpSpPr/>
         <p:nvPr/>
       </p:nvGrpSpPr>
-      <p:grpSpPr/>
+      <p:grpSpPr>
+        <a:xfrm>
+          <a:off x="0" y="0"/>
+          <a:ext cx="0" cy="0"/>
+          <a:chOff x="0" y="0"/>
+          <a:chExt cx="0" cy="0"/>
+        </a:xfrm>
+      </p:grpSpPr>
       <p:sp>
         <p:nvSpPr>
           <p:cNvPr id="2" name="Rectangle 1"/>
@@ -3638,18 +4020,16 @@
         <p:spPr>
           <a:xfrm>
             <a:off x="0" y="0"/>
-            <a:ext cx="9144000" cy="731520"/>
+            <a:ext cx="12191695" cy="347472"/>
           </a:xfrm>
           <a:prstGeom prst="rect">
             <a:avLst/>
           </a:prstGeom>
           <a:solidFill>
-            <a:srgbClr val="1F4E79"/>
+            <a:srgbClr val="0C183A"/>
           </a:solidFill>
           <a:ln>
-            <a:solidFill>
-              <a:srgbClr val="1F4E79"/>
-            </a:solidFill>
+            <a:noFill/>
           </a:ln>
         </p:spPr>
         <p:style>
@@ -3671,6 +4051,7 @@
           <a:lstStyle/>
           <a:p>
             <a:pPr algn="ctr"/>
+            <a:endParaRPr/>
           </a:p>
         </p:txBody>
       </p:sp>
@@ -3682,8 +4063,8 @@
         </p:nvSpPr>
         <p:spPr>
           <a:xfrm>
-            <a:off x="457200" y="137160"/>
-            <a:ext cx="8229600" cy="548640"/>
+            <a:off x="502920" y="502920"/>
+            <a:ext cx="10972800" cy="731520"/>
           </a:xfrm>
           <a:prstGeom prst="rect">
             <a:avLst/>
@@ -3696,29 +4077,248 @@
           </a:bodyPr>
           <a:lstStyle/>
           <a:p>
-            <a:pPr>
-              <a:defRPr sz="4000" b="1">
-                <a:solidFill>
-                  <a:srgbClr val="FFFFFF"/>
-                </a:solidFill>
-              </a:defRPr>
-            </a:pPr>
-            <a:r>
-              <a:t>Deployment Architecture</a:t>
-            </a:r>
-          </a:p>
-        </p:txBody>
-      </p:sp>
-      <p:sp>
-        <p:nvSpPr>
-          <p:cNvPr id="4" name="TextBox 3"/>
+            <a:r>
+              <a:rPr sz="2800" b="1">
+                <a:solidFill>
+                  <a:srgbClr val="0C183A"/>
+                </a:solidFill>
+                <a:latin typeface="Aptos Display"/>
+              </a:rPr>
+              <a:t>Executive Summary</a:t>
+            </a:r>
+          </a:p>
+          <a:p>
+            <a:pPr>
+              <a:spcBef>
+                <a:spcPts val="400"/>
+              </a:spcBef>
+            </a:pPr>
+            <a:r>
+              <a:rPr sz="1200">
+                <a:solidFill>
+                  <a:srgbClr val="788291"/>
+                </a:solidFill>
+                <a:latin typeface="Aptos"/>
+              </a:rPr>
+              <a:t>What the platform is and why it exists</a:t>
+            </a:r>
+          </a:p>
+        </p:txBody>
+      </p:sp>
+      <p:sp>
+        <p:nvSpPr>
+          <p:cNvPr id="4" name="Rectangle 3"/>
+          <p:cNvSpPr/>
+          <p:nvPr/>
+        </p:nvSpPr>
+        <p:spPr>
+          <a:xfrm>
+            <a:off x="594360" y="1280160"/>
+            <a:ext cx="5440680" cy="4389120"/>
+          </a:xfrm>
+          <a:prstGeom prst="rect">
+            <a:avLst/>
+          </a:prstGeom>
+          <a:solidFill>
+            <a:srgbClr val="FFFFFF"/>
+          </a:solidFill>
+          <a:ln>
+            <a:solidFill>
+              <a:srgbClr val="F5F7FA"/>
+            </a:solidFill>
+          </a:ln>
+        </p:spPr>
+        <p:style>
+          <a:lnRef idx="1">
+            <a:schemeClr val="accent1"/>
+          </a:lnRef>
+          <a:fillRef idx="3">
+            <a:schemeClr val="accent1"/>
+          </a:fillRef>
+          <a:effectRef idx="2">
+            <a:schemeClr val="accent1"/>
+          </a:effectRef>
+          <a:fontRef idx="minor">
+            <a:schemeClr val="lt1"/>
+          </a:fontRef>
+        </p:style>
+        <p:txBody>
+          <a:bodyPr wrap="square" lIns="146304" tIns="109728" rIns="146304" rtlCol="0" anchor="ctr"/>
+          <a:lstStyle/>
+          <a:p>
+            <a:pPr algn="ctr"/>
+            <a:r>
+              <a:rPr sz="1600" b="1">
+                <a:solidFill>
+                  <a:srgbClr val="0C183A"/>
+                </a:solidFill>
+                <a:latin typeface="Aptos Display"/>
+              </a:rPr>
+              <a:t>Project Overview</a:t>
+            </a:r>
+          </a:p>
+          <a:p>
+            <a:pPr>
+              <a:spcAft>
+                <a:spcPts val="200"/>
+              </a:spcAft>
+            </a:pPr>
+            <a:r>
+              <a:rPr sz="1200">
+                <a:solidFill>
+                  <a:srgbClr val="2C3E50"/>
+                </a:solidFill>
+                <a:latin typeface="Aptos"/>
+              </a:rPr>
+              <a:t>VlogHub is a full-stack platform for vloggers to publish content, engage audiences, and support monetization.</a:t>
+            </a:r>
+          </a:p>
+          <a:p>
+            <a:pPr>
+              <a:spcAft>
+                <a:spcPts val="200"/>
+              </a:spcAft>
+            </a:pPr>
+            <a:r>
+              <a:rPr sz="1200">
+                <a:solidFill>
+                  <a:srgbClr val="2C3E50"/>
+                </a:solidFill>
+                <a:latin typeface="Aptos"/>
+              </a:rPr>
+              <a:t>The frontend focuses on a polished creator experience with responsive layouts and animated interaction patterns.</a:t>
+            </a:r>
+          </a:p>
+          <a:p>
+            <a:pPr>
+              <a:spcAft>
+                <a:spcPts val="200"/>
+              </a:spcAft>
+            </a:pPr>
+            <a:r>
+              <a:rPr sz="1200">
+                <a:solidFill>
+                  <a:srgbClr val="2C3E50"/>
+                </a:solidFill>
+                <a:latin typeface="Aptos"/>
+              </a:rPr>
+              <a:t>The backend provides user accounts, profiles, videos, comments, password recovery, and tracking events.</a:t>
+            </a:r>
+          </a:p>
+        </p:txBody>
+      </p:sp>
+      <p:sp>
+        <p:nvSpPr>
+          <p:cNvPr id="5" name="Rectangle 4"/>
+          <p:cNvSpPr/>
+          <p:nvPr/>
+        </p:nvSpPr>
+        <p:spPr>
+          <a:xfrm>
+            <a:off x="6172200" y="1289992"/>
+            <a:ext cx="5440680" cy="4389120"/>
+          </a:xfrm>
+          <a:prstGeom prst="rect">
+            <a:avLst/>
+          </a:prstGeom>
+          <a:solidFill>
+            <a:srgbClr val="FAFCFF"/>
+          </a:solidFill>
+          <a:ln>
+            <a:solidFill>
+              <a:srgbClr val="F5F7FA"/>
+            </a:solidFill>
+          </a:ln>
+        </p:spPr>
+        <p:style>
+          <a:lnRef idx="1">
+            <a:schemeClr val="accent1"/>
+          </a:lnRef>
+          <a:fillRef idx="3">
+            <a:schemeClr val="accent1"/>
+          </a:fillRef>
+          <a:effectRef idx="2">
+            <a:schemeClr val="accent1"/>
+          </a:effectRef>
+          <a:fontRef idx="minor">
+            <a:schemeClr val="lt1"/>
+          </a:fontRef>
+        </p:style>
+        <p:txBody>
+          <a:bodyPr wrap="square" lIns="146304" tIns="109728" rIns="146304" rtlCol="0" anchor="ctr"/>
+          <a:lstStyle/>
+          <a:p>
+            <a:pPr algn="ctr"/>
+            <a:r>
+              <a:rPr sz="1600" b="1">
+                <a:solidFill>
+                  <a:srgbClr val="0C183A"/>
+                </a:solidFill>
+                <a:latin typeface="Aptos Display"/>
+              </a:rPr>
+              <a:t>Current Status</a:t>
+            </a:r>
+          </a:p>
+          <a:p>
+            <a:pPr>
+              <a:spcAft>
+                <a:spcPts val="200"/>
+              </a:spcAft>
+            </a:pPr>
+            <a:r>
+              <a:rPr sz="1200">
+                <a:solidFill>
+                  <a:srgbClr val="2C3E50"/>
+                </a:solidFill>
+                <a:latin typeface="Aptos"/>
+              </a:rPr>
+              <a:t>Frontend and backend are both active in local development.</a:t>
+            </a:r>
+          </a:p>
+          <a:p>
+            <a:pPr>
+              <a:spcAft>
+                <a:spcPts val="200"/>
+              </a:spcAft>
+            </a:pPr>
+            <a:r>
+              <a:rPr sz="1200">
+                <a:solidFill>
+                  <a:srgbClr val="2C3E50"/>
+                </a:solidFill>
+                <a:latin typeface="Aptos"/>
+              </a:rPr>
+              <a:t>Shop functionality is intentionally disabled for now and planned for a future release.</a:t>
+            </a:r>
+          </a:p>
+          <a:p>
+            <a:pPr>
+              <a:spcAft>
+                <a:spcPts val="200"/>
+              </a:spcAft>
+            </a:pPr>
+            <a:r>
+              <a:rPr sz="1200">
+                <a:solidFill>
+                  <a:srgbClr val="2C3E50"/>
+                </a:solidFill>
+                <a:latin typeface="Aptos"/>
+              </a:rPr>
+              <a:t>The codebase already includes the major pages, API routes, and data models required for the platform.</a:t>
+            </a:r>
+          </a:p>
+        </p:txBody>
+      </p:sp>
+      <p:sp>
+        <p:nvSpPr>
+          <p:cNvPr id="6" name="TextBox 5"/>
           <p:cNvSpPr txBox="1"/>
           <p:nvPr/>
         </p:nvSpPr>
         <p:spPr>
           <a:xfrm>
-            <a:off x="274320" y="914400"/>
-            <a:ext cx="4114800" cy="5029200"/>
+            <a:off x="502920" y="6400800"/>
+            <a:ext cx="10972800" cy="228600"/>
           </a:xfrm>
           <a:prstGeom prst="rect">
             <a:avLst/>
@@ -3726,265 +4326,20 @@
           <a:noFill/>
         </p:spPr>
         <p:txBody>
-          <a:bodyPr wrap="square">
+          <a:bodyPr wrap="none">
             <a:spAutoFit/>
           </a:bodyPr>
           <a:lstStyle/>
           <a:p>
-            <a:pPr>
-              <a:defRPr sz="2200" b="1">
-                <a:solidFill>
-                  <a:srgbClr val="C00000"/>
-                </a:solidFill>
-              </a:defRPr>
-            </a:pPr>
-            <a:r>
-              <a:t>Production Stack</a:t>
-            </a:r>
-          </a:p>
-          <a:p>
-            <a:pPr>
-              <a:spcBef>
-                <a:spcPts val="400"/>
-              </a:spcBef>
-              <a:defRPr sz="1400">
-                <a:solidFill>
-                  <a:srgbClr val="333333"/>
-                </a:solidFill>
-              </a:defRPr>
-            </a:pPr>
-            <a:r>
-              <a:t>Frontend: Vercel</a:t>
-            </a:r>
-          </a:p>
-          <a:p>
-            <a:pPr>
-              <a:spcBef>
-                <a:spcPts val="400"/>
-              </a:spcBef>
-              <a:defRPr sz="1400">
-                <a:solidFill>
-                  <a:srgbClr val="333333"/>
-                </a:solidFill>
-              </a:defRPr>
-            </a:pPr>
-            <a:r>
-              <a:t>Backend: Render</a:t>
-            </a:r>
-          </a:p>
-          <a:p>
-            <a:pPr>
-              <a:spcBef>
-                <a:spcPts val="400"/>
-              </a:spcBef>
-              <a:defRPr sz="1400">
-                <a:solidFill>
-                  <a:srgbClr val="333333"/>
-                </a:solidFill>
-              </a:defRPr>
-            </a:pPr>
-            <a:r>
-              <a:t>Database: PostgreSQL</a:t>
-            </a:r>
-          </a:p>
-          <a:p>
-            <a:pPr>
-              <a:spcBef>
-                <a:spcPts val="400"/>
-              </a:spcBef>
-              <a:defRPr sz="1400">
-                <a:solidFill>
-                  <a:srgbClr val="333333"/>
-                </a:solidFill>
-              </a:defRPr>
-            </a:pPr>
-            <a:r>
-              <a:t>  (Render/Railway/Neon)</a:t>
-            </a:r>
-          </a:p>
-          <a:p>
-            <a:pPr>
-              <a:spcBef>
-                <a:spcPts val="400"/>
-              </a:spcBef>
-              <a:defRPr sz="1400">
-                <a:solidFill>
-                  <a:srgbClr val="333333"/>
-                </a:solidFill>
-              </a:defRPr>
-            </a:pPr>
-            <a:r>
-              <a:t>Static Files: WhiteNoise</a:t>
-            </a:r>
-          </a:p>
-          <a:p>
-            <a:pPr>
-              <a:spcBef>
-                <a:spcPts val="400"/>
-              </a:spcBef>
-              <a:defRPr sz="1400">
-                <a:solidFill>
-                  <a:srgbClr val="333333"/>
-                </a:solidFill>
-              </a:defRPr>
-            </a:pPr>
-            <a:r>
-              <a:t>WSGI: Gunicorn</a:t>
-            </a:r>
-          </a:p>
-          <a:p>
-            <a:pPr>
-              <a:spcBef>
-                <a:spcPts val="400"/>
-              </a:spcBef>
-              <a:defRPr sz="1400">
-                <a:solidFill>
-                  <a:srgbClr val="333333"/>
-                </a:solidFill>
-              </a:defRPr>
-            </a:pPr>
-            <a:r>
-              <a:t>CDN: Ready</a:t>
-            </a:r>
-          </a:p>
-        </p:txBody>
-      </p:sp>
-      <p:sp>
-        <p:nvSpPr>
-          <p:cNvPr id="5" name="TextBox 4"/>
-          <p:cNvSpPr txBox="1"/>
-          <p:nvPr/>
-        </p:nvSpPr>
-        <p:spPr>
-          <a:xfrm>
-            <a:off x="4754880" y="914400"/>
-            <a:ext cx="4114800" cy="5029200"/>
-          </a:xfrm>
-          <a:prstGeom prst="rect">
-            <a:avLst/>
-          </a:prstGeom>
-          <a:noFill/>
-        </p:spPr>
-        <p:txBody>
-          <a:bodyPr wrap="square">
-            <a:spAutoFit/>
-          </a:bodyPr>
-          <a:lstStyle/>
-          <a:p>
-            <a:pPr>
-              <a:defRPr sz="2200" b="1">
-                <a:solidFill>
-                  <a:srgbClr val="C00000"/>
-                </a:solidFill>
-              </a:defRPr>
-            </a:pPr>
-            <a:r>
-              <a:t>Environment Setup</a:t>
-            </a:r>
-          </a:p>
-          <a:p>
-            <a:pPr>
-              <a:spcBef>
-                <a:spcPts val="400"/>
-              </a:spcBef>
-              <a:defRPr sz="1400">
-                <a:solidFill>
-                  <a:srgbClr val="333333"/>
-                </a:solidFill>
-              </a:defRPr>
-            </a:pPr>
-            <a:r>
-              <a:t>• SECRET_KEY setup</a:t>
-            </a:r>
-          </a:p>
-          <a:p>
-            <a:pPr>
-              <a:spcBef>
-                <a:spcPts val="400"/>
-              </a:spcBef>
-              <a:defRPr sz="1400">
-                <a:solidFill>
-                  <a:srgbClr val="333333"/>
-                </a:solidFill>
-              </a:defRPr>
-            </a:pPr>
-            <a:r>
-              <a:t>• CORS configuration</a:t>
-            </a:r>
-          </a:p>
-          <a:p>
-            <a:pPr>
-              <a:spcBef>
-                <a:spcPts val="400"/>
-              </a:spcBef>
-              <a:defRPr sz="1400">
-                <a:solidFill>
-                  <a:srgbClr val="333333"/>
-                </a:solidFill>
-              </a:defRPr>
-            </a:pPr>
-            <a:r>
-              <a:t>• OAuth credentials</a:t>
-            </a:r>
-          </a:p>
-          <a:p>
-            <a:pPr>
-              <a:spcBef>
-                <a:spcPts val="400"/>
-              </a:spcBef>
-              <a:defRPr sz="1400">
-                <a:solidFill>
-                  <a:srgbClr val="333333"/>
-                </a:solidFill>
-              </a:defRPr>
-            </a:pPr>
-            <a:r>
-              <a:t>• Database URL</a:t>
-            </a:r>
-          </a:p>
-          <a:p>
-            <a:pPr>
-              <a:spcBef>
-                <a:spcPts val="400"/>
-              </a:spcBef>
-              <a:defRPr sz="1400">
-                <a:solidFill>
-                  <a:srgbClr val="333333"/>
-                </a:solidFill>
-              </a:defRPr>
-            </a:pPr>
-            <a:r>
-              <a:t>• Email service config</a:t>
-            </a:r>
-          </a:p>
-          <a:p>
-            <a:pPr>
-              <a:spcBef>
-                <a:spcPts val="400"/>
-              </a:spcBef>
-              <a:defRPr sz="1400">
-                <a:solidFill>
-                  <a:srgbClr val="333333"/>
-                </a:solidFill>
-              </a:defRPr>
-            </a:pPr>
-            <a:r>
-              <a:t>• Domain settings</a:t>
-            </a:r>
-          </a:p>
-          <a:p>
-            <a:pPr>
-              <a:spcBef>
-                <a:spcPts val="400"/>
-              </a:spcBef>
-              <a:defRPr sz="1400">
-                <a:solidFill>
-                  <a:srgbClr val="333333"/>
-                </a:solidFill>
-              </a:defRPr>
-            </a:pPr>
-            <a:r>
-              <a:t>• SSL/TLS enabled</a:t>
+            <a:pPr algn="r"/>
+            <a:r>
+              <a:rPr sz="900">
+                <a:solidFill>
+                  <a:srgbClr val="788291"/>
+                </a:solidFill>
+                <a:latin typeface="Aptos"/>
+              </a:rPr>
+              <a:t>Status reflects the repository snapshot</a:t>
             </a:r>
           </a:p>
         </p:txBody>
@@ -3997,13 +4352,13 @@
 </p:sld>
 </file>
 
-<file path=ppt/slides/slide12.xml><?xml version="1.0" encoding="utf-8"?>
-<p:sld xmlns:a="http://schemas.openxmlformats.org/drawingml/2006/main" xmlns:p="http://schemas.openxmlformats.org/presentationml/2006/main" xmlns:r="http://schemas.openxmlformats.org/officeDocument/2006/relationships">
+<file path=ppt/slides/slide3.xml><?xml version="1.0" encoding="utf-8"?>
+<p:sld xmlns:a="http://schemas.openxmlformats.org/drawingml/2006/main" xmlns:r="http://schemas.openxmlformats.org/officeDocument/2006/relationships" xmlns:p="http://schemas.openxmlformats.org/presentationml/2006/main">
   <p:cSld>
     <p:bg>
       <p:bgPr>
         <a:solidFill>
-          <a:srgbClr val="FFFFFF"/>
+          <a:srgbClr val="F8FAFC"/>
         </a:solidFill>
         <a:effectLst/>
       </p:bgPr>
@@ -4014,7 +4369,14 @@
         <p:cNvGrpSpPr/>
         <p:nvPr/>
       </p:nvGrpSpPr>
-      <p:grpSpPr/>
+      <p:grpSpPr>
+        <a:xfrm>
+          <a:off x="0" y="0"/>
+          <a:ext cx="0" cy="0"/>
+          <a:chOff x="0" y="0"/>
+          <a:chExt cx="0" cy="0"/>
+        </a:xfrm>
+      </p:grpSpPr>
       <p:sp>
         <p:nvSpPr>
           <p:cNvPr id="2" name="Rectangle 1"/>
@@ -4024,18 +4386,16 @@
         <p:spPr>
           <a:xfrm>
             <a:off x="0" y="0"/>
-            <a:ext cx="9144000" cy="731520"/>
+            <a:ext cx="12191695" cy="347472"/>
           </a:xfrm>
           <a:prstGeom prst="rect">
             <a:avLst/>
           </a:prstGeom>
           <a:solidFill>
-            <a:srgbClr val="1F4E79"/>
+            <a:srgbClr val="0C183A"/>
           </a:solidFill>
           <a:ln>
-            <a:solidFill>
-              <a:srgbClr val="1F4E79"/>
-            </a:solidFill>
+            <a:noFill/>
           </a:ln>
         </p:spPr>
         <p:style>
@@ -4057,6 +4417,7 @@
           <a:lstStyle/>
           <a:p>
             <a:pPr algn="ctr"/>
+            <a:endParaRPr/>
           </a:p>
         </p:txBody>
       </p:sp>
@@ -4068,8 +4429,8 @@
         </p:nvSpPr>
         <p:spPr>
           <a:xfrm>
-            <a:off x="457200" y="137160"/>
-            <a:ext cx="8229600" cy="548640"/>
+            <a:off x="502920" y="502920"/>
+            <a:ext cx="10972800" cy="731520"/>
           </a:xfrm>
           <a:prstGeom prst="rect">
             <a:avLst/>
@@ -4082,29 +4443,398 @@
           </a:bodyPr>
           <a:lstStyle/>
           <a:p>
-            <a:pPr>
-              <a:defRPr sz="4000" b="1">
-                <a:solidFill>
-                  <a:srgbClr val="FFFFFF"/>
-                </a:solidFill>
-              </a:defRPr>
-            </a:pPr>
-            <a:r>
-              <a:t>Project Statistics</a:t>
-            </a:r>
-          </a:p>
-        </p:txBody>
-      </p:sp>
-      <p:sp>
-        <p:nvSpPr>
-          <p:cNvPr id="4" name="TextBox 3"/>
+            <a:r>
+              <a:rPr sz="2800" b="1">
+                <a:solidFill>
+                  <a:srgbClr val="0C183A"/>
+                </a:solidFill>
+                <a:latin typeface="Aptos Display"/>
+              </a:rPr>
+              <a:t>Architecture Overview</a:t>
+            </a:r>
+          </a:p>
+          <a:p>
+            <a:pPr>
+              <a:spcBef>
+                <a:spcPts val="400"/>
+              </a:spcBef>
+            </a:pPr>
+            <a:r>
+              <a:rPr sz="1200">
+                <a:solidFill>
+                  <a:srgbClr val="788291"/>
+                </a:solidFill>
+                <a:latin typeface="Aptos"/>
+              </a:rPr>
+              <a:t>How the frontend, backend, and database connect</a:t>
+            </a:r>
+          </a:p>
+        </p:txBody>
+      </p:sp>
+      <p:sp>
+        <p:nvSpPr>
+          <p:cNvPr id="4" name="Rectangle 3"/>
+          <p:cNvSpPr/>
+          <p:nvPr/>
+        </p:nvSpPr>
+        <p:spPr>
+          <a:xfrm>
+            <a:off x="594360" y="1234440"/>
+            <a:ext cx="3566160" cy="4526280"/>
+          </a:xfrm>
+          <a:prstGeom prst="rect">
+            <a:avLst/>
+          </a:prstGeom>
+          <a:solidFill>
+            <a:srgbClr val="FFFFFF"/>
+          </a:solidFill>
+          <a:ln>
+            <a:solidFill>
+              <a:srgbClr val="F5F7FA"/>
+            </a:solidFill>
+          </a:ln>
+        </p:spPr>
+        <p:style>
+          <a:lnRef idx="1">
+            <a:schemeClr val="accent1"/>
+          </a:lnRef>
+          <a:fillRef idx="3">
+            <a:schemeClr val="accent1"/>
+          </a:fillRef>
+          <a:effectRef idx="2">
+            <a:schemeClr val="accent1"/>
+          </a:effectRef>
+          <a:fontRef idx="minor">
+            <a:schemeClr val="lt1"/>
+          </a:fontRef>
+        </p:style>
+        <p:txBody>
+          <a:bodyPr wrap="square" lIns="146304" tIns="109728" rIns="146304" rtlCol="0" anchor="ctr"/>
+          <a:lstStyle/>
+          <a:p>
+            <a:pPr algn="ctr"/>
+            <a:r>
+              <a:rPr sz="1600" b="1">
+                <a:solidFill>
+                  <a:srgbClr val="0C183A"/>
+                </a:solidFill>
+                <a:latin typeface="Aptos Display"/>
+              </a:rPr>
+              <a:t>Frontend Layer</a:t>
+            </a:r>
+          </a:p>
+          <a:p>
+            <a:pPr>
+              <a:spcAft>
+                <a:spcPts val="200"/>
+              </a:spcAft>
+            </a:pPr>
+            <a:r>
+              <a:rPr sz="1200">
+                <a:solidFill>
+                  <a:srgbClr val="2C3E50"/>
+                </a:solidFill>
+                <a:latin typeface="Aptos"/>
+              </a:rPr>
+              <a:t>Next.js app router</a:t>
+            </a:r>
+          </a:p>
+          <a:p>
+            <a:pPr>
+              <a:spcAft>
+                <a:spcPts val="200"/>
+              </a:spcAft>
+            </a:pPr>
+            <a:r>
+              <a:rPr sz="1200">
+                <a:solidFill>
+                  <a:srgbClr val="2C3E50"/>
+                </a:solidFill>
+                <a:latin typeface="Aptos"/>
+              </a:rPr>
+              <a:t>React component-based UI</a:t>
+            </a:r>
+          </a:p>
+          <a:p>
+            <a:pPr>
+              <a:spcAft>
+                <a:spcPts val="200"/>
+              </a:spcAft>
+            </a:pPr>
+            <a:r>
+              <a:rPr sz="1200">
+                <a:solidFill>
+                  <a:srgbClr val="2C3E50"/>
+                </a:solidFill>
+                <a:latin typeface="Aptos"/>
+              </a:rPr>
+              <a:t>TypeScript, Tailwind, Zustand</a:t>
+            </a:r>
+          </a:p>
+          <a:p>
+            <a:pPr>
+              <a:spcAft>
+                <a:spcPts val="200"/>
+              </a:spcAft>
+            </a:pPr>
+            <a:r>
+              <a:rPr sz="1200">
+                <a:solidFill>
+                  <a:srgbClr val="2C3E50"/>
+                </a:solidFill>
+                <a:latin typeface="Aptos"/>
+              </a:rPr>
+              <a:t>Framer Motion animations</a:t>
+            </a:r>
+          </a:p>
+        </p:txBody>
+      </p:sp>
+      <p:sp>
+        <p:nvSpPr>
+          <p:cNvPr id="5" name="Rectangle 4"/>
+          <p:cNvSpPr/>
+          <p:nvPr/>
+        </p:nvSpPr>
+        <p:spPr>
+          <a:xfrm>
+            <a:off x="4315968" y="1234440"/>
+            <a:ext cx="3566160" cy="4526280"/>
+          </a:xfrm>
+          <a:prstGeom prst="rect">
+            <a:avLst/>
+          </a:prstGeom>
+          <a:solidFill>
+            <a:srgbClr val="FAFCFF"/>
+          </a:solidFill>
+          <a:ln>
+            <a:solidFill>
+              <a:srgbClr val="F5F7FA"/>
+            </a:solidFill>
+          </a:ln>
+        </p:spPr>
+        <p:style>
+          <a:lnRef idx="1">
+            <a:schemeClr val="accent1"/>
+          </a:lnRef>
+          <a:fillRef idx="3">
+            <a:schemeClr val="accent1"/>
+          </a:fillRef>
+          <a:effectRef idx="2">
+            <a:schemeClr val="accent1"/>
+          </a:effectRef>
+          <a:fontRef idx="minor">
+            <a:schemeClr val="lt1"/>
+          </a:fontRef>
+        </p:style>
+        <p:txBody>
+          <a:bodyPr wrap="square" lIns="146304" tIns="109728" rIns="146304" rtlCol="0" anchor="ctr"/>
+          <a:lstStyle/>
+          <a:p>
+            <a:pPr algn="ctr"/>
+            <a:r>
+              <a:rPr sz="1600" b="1">
+                <a:solidFill>
+                  <a:srgbClr val="0C183A"/>
+                </a:solidFill>
+                <a:latin typeface="Aptos Display"/>
+              </a:rPr>
+              <a:t>API Layer</a:t>
+            </a:r>
+          </a:p>
+          <a:p>
+            <a:pPr>
+              <a:spcAft>
+                <a:spcPts val="200"/>
+              </a:spcAft>
+            </a:pPr>
+            <a:r>
+              <a:rPr sz="1200">
+                <a:solidFill>
+                  <a:srgbClr val="2C3E50"/>
+                </a:solidFill>
+                <a:latin typeface="Aptos"/>
+              </a:rPr>
+              <a:t>Django REST endpoints</a:t>
+            </a:r>
+          </a:p>
+          <a:p>
+            <a:pPr>
+              <a:spcAft>
+                <a:spcPts val="200"/>
+              </a:spcAft>
+            </a:pPr>
+            <a:r>
+              <a:rPr sz="1200">
+                <a:solidFill>
+                  <a:srgbClr val="2C3E50"/>
+                </a:solidFill>
+                <a:latin typeface="Aptos"/>
+              </a:rPr>
+              <a:t>Authentication and profile logic</a:t>
+            </a:r>
+          </a:p>
+          <a:p>
+            <a:pPr>
+              <a:spcAft>
+                <a:spcPts val="200"/>
+              </a:spcAft>
+            </a:pPr>
+            <a:r>
+              <a:rPr sz="1200">
+                <a:solidFill>
+                  <a:srgbClr val="2C3E50"/>
+                </a:solidFill>
+                <a:latin typeface="Aptos"/>
+              </a:rPr>
+              <a:t>Video, comment, and tracking APIs</a:t>
+            </a:r>
+          </a:p>
+          <a:p>
+            <a:pPr>
+              <a:spcAft>
+                <a:spcPts val="200"/>
+              </a:spcAft>
+            </a:pPr>
+            <a:r>
+              <a:rPr sz="1200">
+                <a:solidFill>
+                  <a:srgbClr val="2C3E50"/>
+                </a:solidFill>
+                <a:latin typeface="Aptos"/>
+              </a:rPr>
+              <a:t>CORS and JWT support</a:t>
+            </a:r>
+          </a:p>
+        </p:txBody>
+      </p:sp>
+      <p:sp>
+        <p:nvSpPr>
+          <p:cNvPr id="6" name="Rectangle 5"/>
+          <p:cNvSpPr/>
+          <p:nvPr/>
+        </p:nvSpPr>
+        <p:spPr>
+          <a:xfrm>
+            <a:off x="8037575" y="1234440"/>
+            <a:ext cx="3566160" cy="4526280"/>
+          </a:xfrm>
+          <a:prstGeom prst="rect">
+            <a:avLst/>
+          </a:prstGeom>
+          <a:solidFill>
+            <a:srgbClr val="FFFFFF"/>
+          </a:solidFill>
+          <a:ln>
+            <a:solidFill>
+              <a:srgbClr val="F5F7FA"/>
+            </a:solidFill>
+          </a:ln>
+        </p:spPr>
+        <p:style>
+          <a:lnRef idx="1">
+            <a:schemeClr val="accent1"/>
+          </a:lnRef>
+          <a:fillRef idx="3">
+            <a:schemeClr val="accent1"/>
+          </a:fillRef>
+          <a:effectRef idx="2">
+            <a:schemeClr val="accent1"/>
+          </a:effectRef>
+          <a:fontRef idx="minor">
+            <a:schemeClr val="lt1"/>
+          </a:fontRef>
+        </p:style>
+        <p:txBody>
+          <a:bodyPr wrap="square" lIns="146304" tIns="109728" rIns="146304" rtlCol="0" anchor="ctr"/>
+          <a:lstStyle/>
+          <a:p>
+            <a:pPr algn="ctr"/>
+            <a:r>
+              <a:rPr sz="1600" b="1">
+                <a:solidFill>
+                  <a:srgbClr val="0C183A"/>
+                </a:solidFill>
+                <a:latin typeface="Aptos Display"/>
+              </a:rPr>
+              <a:t>Data Layer</a:t>
+            </a:r>
+          </a:p>
+          <a:p>
+            <a:pPr>
+              <a:spcAft>
+                <a:spcPts val="200"/>
+              </a:spcAft>
+            </a:pPr>
+            <a:r>
+              <a:rPr sz="1200">
+                <a:solidFill>
+                  <a:srgbClr val="2C3E50"/>
+                </a:solidFill>
+                <a:latin typeface="Aptos"/>
+              </a:rPr>
+              <a:t>SQLite in development</a:t>
+            </a:r>
+          </a:p>
+          <a:p>
+            <a:pPr>
+              <a:spcAft>
+                <a:spcPts val="200"/>
+              </a:spcAft>
+            </a:pPr>
+            <a:r>
+              <a:rPr sz="1200">
+                <a:solidFill>
+                  <a:srgbClr val="2C3E50"/>
+                </a:solidFill>
+                <a:latin typeface="Aptos"/>
+              </a:rPr>
+              <a:t>PostgreSQL-ready for production</a:t>
+            </a:r>
+          </a:p>
+          <a:p>
+            <a:pPr>
+              <a:spcAft>
+                <a:spcPts val="200"/>
+              </a:spcAft>
+            </a:pPr>
+            <a:r>
+              <a:rPr sz="1200">
+                <a:solidFill>
+                  <a:srgbClr val="2C3E50"/>
+                </a:solidFill>
+                <a:latin typeface="Aptos"/>
+              </a:rPr>
+              <a:t>Custom app tables plus Django auth tables</a:t>
+            </a:r>
+          </a:p>
+          <a:p>
+            <a:pPr>
+              <a:spcAft>
+                <a:spcPts val="200"/>
+              </a:spcAft>
+            </a:pPr>
+            <a:r>
+              <a:rPr sz="1200">
+                <a:solidFill>
+                  <a:srgbClr val="2C3E50"/>
+                </a:solidFill>
+                <a:latin typeface="Aptos"/>
+              </a:rPr>
+              <a:t>Media storage for profile pictures</a:t>
+            </a:r>
+          </a:p>
+        </p:txBody>
+      </p:sp>
+      <p:sp>
+        <p:nvSpPr>
+          <p:cNvPr id="7" name="TextBox 6"/>
           <p:cNvSpPr txBox="1"/>
           <p:nvPr/>
         </p:nvSpPr>
         <p:spPr>
           <a:xfrm>
-            <a:off x="640080" y="1097280"/>
-            <a:ext cx="7863840" cy="4846320"/>
+            <a:off x="502920" y="6400800"/>
+            <a:ext cx="10972800" cy="228600"/>
           </a:xfrm>
           <a:prstGeom prst="rect">
             <a:avLst/>
@@ -4112,152 +4842,20 @@
           <a:noFill/>
         </p:spPr>
         <p:txBody>
-          <a:bodyPr wrap="square">
+          <a:bodyPr wrap="none">
             <a:spAutoFit/>
           </a:bodyPr>
           <a:lstStyle/>
           <a:p>
-            <a:pPr>
-              <a:spcBef>
-                <a:spcPts val="600"/>
-              </a:spcBef>
-              <a:spcAft>
-                <a:spcPts val="600"/>
-              </a:spcAft>
-              <a:defRPr sz="1800">
-                <a:solidFill>
-                  <a:srgbClr val="333333"/>
-                </a:solidFill>
-              </a:defRPr>
-            </a:pPr>
-            <a:r>
-              <a:t>📊 Frontend Pages: 20+ routes</a:t>
-            </a:r>
-          </a:p>
-          <a:p>
-            <a:pPr>
-              <a:spcBef>
-                <a:spcPts val="600"/>
-              </a:spcBef>
-              <a:spcAft>
-                <a:spcPts val="600"/>
-              </a:spcAft>
-              <a:defRPr sz="1800">
-                <a:solidFill>
-                  <a:srgbClr val="333333"/>
-                </a:solidFill>
-              </a:defRPr>
-            </a:pPr>
-            <a:r>
-              <a:t>📊 React Components: 25+ reusable</a:t>
-            </a:r>
-          </a:p>
-          <a:p>
-            <a:pPr>
-              <a:spcBef>
-                <a:spcPts val="600"/>
-              </a:spcBef>
-              <a:spcAft>
-                <a:spcPts val="600"/>
-              </a:spcAft>
-              <a:defRPr sz="1800">
-                <a:solidFill>
-                  <a:srgbClr val="333333"/>
-                </a:solidFill>
-              </a:defRPr>
-            </a:pPr>
-            <a:r>
-              <a:t>📊 API Endpoints: 30+ endpoints</a:t>
-            </a:r>
-          </a:p>
-          <a:p>
-            <a:pPr>
-              <a:spcBef>
-                <a:spcPts val="600"/>
-              </a:spcBef>
-              <a:spcAft>
-                <a:spcPts val="600"/>
-              </a:spcAft>
-              <a:defRPr sz="1800">
-                <a:solidFill>
-                  <a:srgbClr val="333333"/>
-                </a:solidFill>
-              </a:defRPr>
-            </a:pPr>
-            <a:r>
-              <a:t>📊 Database Models: 6 models</a:t>
-            </a:r>
-          </a:p>
-          <a:p>
-            <a:pPr>
-              <a:spcBef>
-                <a:spcPts val="600"/>
-              </a:spcBef>
-              <a:spcAft>
-                <a:spcPts val="600"/>
-              </a:spcAft>
-              <a:defRPr sz="1800">
-                <a:solidFill>
-                  <a:srgbClr val="333333"/>
-                </a:solidFill>
-              </a:defRPr>
-            </a:pPr>
-            <a:r>
-              <a:t>📊 Authentication Methods: 3 (Email/Google/Apple)</a:t>
-            </a:r>
-          </a:p>
-          <a:p>
-            <a:pPr>
-              <a:spcBef>
-                <a:spcPts val="600"/>
-              </a:spcBef>
-              <a:spcAft>
-                <a:spcPts val="600"/>
-              </a:spcAft>
-              <a:defRPr sz="1800">
-                <a:solidFill>
-                  <a:srgbClr val="333333"/>
-                </a:solidFill>
-              </a:defRPr>
-            </a:pPr>
-            <a:r>
-              <a:t>📊 NPM Dependencies: 15+</a:t>
-            </a:r>
-          </a:p>
-          <a:p>
-            <a:pPr>
-              <a:spcBef>
-                <a:spcPts val="600"/>
-              </a:spcBef>
-              <a:spcAft>
-                <a:spcPts val="600"/>
-              </a:spcAft>
-              <a:defRPr sz="1800">
-                <a:solidFill>
-                  <a:srgbClr val="333333"/>
-                </a:solidFill>
-              </a:defRPr>
-            </a:pPr>
-            <a:r>
-              <a:t>📊 Python Dependencies: 8</a:t>
-            </a:r>
-          </a:p>
-          <a:p>
-            <a:pPr>
-              <a:spcBef>
-                <a:spcPts val="600"/>
-              </a:spcBef>
-              <a:spcAft>
-                <a:spcPts val="600"/>
-              </a:spcAft>
-              <a:defRPr sz="1800">
-                <a:solidFill>
-                  <a:srgbClr val="333333"/>
-                </a:solidFill>
-              </a:defRPr>
-            </a:pPr>
-            <a:r>
-              <a:t>📊 Code Lines: 5,000+ (Frontend + Backend)</a:t>
+            <a:pPr algn="r"/>
+            <a:r>
+              <a:rPr sz="900">
+                <a:solidFill>
+                  <a:srgbClr val="788291"/>
+                </a:solidFill>
+                <a:latin typeface="Aptos"/>
+              </a:rPr>
+              <a:t>JSON over HTTP connects the frontend to the backend</a:t>
             </a:r>
           </a:p>
         </p:txBody>
@@ -4270,13 +4868,13 @@
 </p:sld>
 </file>
 
-<file path=ppt/slides/slide13.xml><?xml version="1.0" encoding="utf-8"?>
-<p:sld xmlns:a="http://schemas.openxmlformats.org/drawingml/2006/main" xmlns:p="http://schemas.openxmlformats.org/presentationml/2006/main" xmlns:r="http://schemas.openxmlformats.org/officeDocument/2006/relationships">
+<file path=ppt/slides/slide4.xml><?xml version="1.0" encoding="utf-8"?>
+<p:sld xmlns:a="http://schemas.openxmlformats.org/drawingml/2006/main" xmlns:r="http://schemas.openxmlformats.org/officeDocument/2006/relationships" xmlns:p="http://schemas.openxmlformats.org/presentationml/2006/main">
   <p:cSld>
     <p:bg>
       <p:bgPr>
         <a:solidFill>
-          <a:srgbClr val="FFFFFF"/>
+          <a:srgbClr val="F8FAFC"/>
         </a:solidFill>
         <a:effectLst/>
       </p:bgPr>
@@ -4287,7 +4885,14 @@
         <p:cNvGrpSpPr/>
         <p:nvPr/>
       </p:nvGrpSpPr>
-      <p:grpSpPr/>
+      <p:grpSpPr>
+        <a:xfrm>
+          <a:off x="0" y="0"/>
+          <a:ext cx="0" cy="0"/>
+          <a:chOff x="0" y="0"/>
+          <a:chExt cx="0" cy="0"/>
+        </a:xfrm>
+      </p:grpSpPr>
       <p:sp>
         <p:nvSpPr>
           <p:cNvPr id="2" name="Rectangle 1"/>
@@ -4297,18 +4902,16 @@
         <p:spPr>
           <a:xfrm>
             <a:off x="0" y="0"/>
-            <a:ext cx="9144000" cy="731520"/>
+            <a:ext cx="12191695" cy="347472"/>
           </a:xfrm>
           <a:prstGeom prst="rect">
             <a:avLst/>
           </a:prstGeom>
           <a:solidFill>
-            <a:srgbClr val="1F4E79"/>
+            <a:srgbClr val="0C183A"/>
           </a:solidFill>
           <a:ln>
-            <a:solidFill>
-              <a:srgbClr val="1F4E79"/>
-            </a:solidFill>
+            <a:noFill/>
           </a:ln>
         </p:spPr>
         <p:style>
@@ -4330,6 +4933,7 @@
           <a:lstStyle/>
           <a:p>
             <a:pPr algn="ctr"/>
+            <a:endParaRPr/>
           </a:p>
         </p:txBody>
       </p:sp>
@@ -4341,8 +4945,8 @@
         </p:nvSpPr>
         <p:spPr>
           <a:xfrm>
-            <a:off x="457200" y="137160"/>
-            <a:ext cx="8229600" cy="548640"/>
+            <a:off x="502920" y="502920"/>
+            <a:ext cx="10972800" cy="731520"/>
           </a:xfrm>
           <a:prstGeom prst="rect">
             <a:avLst/>
@@ -4355,29 +4959,344 @@
           </a:bodyPr>
           <a:lstStyle/>
           <a:p>
-            <a:pPr>
-              <a:defRPr sz="4000" b="1">
-                <a:solidFill>
-                  <a:srgbClr val="FFFFFF"/>
-                </a:solidFill>
-              </a:defRPr>
-            </a:pPr>
-            <a:r>
-              <a:t>Quick Start Guide</a:t>
-            </a:r>
-          </a:p>
-        </p:txBody>
-      </p:sp>
-      <p:sp>
-        <p:nvSpPr>
-          <p:cNvPr id="4" name="TextBox 3"/>
+            <a:r>
+              <a:rPr sz="2800" b="1">
+                <a:solidFill>
+                  <a:srgbClr val="0C183A"/>
+                </a:solidFill>
+                <a:latin typeface="Aptos Display"/>
+              </a:rPr>
+              <a:t>Technology Stack</a:t>
+            </a:r>
+          </a:p>
+          <a:p>
+            <a:pPr>
+              <a:spcBef>
+                <a:spcPts val="400"/>
+              </a:spcBef>
+            </a:pPr>
+            <a:r>
+              <a:rPr sz="1200">
+                <a:solidFill>
+                  <a:srgbClr val="788291"/>
+                </a:solidFill>
+                <a:latin typeface="Aptos"/>
+              </a:rPr>
+              <a:t>Main tools used across the project</a:t>
+            </a:r>
+          </a:p>
+        </p:txBody>
+      </p:sp>
+      <p:sp>
+        <p:nvSpPr>
+          <p:cNvPr id="4" name="Rectangle 3"/>
+          <p:cNvSpPr/>
+          <p:nvPr/>
+        </p:nvSpPr>
+        <p:spPr>
+          <a:xfrm>
+            <a:off x="640080" y="1234440"/>
+            <a:ext cx="5303520" cy="4526280"/>
+          </a:xfrm>
+          <a:prstGeom prst="rect">
+            <a:avLst/>
+          </a:prstGeom>
+          <a:solidFill>
+            <a:srgbClr val="FFFFFF"/>
+          </a:solidFill>
+          <a:ln>
+            <a:solidFill>
+              <a:srgbClr val="F5F7FA"/>
+            </a:solidFill>
+          </a:ln>
+        </p:spPr>
+        <p:style>
+          <a:lnRef idx="1">
+            <a:schemeClr val="accent1"/>
+          </a:lnRef>
+          <a:fillRef idx="3">
+            <a:schemeClr val="accent1"/>
+          </a:fillRef>
+          <a:effectRef idx="2">
+            <a:schemeClr val="accent1"/>
+          </a:effectRef>
+          <a:fontRef idx="minor">
+            <a:schemeClr val="lt1"/>
+          </a:fontRef>
+        </p:style>
+        <p:txBody>
+          <a:bodyPr wrap="square" lIns="146304" tIns="109728" rIns="146304" rtlCol="0" anchor="ctr"/>
+          <a:lstStyle/>
+          <a:p>
+            <a:pPr algn="ctr"/>
+            <a:r>
+              <a:rPr sz="1600" b="1">
+                <a:solidFill>
+                  <a:srgbClr val="0C183A"/>
+                </a:solidFill>
+                <a:latin typeface="Aptos Display"/>
+              </a:rPr>
+              <a:t>Frontend Stack</a:t>
+            </a:r>
+          </a:p>
+          <a:p>
+            <a:pPr>
+              <a:spcAft>
+                <a:spcPts val="200"/>
+              </a:spcAft>
+            </a:pPr>
+            <a:r>
+              <a:rPr sz="1200">
+                <a:solidFill>
+                  <a:srgbClr val="2C3E50"/>
+                </a:solidFill>
+                <a:latin typeface="Aptos"/>
+              </a:rPr>
+              <a:t>Next.js 16.2.1 and React 19.2.4</a:t>
+            </a:r>
+          </a:p>
+          <a:p>
+            <a:pPr>
+              <a:spcAft>
+                <a:spcPts val="200"/>
+              </a:spcAft>
+            </a:pPr>
+            <a:r>
+              <a:rPr sz="1200">
+                <a:solidFill>
+                  <a:srgbClr val="2C3E50"/>
+                </a:solidFill>
+                <a:latin typeface="Aptos"/>
+              </a:rPr>
+              <a:t>TypeScript for type safety</a:t>
+            </a:r>
+          </a:p>
+          <a:p>
+            <a:pPr>
+              <a:spcAft>
+                <a:spcPts val="200"/>
+              </a:spcAft>
+            </a:pPr>
+            <a:r>
+              <a:rPr sz="1200">
+                <a:solidFill>
+                  <a:srgbClr val="2C3E50"/>
+                </a:solidFill>
+                <a:latin typeface="Aptos"/>
+              </a:rPr>
+              <a:t>Tailwind CSS 4 for styling</a:t>
+            </a:r>
+          </a:p>
+          <a:p>
+            <a:pPr>
+              <a:spcAft>
+                <a:spcPts val="200"/>
+              </a:spcAft>
+            </a:pPr>
+            <a:r>
+              <a:rPr sz="1200">
+                <a:solidFill>
+                  <a:srgbClr val="2C3E50"/>
+                </a:solidFill>
+                <a:latin typeface="Aptos"/>
+              </a:rPr>
+              <a:t>Framer Motion for animation</a:t>
+            </a:r>
+          </a:p>
+          <a:p>
+            <a:pPr>
+              <a:spcAft>
+                <a:spcPts val="200"/>
+              </a:spcAft>
+            </a:pPr>
+            <a:r>
+              <a:rPr sz="1200">
+                <a:solidFill>
+                  <a:srgbClr val="2C3E50"/>
+                </a:solidFill>
+                <a:latin typeface="Aptos"/>
+              </a:rPr>
+              <a:t>Zustand for state management</a:t>
+            </a:r>
+          </a:p>
+          <a:p>
+            <a:pPr>
+              <a:spcAft>
+                <a:spcPts val="200"/>
+              </a:spcAft>
+            </a:pPr>
+            <a:r>
+              <a:rPr sz="1200">
+                <a:solidFill>
+                  <a:srgbClr val="2C3E50"/>
+                </a:solidFill>
+                <a:latin typeface="Aptos"/>
+              </a:rPr>
+              <a:t>Radix UI and Lucide React for UI primitives and icons</a:t>
+            </a:r>
+          </a:p>
+        </p:txBody>
+      </p:sp>
+      <p:sp>
+        <p:nvSpPr>
+          <p:cNvPr id="5" name="Rectangle 4"/>
+          <p:cNvSpPr/>
+          <p:nvPr/>
+        </p:nvSpPr>
+        <p:spPr>
+          <a:xfrm>
+            <a:off x="6263640" y="1234440"/>
+            <a:ext cx="5303520" cy="4526280"/>
+          </a:xfrm>
+          <a:prstGeom prst="rect">
+            <a:avLst/>
+          </a:prstGeom>
+          <a:solidFill>
+            <a:srgbClr val="FAFCFF"/>
+          </a:solidFill>
+          <a:ln>
+            <a:solidFill>
+              <a:srgbClr val="F5F7FA"/>
+            </a:solidFill>
+          </a:ln>
+        </p:spPr>
+        <p:style>
+          <a:lnRef idx="1">
+            <a:schemeClr val="accent1"/>
+          </a:lnRef>
+          <a:fillRef idx="3">
+            <a:schemeClr val="accent1"/>
+          </a:fillRef>
+          <a:effectRef idx="2">
+            <a:schemeClr val="accent1"/>
+          </a:effectRef>
+          <a:fontRef idx="minor">
+            <a:schemeClr val="lt1"/>
+          </a:fontRef>
+        </p:style>
+        <p:txBody>
+          <a:bodyPr wrap="square" lIns="146304" tIns="109728" rIns="146304" rtlCol="0" anchor="ctr"/>
+          <a:lstStyle/>
+          <a:p>
+            <a:pPr algn="ctr"/>
+            <a:r>
+              <a:rPr sz="1600" b="1">
+                <a:solidFill>
+                  <a:srgbClr val="0C183A"/>
+                </a:solidFill>
+                <a:latin typeface="Aptos Display"/>
+              </a:rPr>
+              <a:t>Backend Stack</a:t>
+            </a:r>
+          </a:p>
+          <a:p>
+            <a:pPr>
+              <a:spcAft>
+                <a:spcPts val="200"/>
+              </a:spcAft>
+            </a:pPr>
+            <a:r>
+              <a:rPr sz="1200">
+                <a:solidFill>
+                  <a:srgbClr val="2C3E50"/>
+                </a:solidFill>
+                <a:latin typeface="Aptos"/>
+              </a:rPr>
+              <a:t>Django 6.0.4 and Django REST Framework</a:t>
+            </a:r>
+          </a:p>
+          <a:p>
+            <a:pPr>
+              <a:spcAft>
+                <a:spcPts val="200"/>
+              </a:spcAft>
+            </a:pPr>
+            <a:r>
+              <a:rPr sz="1200">
+                <a:solidFill>
+                  <a:srgbClr val="2C3E50"/>
+                </a:solidFill>
+                <a:latin typeface="Aptos"/>
+              </a:rPr>
+              <a:t>SQLite development database</a:t>
+            </a:r>
+          </a:p>
+          <a:p>
+            <a:pPr>
+              <a:spcAft>
+                <a:spcPts val="200"/>
+              </a:spcAft>
+            </a:pPr>
+            <a:r>
+              <a:rPr sz="1200">
+                <a:solidFill>
+                  <a:srgbClr val="2C3E50"/>
+                </a:solidFill>
+                <a:latin typeface="Aptos"/>
+              </a:rPr>
+              <a:t>Pillow for image handling</a:t>
+            </a:r>
+          </a:p>
+          <a:p>
+            <a:pPr>
+              <a:spcAft>
+                <a:spcPts val="200"/>
+              </a:spcAft>
+            </a:pPr>
+            <a:r>
+              <a:rPr sz="1200">
+                <a:solidFill>
+                  <a:srgbClr val="2C3E50"/>
+                </a:solidFill>
+                <a:latin typeface="Aptos"/>
+              </a:rPr>
+              <a:t>django-cors-headers for cross-origin access</a:t>
+            </a:r>
+          </a:p>
+          <a:p>
+            <a:pPr>
+              <a:spcAft>
+                <a:spcPts val="200"/>
+              </a:spcAft>
+            </a:pPr>
+            <a:r>
+              <a:rPr sz="1200">
+                <a:solidFill>
+                  <a:srgbClr val="2C3E50"/>
+                </a:solidFill>
+                <a:latin typeface="Aptos"/>
+              </a:rPr>
+              <a:t>PyJWT and google-auth for authentication flows</a:t>
+            </a:r>
+          </a:p>
+          <a:p>
+            <a:pPr>
+              <a:spcAft>
+                <a:spcPts val="200"/>
+              </a:spcAft>
+            </a:pPr>
+            <a:r>
+              <a:rPr sz="1200">
+                <a:solidFill>
+                  <a:srgbClr val="2C3E50"/>
+                </a:solidFill>
+                <a:latin typeface="Aptos"/>
+              </a:rPr>
+              <a:t>gunicorn and whitenoise for deployment</a:t>
+            </a:r>
+          </a:p>
+        </p:txBody>
+      </p:sp>
+      <p:sp>
+        <p:nvSpPr>
+          <p:cNvPr id="6" name="TextBox 5"/>
           <p:cNvSpPr txBox="1"/>
           <p:nvPr/>
         </p:nvSpPr>
         <p:spPr>
           <a:xfrm>
-            <a:off x="640080" y="1097280"/>
-            <a:ext cx="7863840" cy="4846320"/>
+            <a:off x="502920" y="6400800"/>
+            <a:ext cx="10972800" cy="228600"/>
           </a:xfrm>
           <a:prstGeom prst="rect">
             <a:avLst/>
@@ -4385,152 +5304,20 @@
           <a:noFill/>
         </p:spPr>
         <p:txBody>
-          <a:bodyPr wrap="square">
+          <a:bodyPr wrap="none">
             <a:spAutoFit/>
           </a:bodyPr>
           <a:lstStyle/>
           <a:p>
-            <a:pPr>
-              <a:spcBef>
-                <a:spcPts val="600"/>
-              </a:spcBef>
-              <a:spcAft>
-                <a:spcPts val="600"/>
-              </a:spcAft>
-              <a:defRPr sz="1800">
-                <a:solidFill>
-                  <a:srgbClr val="333333"/>
-                </a:solidFill>
-              </a:defRPr>
-            </a:pPr>
-            <a:r>
-              <a:t>🚀 Backend: cd django-backend &amp;&amp; python manage.py runserver</a:t>
-            </a:r>
-          </a:p>
-          <a:p>
-            <a:pPr>
-              <a:spcBef>
-                <a:spcPts val="600"/>
-              </a:spcBef>
-              <a:spcAft>
-                <a:spcPts val="600"/>
-              </a:spcAft>
-              <a:defRPr sz="1800">
-                <a:solidFill>
-                  <a:srgbClr val="333333"/>
-                </a:solidFill>
-              </a:defRPr>
-            </a:pPr>
-            <a:r>
-              <a:t>🚀 Frontend: cd next-vlogging &amp;&amp; npm run dev</a:t>
-            </a:r>
-          </a:p>
-          <a:p>
-            <a:pPr>
-              <a:spcBef>
-                <a:spcPts val="600"/>
-              </a:spcBef>
-              <a:spcAft>
-                <a:spcPts val="600"/>
-              </a:spcAft>
-              <a:defRPr sz="1800">
-                <a:solidFill>
-                  <a:srgbClr val="333333"/>
-                </a:solidFill>
-              </a:defRPr>
-            </a:pPr>
-            <a:r>
-              <a:t>🌐 Frontend URL: http://localhost:3000</a:t>
-            </a:r>
-          </a:p>
-          <a:p>
-            <a:pPr>
-              <a:spcBef>
-                <a:spcPts val="600"/>
-              </a:spcBef>
-              <a:spcAft>
-                <a:spcPts val="600"/>
-              </a:spcAft>
-              <a:defRPr sz="1800">
-                <a:solidFill>
-                  <a:srgbClr val="333333"/>
-                </a:solidFill>
-              </a:defRPr>
-            </a:pPr>
-            <a:r>
-              <a:t>🌐 Backend URL: http://127.0.0.1:8000</a:t>
-            </a:r>
-          </a:p>
-          <a:p>
-            <a:pPr>
-              <a:spcBef>
-                <a:spcPts val="600"/>
-              </a:spcBef>
-              <a:spcAft>
-                <a:spcPts val="600"/>
-              </a:spcAft>
-              <a:defRPr sz="1800">
-                <a:solidFill>
-                  <a:srgbClr val="333333"/>
-                </a:solidFill>
-              </a:defRPr>
-            </a:pPr>
-            <a:r>
-              <a:t>🌐 Django Admin: http://127.0.0.1:8000/admin</a:t>
-            </a:r>
-          </a:p>
-          <a:p>
-            <a:pPr>
-              <a:spcBef>
-                <a:spcPts val="600"/>
-              </a:spcBef>
-              <a:spcAft>
-                <a:spcPts val="600"/>
-              </a:spcAft>
-              <a:defRPr sz="1800">
-                <a:solidFill>
-                  <a:srgbClr val="333333"/>
-                </a:solidFill>
-              </a:defRPr>
-            </a:pPr>
-            <a:r>
-              <a:t>🌐 API Root: http://127.0.0.1:8000/api/hello/</a:t>
-            </a:r>
-          </a:p>
-          <a:p>
-            <a:pPr>
-              <a:spcBef>
-                <a:spcPts val="600"/>
-              </a:spcBef>
-              <a:spcAft>
-                <a:spcPts val="600"/>
-              </a:spcAft>
-              <a:defRPr sz="1800">
-                <a:solidFill>
-                  <a:srgbClr val="333333"/>
-                </a:solidFill>
-              </a:defRPr>
-            </a:pPr>
-            <a:r>
-              <a:t>✓ Current Status: Both servers running</a:t>
-            </a:r>
-          </a:p>
-          <a:p>
-            <a:pPr>
-              <a:spcBef>
-                <a:spcPts val="600"/>
-              </a:spcBef>
-              <a:spcAft>
-                <a:spcPts val="600"/>
-              </a:spcAft>
-              <a:defRPr sz="1800">
-                <a:solidFill>
-                  <a:srgbClr val="333333"/>
-                </a:solidFill>
-              </a:defRPr>
-            </a:pPr>
-            <a:r>
-              <a:t>✓ Ready for development &amp; testing</a:t>
+            <a:pPr algn="r"/>
+            <a:r>
+              <a:rPr sz="900">
+                <a:solidFill>
+                  <a:srgbClr val="788291"/>
+                </a:solidFill>
+                <a:latin typeface="Aptos"/>
+              </a:rPr>
+              <a:t>Build tools: npm, pip, ESLint, Django management commands</a:t>
             </a:r>
           </a:p>
         </p:txBody>
@@ -4543,13 +5330,13 @@
 </p:sld>
 </file>
 
-<file path=ppt/slides/slide14.xml><?xml version="1.0" encoding="utf-8"?>
-<p:sld xmlns:a="http://schemas.openxmlformats.org/drawingml/2006/main" xmlns:p="http://schemas.openxmlformats.org/presentationml/2006/main" xmlns:r="http://schemas.openxmlformats.org/officeDocument/2006/relationships">
+<file path=ppt/slides/slide5.xml><?xml version="1.0" encoding="utf-8"?>
+<p:sld xmlns:a="http://schemas.openxmlformats.org/drawingml/2006/main" xmlns:r="http://schemas.openxmlformats.org/officeDocument/2006/relationships" xmlns:p="http://schemas.openxmlformats.org/presentationml/2006/main">
   <p:cSld>
     <p:bg>
       <p:bgPr>
         <a:solidFill>
-          <a:srgbClr val="FFFFFF"/>
+          <a:srgbClr val="F8FAFC"/>
         </a:solidFill>
         <a:effectLst/>
       </p:bgPr>
@@ -4560,7 +5347,14 @@
         <p:cNvGrpSpPr/>
         <p:nvPr/>
       </p:nvGrpSpPr>
-      <p:grpSpPr/>
+      <p:grpSpPr>
+        <a:xfrm>
+          <a:off x="0" y="0"/>
+          <a:ext cx="0" cy="0"/>
+          <a:chOff x="0" y="0"/>
+          <a:chExt cx="0" cy="0"/>
+        </a:xfrm>
+      </p:grpSpPr>
       <p:sp>
         <p:nvSpPr>
           <p:cNvPr id="2" name="Rectangle 1"/>
@@ -4570,18 +5364,16 @@
         <p:spPr>
           <a:xfrm>
             <a:off x="0" y="0"/>
-            <a:ext cx="9144000" cy="640080"/>
+            <a:ext cx="12191695" cy="347472"/>
           </a:xfrm>
           <a:prstGeom prst="rect">
             <a:avLst/>
           </a:prstGeom>
           <a:solidFill>
-            <a:srgbClr val="1F4E79"/>
+            <a:srgbClr val="0C183A"/>
           </a:solidFill>
           <a:ln>
-            <a:solidFill>
-              <a:srgbClr val="1F4E79"/>
-            </a:solidFill>
+            <a:noFill/>
           </a:ln>
         </p:spPr>
         <p:style>
@@ -4603,6 +5395,7 @@
           <a:lstStyle/>
           <a:p>
             <a:pPr algn="ctr"/>
+            <a:endParaRPr/>
           </a:p>
         </p:txBody>
       </p:sp>
@@ -4614,8 +5407,8 @@
         </p:nvSpPr>
         <p:spPr>
           <a:xfrm>
-            <a:off x="457200" y="91440"/>
-            <a:ext cx="8229600" cy="502920"/>
+            <a:off x="502920" y="502920"/>
+            <a:ext cx="10972800" cy="731520"/>
           </a:xfrm>
           <a:prstGeom prst="rect">
             <a:avLst/>
@@ -4628,115 +5421,321 @@
           </a:bodyPr>
           <a:lstStyle/>
           <a:p>
-            <a:pPr>
-              <a:defRPr sz="3600" b="1">
-                <a:solidFill>
-                  <a:srgbClr val="FFFFFF"/>
-                </a:solidFill>
-              </a:defRPr>
-            </a:pPr>
-            <a:r>
-              <a:t>Project Gallery - Set 1</a:t>
-            </a:r>
-          </a:p>
-        </p:txBody>
-      </p:sp>
-      <p:pic>
-        <p:nvPicPr>
-          <p:cNvPr id="4" name="Picture 3" descr="thumb1.jpg"/>
-          <p:cNvPicPr>
-            <a:picLocks noChangeAspect="1"/>
-          </p:cNvPicPr>
+            <a:r>
+              <a:rPr sz="2800" b="1">
+                <a:solidFill>
+                  <a:srgbClr val="0C183A"/>
+                </a:solidFill>
+                <a:latin typeface="Aptos Display"/>
+              </a:rPr>
+              <a:t>Database Schema</a:t>
+            </a:r>
+          </a:p>
+          <a:p>
+            <a:pPr>
+              <a:spcBef>
+                <a:spcPts val="400"/>
+              </a:spcBef>
+            </a:pPr>
+            <a:r>
+              <a:rPr sz="1200">
+                <a:solidFill>
+                  <a:srgbClr val="788291"/>
+                </a:solidFill>
+                <a:latin typeface="Aptos"/>
+              </a:rPr>
+              <a:t>Core backend tables in the SQLite database</a:t>
+            </a:r>
+          </a:p>
+        </p:txBody>
+      </p:sp>
+      <p:sp>
+        <p:nvSpPr>
+          <p:cNvPr id="4" name="Rectangle 3"/>
+          <p:cNvSpPr/>
           <p:nvPr/>
-        </p:nvPicPr>
-        <p:blipFill>
-          <a:blip r:embed="rId2"/>
-          <a:stretch>
-            <a:fillRect/>
-          </a:stretch>
-        </p:blipFill>
+        </p:nvSpPr>
         <p:spPr>
           <a:xfrm>
-            <a:off x="274320" y="822960"/>
-            <a:ext cx="3657600" cy="2057400"/>
+            <a:off x="640080" y="1234440"/>
+            <a:ext cx="5303520" cy="4526280"/>
           </a:xfrm>
           <a:prstGeom prst="rect">
             <a:avLst/>
           </a:prstGeom>
+          <a:solidFill>
+            <a:srgbClr val="FFFFFF"/>
+          </a:solidFill>
+          <a:ln>
+            <a:solidFill>
+              <a:srgbClr val="F5F7FA"/>
+            </a:solidFill>
+          </a:ln>
         </p:spPr>
-      </p:pic>
-      <p:pic>
-        <p:nvPicPr>
-          <p:cNvPr id="5" name="Picture 4" descr="thumb2.jpg"/>
-          <p:cNvPicPr>
-            <a:picLocks noChangeAspect="1"/>
-          </p:cNvPicPr>
+        <p:style>
+          <a:lnRef idx="1">
+            <a:schemeClr val="accent1"/>
+          </a:lnRef>
+          <a:fillRef idx="3">
+            <a:schemeClr val="accent1"/>
+          </a:fillRef>
+          <a:effectRef idx="2">
+            <a:schemeClr val="accent1"/>
+          </a:effectRef>
+          <a:fontRef idx="minor">
+            <a:schemeClr val="lt1"/>
+          </a:fontRef>
+        </p:style>
+        <p:txBody>
+          <a:bodyPr wrap="square" lIns="146304" tIns="109728" rIns="146304" rtlCol="0" anchor="ctr"/>
+          <a:lstStyle/>
+          <a:p>
+            <a:pPr algn="ctr"/>
+            <a:r>
+              <a:rPr sz="1600" b="1">
+                <a:solidFill>
+                  <a:srgbClr val="0C183A"/>
+                </a:solidFill>
+                <a:latin typeface="Aptos Display"/>
+              </a:rPr>
+              <a:t>Application Tables</a:t>
+            </a:r>
+          </a:p>
+          <a:p>
+            <a:pPr>
+              <a:spcAft>
+                <a:spcPts val="200"/>
+              </a:spcAft>
+            </a:pPr>
+            <a:r>
+              <a:rPr sz="1200">
+                <a:solidFill>
+                  <a:srgbClr val="2C3E50"/>
+                </a:solidFill>
+                <a:latin typeface="Aptos"/>
+              </a:rPr>
+              <a:t>api_video - videos, URLs, thumbnails, views, author</a:t>
+            </a:r>
+          </a:p>
+          <a:p>
+            <a:pPr>
+              <a:spcAft>
+                <a:spcPts val="200"/>
+              </a:spcAft>
+            </a:pPr>
+            <a:r>
+              <a:rPr sz="1200">
+                <a:solidFill>
+                  <a:srgbClr val="2C3E50"/>
+                </a:solidFill>
+                <a:latin typeface="Aptos"/>
+              </a:rPr>
+              <a:t>api_comment - comments attached to videos</a:t>
+            </a:r>
+          </a:p>
+          <a:p>
+            <a:pPr>
+              <a:spcAft>
+                <a:spcPts val="200"/>
+              </a:spcAft>
+            </a:pPr>
+            <a:r>
+              <a:rPr sz="1200">
+                <a:solidFill>
+                  <a:srgbClr val="2C3E50"/>
+                </a:solidFill>
+                <a:latin typeface="Aptos"/>
+              </a:rPr>
+              <a:t>api_profile - user avatar/profile data</a:t>
+            </a:r>
+          </a:p>
+          <a:p>
+            <a:pPr>
+              <a:spcAft>
+                <a:spcPts val="200"/>
+              </a:spcAft>
+            </a:pPr>
+            <a:r>
+              <a:rPr sz="1200">
+                <a:solidFill>
+                  <a:srgbClr val="2C3E50"/>
+                </a:solidFill>
+                <a:latin typeface="Aptos"/>
+              </a:rPr>
+              <a:t>api_passwordresettoken - password reset codes and expiry</a:t>
+            </a:r>
+          </a:p>
+          <a:p>
+            <a:pPr>
+              <a:spcAft>
+                <a:spcPts val="200"/>
+              </a:spcAft>
+            </a:pPr>
+            <a:r>
+              <a:rPr sz="1200">
+                <a:solidFill>
+                  <a:srgbClr val="2C3E50"/>
+                </a:solidFill>
+                <a:latin typeface="Aptos"/>
+              </a:rPr>
+              <a:t>api_trackingevent - watch progress and interaction events</a:t>
+            </a:r>
+          </a:p>
+          <a:p>
+            <a:pPr>
+              <a:spcAft>
+                <a:spcPts val="200"/>
+              </a:spcAft>
+            </a:pPr>
+            <a:r>
+              <a:rPr sz="1200">
+                <a:solidFill>
+                  <a:srgbClr val="2C3E50"/>
+                </a:solidFill>
+                <a:latin typeface="Aptos"/>
+              </a:rPr>
+              <a:t>api_uservideostate - latest state per client/video pair</a:t>
+            </a:r>
+          </a:p>
+        </p:txBody>
+      </p:sp>
+      <p:sp>
+        <p:nvSpPr>
+          <p:cNvPr id="5" name="Rectangle 4"/>
+          <p:cNvSpPr/>
           <p:nvPr/>
-        </p:nvPicPr>
-        <p:blipFill>
-          <a:blip r:embed="rId3"/>
-          <a:stretch>
-            <a:fillRect/>
-          </a:stretch>
-        </p:blipFill>
+        </p:nvSpPr>
         <p:spPr>
           <a:xfrm>
-            <a:off x="4663440" y="822960"/>
-            <a:ext cx="3657600" cy="2057400"/>
+            <a:off x="6263640" y="1234440"/>
+            <a:ext cx="5303520" cy="4526280"/>
           </a:xfrm>
           <a:prstGeom prst="rect">
             <a:avLst/>
           </a:prstGeom>
+          <a:solidFill>
+            <a:srgbClr val="FAFCFF"/>
+          </a:solidFill>
+          <a:ln>
+            <a:solidFill>
+              <a:srgbClr val="F5F7FA"/>
+            </a:solidFill>
+          </a:ln>
         </p:spPr>
-      </p:pic>
-      <p:pic>
-        <p:nvPicPr>
-          <p:cNvPr id="6" name="Picture 5" descr="thumb3.jpg"/>
-          <p:cNvPicPr>
-            <a:picLocks noChangeAspect="1"/>
-          </p:cNvPicPr>
+        <p:style>
+          <a:lnRef idx="1">
+            <a:schemeClr val="accent1"/>
+          </a:lnRef>
+          <a:fillRef idx="3">
+            <a:schemeClr val="accent1"/>
+          </a:fillRef>
+          <a:effectRef idx="2">
+            <a:schemeClr val="accent1"/>
+          </a:effectRef>
+          <a:fontRef idx="minor">
+            <a:schemeClr val="lt1"/>
+          </a:fontRef>
+        </p:style>
+        <p:txBody>
+          <a:bodyPr wrap="square" lIns="146304" tIns="109728" rIns="146304" rtlCol="0" anchor="ctr"/>
+          <a:lstStyle/>
+          <a:p>
+            <a:pPr algn="ctr"/>
+            <a:r>
+              <a:rPr sz="1600" b="1">
+                <a:solidFill>
+                  <a:srgbClr val="0C183A"/>
+                </a:solidFill>
+                <a:latin typeface="Aptos Display"/>
+              </a:rPr>
+              <a:t>Django Tables</a:t>
+            </a:r>
+          </a:p>
+          <a:p>
+            <a:pPr>
+              <a:spcAft>
+                <a:spcPts val="200"/>
+              </a:spcAft>
+            </a:pPr>
+            <a:r>
+              <a:rPr sz="1200">
+                <a:solidFill>
+                  <a:srgbClr val="2C3E50"/>
+                </a:solidFill>
+                <a:latin typeface="Aptos"/>
+              </a:rPr>
+              <a:t>auth_user, auth_group, auth_permission</a:t>
+            </a:r>
+          </a:p>
+          <a:p>
+            <a:pPr>
+              <a:spcAft>
+                <a:spcPts val="200"/>
+              </a:spcAft>
+            </a:pPr>
+            <a:r>
+              <a:rPr sz="1200">
+                <a:solidFill>
+                  <a:srgbClr val="2C3E50"/>
+                </a:solidFill>
+                <a:latin typeface="Aptos"/>
+              </a:rPr>
+              <a:t>auth_user_groups, auth_user_user_permissions, auth_group_permissions</a:t>
+            </a:r>
+          </a:p>
+          <a:p>
+            <a:pPr>
+              <a:spcAft>
+                <a:spcPts val="200"/>
+              </a:spcAft>
+            </a:pPr>
+            <a:r>
+              <a:rPr sz="1200">
+                <a:solidFill>
+                  <a:srgbClr val="2C3E50"/>
+                </a:solidFill>
+                <a:latin typeface="Aptos"/>
+              </a:rPr>
+              <a:t>django_admin_log, django_content_type, django_migrations, django_session</a:t>
+            </a:r>
+          </a:p>
+        </p:txBody>
+      </p:sp>
+      <p:sp>
+        <p:nvSpPr>
+          <p:cNvPr id="6" name="TextBox 5"/>
+          <p:cNvSpPr txBox="1"/>
           <p:nvPr/>
-        </p:nvPicPr>
-        <p:blipFill>
-          <a:blip r:embed="rId4"/>
-          <a:stretch>
-            <a:fillRect/>
-          </a:stretch>
-        </p:blipFill>
+        </p:nvSpPr>
         <p:spPr>
           <a:xfrm>
-            <a:off x="274320" y="3108960"/>
-            <a:ext cx="3657600" cy="2057400"/>
+            <a:off x="502920" y="6400800"/>
+            <a:ext cx="10972800" cy="228600"/>
           </a:xfrm>
           <a:prstGeom prst="rect">
             <a:avLst/>
           </a:prstGeom>
+          <a:noFill/>
         </p:spPr>
-      </p:pic>
-      <p:pic>
-        <p:nvPicPr>
-          <p:cNvPr id="7" name="Picture 6" descr="thumb4.jpg"/>
-          <p:cNvPicPr>
-            <a:picLocks noChangeAspect="1"/>
-          </p:cNvPicPr>
-          <p:nvPr/>
-        </p:nvPicPr>
-        <p:blipFill>
-          <a:blip r:embed="rId5"/>
-          <a:stretch>
-            <a:fillRect/>
-          </a:stretch>
-        </p:blipFill>
-        <p:spPr>
-          <a:xfrm>
-            <a:off x="4663440" y="3108960"/>
-            <a:ext cx="3657600" cy="2057400"/>
-          </a:xfrm>
-          <a:prstGeom prst="rect">
-            <a:avLst/>
-          </a:prstGeom>
-        </p:spPr>
-      </p:pic>
+        <p:txBody>
+          <a:bodyPr wrap="none">
+            <a:spAutoFit/>
+          </a:bodyPr>
+          <a:lstStyle/>
+          <a:p>
+            <a:pPr algn="r"/>
+            <a:r>
+              <a:rPr sz="900">
+                <a:solidFill>
+                  <a:srgbClr val="788291"/>
+                </a:solidFill>
+                <a:latin typeface="Aptos"/>
+              </a:rPr>
+              <a:t>Total tables in the backend database: 16</a:t>
+            </a:r>
+          </a:p>
+        </p:txBody>
+      </p:sp>
     </p:spTree>
   </p:cSld>
   <p:clrMapOvr>
@@ -4745,13 +5744,13 @@
 </p:sld>
 </file>
 
-<file path=ppt/slides/slide15.xml><?xml version="1.0" encoding="utf-8"?>
-<p:sld xmlns:a="http://schemas.openxmlformats.org/drawingml/2006/main" xmlns:p="http://schemas.openxmlformats.org/presentationml/2006/main" xmlns:r="http://schemas.openxmlformats.org/officeDocument/2006/relationships">
+<file path=ppt/slides/slide6.xml><?xml version="1.0" encoding="utf-8"?>
+<p:sld xmlns:a="http://schemas.openxmlformats.org/drawingml/2006/main" xmlns:r="http://schemas.openxmlformats.org/officeDocument/2006/relationships" xmlns:p="http://schemas.openxmlformats.org/presentationml/2006/main">
   <p:cSld>
     <p:bg>
       <p:bgPr>
         <a:solidFill>
-          <a:srgbClr val="FFFFFF"/>
+          <a:srgbClr val="F8FAFC"/>
         </a:solidFill>
         <a:effectLst/>
       </p:bgPr>
@@ -4762,7 +5761,14 @@
         <p:cNvGrpSpPr/>
         <p:nvPr/>
       </p:nvGrpSpPr>
-      <p:grpSpPr/>
+      <p:grpSpPr>
+        <a:xfrm>
+          <a:off x="0" y="0"/>
+          <a:ext cx="0" cy="0"/>
+          <a:chOff x="0" y="0"/>
+          <a:chExt cx="0" cy="0"/>
+        </a:xfrm>
+      </p:grpSpPr>
       <p:sp>
         <p:nvSpPr>
           <p:cNvPr id="2" name="Rectangle 1"/>
@@ -4772,18 +5778,16 @@
         <p:spPr>
           <a:xfrm>
             <a:off x="0" y="0"/>
-            <a:ext cx="9144000" cy="640080"/>
+            <a:ext cx="12191695" cy="347472"/>
           </a:xfrm>
           <a:prstGeom prst="rect">
             <a:avLst/>
           </a:prstGeom>
           <a:solidFill>
-            <a:srgbClr val="1F4E79"/>
+            <a:srgbClr val="0C183A"/>
           </a:solidFill>
           <a:ln>
-            <a:solidFill>
-              <a:srgbClr val="1F4E79"/>
-            </a:solidFill>
+            <a:noFill/>
           </a:ln>
         </p:spPr>
         <p:style>
@@ -4805,6 +5809,7 @@
           <a:lstStyle/>
           <a:p>
             <a:pPr algn="ctr"/>
+            <a:endParaRPr/>
           </a:p>
         </p:txBody>
       </p:sp>
@@ -4816,8 +5821,8 @@
         </p:nvSpPr>
         <p:spPr>
           <a:xfrm>
-            <a:off x="457200" y="91440"/>
-            <a:ext cx="8229600" cy="502920"/>
+            <a:off x="502920" y="502920"/>
+            <a:ext cx="10972800" cy="731520"/>
           </a:xfrm>
           <a:prstGeom prst="rect">
             <a:avLst/>
@@ -4830,115 +5835,423 @@
           </a:bodyPr>
           <a:lstStyle/>
           <a:p>
-            <a:pPr>
-              <a:defRPr sz="3600" b="1">
-                <a:solidFill>
-                  <a:srgbClr val="FFFFFF"/>
-                </a:solidFill>
-              </a:defRPr>
-            </a:pPr>
-            <a:r>
-              <a:t>Project Gallery - Set 2</a:t>
-            </a:r>
-          </a:p>
-        </p:txBody>
-      </p:sp>
-      <p:pic>
-        <p:nvPicPr>
-          <p:cNvPr id="4" name="Picture 3" descr="thumb5.jpg"/>
-          <p:cNvPicPr>
-            <a:picLocks noChangeAspect="1"/>
-          </p:cNvPicPr>
+            <a:r>
+              <a:rPr sz="2800" b="1">
+                <a:solidFill>
+                  <a:srgbClr val="0C183A"/>
+                </a:solidFill>
+                <a:latin typeface="Aptos Display"/>
+              </a:rPr>
+              <a:t>Key Features</a:t>
+            </a:r>
+          </a:p>
+          <a:p>
+            <a:pPr>
+              <a:spcBef>
+                <a:spcPts val="400"/>
+              </a:spcBef>
+            </a:pPr>
+            <a:r>
+              <a:rPr sz="1200">
+                <a:solidFill>
+                  <a:srgbClr val="788291"/>
+                </a:solidFill>
+                <a:latin typeface="Aptos"/>
+              </a:rPr>
+              <a:t>User-facing capabilities already present in the platform</a:t>
+            </a:r>
+          </a:p>
+        </p:txBody>
+      </p:sp>
+      <p:sp>
+        <p:nvSpPr>
+          <p:cNvPr id="4" name="Rectangle 3"/>
+          <p:cNvSpPr/>
           <p:nvPr/>
-        </p:nvPicPr>
-        <p:blipFill>
-          <a:blip r:embed="rId2"/>
-          <a:stretch>
-            <a:fillRect/>
-          </a:stretch>
-        </p:blipFill>
+        </p:nvSpPr>
         <p:spPr>
           <a:xfrm>
-            <a:off x="274320" y="822960"/>
-            <a:ext cx="3657600" cy="2057400"/>
+            <a:off x="640080" y="1234440"/>
+            <a:ext cx="3611880" cy="4526280"/>
           </a:xfrm>
           <a:prstGeom prst="rect">
             <a:avLst/>
           </a:prstGeom>
+          <a:solidFill>
+            <a:srgbClr val="FFFFFF"/>
+          </a:solidFill>
+          <a:ln>
+            <a:solidFill>
+              <a:srgbClr val="F5F7FA"/>
+            </a:solidFill>
+          </a:ln>
         </p:spPr>
-      </p:pic>
-      <p:pic>
-        <p:nvPicPr>
-          <p:cNvPr id="5" name="Picture 4" descr="thumb6.jpg"/>
-          <p:cNvPicPr>
-            <a:picLocks noChangeAspect="1"/>
-          </p:cNvPicPr>
+        <p:style>
+          <a:lnRef idx="1">
+            <a:schemeClr val="accent1"/>
+          </a:lnRef>
+          <a:fillRef idx="3">
+            <a:schemeClr val="accent1"/>
+          </a:fillRef>
+          <a:effectRef idx="2">
+            <a:schemeClr val="accent1"/>
+          </a:effectRef>
+          <a:fontRef idx="minor">
+            <a:schemeClr val="lt1"/>
+          </a:fontRef>
+        </p:style>
+        <p:txBody>
+          <a:bodyPr wrap="square" lIns="146304" tIns="109728" rIns="146304" rtlCol="0" anchor="ctr"/>
+          <a:lstStyle/>
+          <a:p>
+            <a:pPr algn="ctr"/>
+            <a:r>
+              <a:rPr sz="1600" b="1">
+                <a:solidFill>
+                  <a:srgbClr val="0C183A"/>
+                </a:solidFill>
+                <a:latin typeface="Aptos Display"/>
+              </a:rPr>
+              <a:t>Video Experience</a:t>
+            </a:r>
+          </a:p>
+          <a:p>
+            <a:pPr>
+              <a:spcAft>
+                <a:spcPts val="200"/>
+              </a:spcAft>
+            </a:pPr>
+            <a:r>
+              <a:rPr sz="1200">
+                <a:solidFill>
+                  <a:srgbClr val="2C3E50"/>
+                </a:solidFill>
+                <a:latin typeface="Aptos"/>
+              </a:rPr>
+              <a:t>Video listing and detail pages</a:t>
+            </a:r>
+          </a:p>
+          <a:p>
+            <a:pPr>
+              <a:spcAft>
+                <a:spcPts val="200"/>
+              </a:spcAft>
+            </a:pPr>
+            <a:r>
+              <a:rPr sz="1200">
+                <a:solidFill>
+                  <a:srgbClr val="2C3E50"/>
+                </a:solidFill>
+                <a:latin typeface="Aptos"/>
+              </a:rPr>
+              <a:t>Comments and metadata</a:t>
+            </a:r>
+          </a:p>
+          <a:p>
+            <a:pPr>
+              <a:spcAft>
+                <a:spcPts val="200"/>
+              </a:spcAft>
+            </a:pPr>
+            <a:r>
+              <a:rPr sz="1200">
+                <a:solidFill>
+                  <a:srgbClr val="2C3E50"/>
+                </a:solidFill>
+                <a:latin typeface="Aptos"/>
+              </a:rPr>
+              <a:t>Trending and category views</a:t>
+            </a:r>
+          </a:p>
+          <a:p>
+            <a:pPr>
+              <a:spcAft>
+                <a:spcPts val="200"/>
+              </a:spcAft>
+            </a:pPr>
+            <a:r>
+              <a:rPr sz="1200">
+                <a:solidFill>
+                  <a:srgbClr val="2C3E50"/>
+                </a:solidFill>
+                <a:latin typeface="Aptos"/>
+              </a:rPr>
+              <a:t>Watch later and library support</a:t>
+            </a:r>
+          </a:p>
+        </p:txBody>
+      </p:sp>
+      <p:sp>
+        <p:nvSpPr>
+          <p:cNvPr id="5" name="Rectangle 4"/>
+          <p:cNvSpPr/>
           <p:nvPr/>
-        </p:nvPicPr>
-        <p:blipFill>
-          <a:blip r:embed="rId3"/>
-          <a:stretch>
-            <a:fillRect/>
-          </a:stretch>
-        </p:blipFill>
+        </p:nvSpPr>
         <p:spPr>
           <a:xfrm>
-            <a:off x="4663440" y="822960"/>
-            <a:ext cx="3657600" cy="2057400"/>
+            <a:off x="4297680" y="1234440"/>
+            <a:ext cx="3611880" cy="4526280"/>
           </a:xfrm>
           <a:prstGeom prst="rect">
             <a:avLst/>
           </a:prstGeom>
+          <a:solidFill>
+            <a:srgbClr val="FAFCFF"/>
+          </a:solidFill>
+          <a:ln>
+            <a:solidFill>
+              <a:srgbClr val="F5F7FA"/>
+            </a:solidFill>
+          </a:ln>
         </p:spPr>
-      </p:pic>
-      <p:pic>
-        <p:nvPicPr>
-          <p:cNvPr id="6" name="Picture 5" descr="thumb7.jpg"/>
-          <p:cNvPicPr>
-            <a:picLocks noChangeAspect="1"/>
-          </p:cNvPicPr>
+        <p:style>
+          <a:lnRef idx="1">
+            <a:schemeClr val="accent1"/>
+          </a:lnRef>
+          <a:fillRef idx="3">
+            <a:schemeClr val="accent1"/>
+          </a:fillRef>
+          <a:effectRef idx="2">
+            <a:schemeClr val="accent1"/>
+          </a:effectRef>
+          <a:fontRef idx="minor">
+            <a:schemeClr val="lt1"/>
+          </a:fontRef>
+        </p:style>
+        <p:txBody>
+          <a:bodyPr wrap="square" lIns="146304" tIns="109728" rIns="146304" rtlCol="0" anchor="ctr"/>
+          <a:lstStyle/>
+          <a:p>
+            <a:pPr algn="ctr"/>
+            <a:r>
+              <a:rPr sz="1600" b="1">
+                <a:solidFill>
+                  <a:srgbClr val="0C183A"/>
+                </a:solidFill>
+                <a:latin typeface="Aptos Display"/>
+              </a:rPr>
+              <a:t>Community and Engagement</a:t>
+            </a:r>
+          </a:p>
+          <a:p>
+            <a:pPr>
+              <a:spcAft>
+                <a:spcPts val="200"/>
+              </a:spcAft>
+            </a:pPr>
+            <a:r>
+              <a:rPr sz="1200">
+                <a:solidFill>
+                  <a:srgbClr val="2C3E50"/>
+                </a:solidFill>
+                <a:latin typeface="Aptos"/>
+              </a:rPr>
+              <a:t>Community posts and polls</a:t>
+            </a:r>
+          </a:p>
+          <a:p>
+            <a:pPr>
+              <a:spcAft>
+                <a:spcPts val="200"/>
+              </a:spcAft>
+            </a:pPr>
+            <a:r>
+              <a:rPr sz="1200">
+                <a:solidFill>
+                  <a:srgbClr val="2C3E50"/>
+                </a:solidFill>
+                <a:latin typeface="Aptos"/>
+              </a:rPr>
+              <a:t>Live stream chat and Super Chat</a:t>
+            </a:r>
+          </a:p>
+          <a:p>
+            <a:pPr>
+              <a:spcAft>
+                <a:spcPts val="200"/>
+              </a:spcAft>
+            </a:pPr>
+            <a:r>
+              <a:rPr sz="1200">
+                <a:solidFill>
+                  <a:srgbClr val="2C3E50"/>
+                </a:solidFill>
+                <a:latin typeface="Aptos"/>
+              </a:rPr>
+              <a:t>Short-form feed</a:t>
+            </a:r>
+          </a:p>
+          <a:p>
+            <a:pPr>
+              <a:spcAft>
+                <a:spcPts val="200"/>
+              </a:spcAft>
+            </a:pPr>
+            <a:r>
+              <a:rPr sz="1200">
+                <a:solidFill>
+                  <a:srgbClr val="2C3E50"/>
+                </a:solidFill>
+                <a:latin typeface="Aptos"/>
+              </a:rPr>
+              <a:t>Search and series pages</a:t>
+            </a:r>
+          </a:p>
+        </p:txBody>
+      </p:sp>
+      <p:sp>
+        <p:nvSpPr>
+          <p:cNvPr id="6" name="Rectangle 5"/>
+          <p:cNvSpPr/>
           <p:nvPr/>
-        </p:nvPicPr>
-        <p:blipFill>
-          <a:blip r:embed="rId4"/>
-          <a:stretch>
-            <a:fillRect/>
-          </a:stretch>
-        </p:blipFill>
+        </p:nvSpPr>
         <p:spPr>
           <a:xfrm>
-            <a:off x="274320" y="3108960"/>
-            <a:ext cx="3657600" cy="2057400"/>
+            <a:off x="7955279" y="1234440"/>
+            <a:ext cx="3611880" cy="4526280"/>
           </a:xfrm>
           <a:prstGeom prst="rect">
             <a:avLst/>
           </a:prstGeom>
+          <a:solidFill>
+            <a:srgbClr val="FFFFFF"/>
+          </a:solidFill>
+          <a:ln>
+            <a:solidFill>
+              <a:srgbClr val="F5F7FA"/>
+            </a:solidFill>
+          </a:ln>
         </p:spPr>
-      </p:pic>
-      <p:pic>
-        <p:nvPicPr>
-          <p:cNvPr id="7" name="Picture 6" descr="thumb8.jpg"/>
-          <p:cNvPicPr>
-            <a:picLocks noChangeAspect="1"/>
-          </p:cNvPicPr>
+        <p:style>
+          <a:lnRef idx="1">
+            <a:schemeClr val="accent1"/>
+          </a:lnRef>
+          <a:fillRef idx="3">
+            <a:schemeClr val="accent1"/>
+          </a:fillRef>
+          <a:effectRef idx="2">
+            <a:schemeClr val="accent1"/>
+          </a:effectRef>
+          <a:fontRef idx="minor">
+            <a:schemeClr val="lt1"/>
+          </a:fontRef>
+        </p:style>
+        <p:txBody>
+          <a:bodyPr wrap="square" lIns="146304" tIns="109728" rIns="146304" rtlCol="0" anchor="ctr"/>
+          <a:lstStyle/>
+          <a:p>
+            <a:pPr algn="ctr"/>
+            <a:r>
+              <a:rPr sz="1600" b="1">
+                <a:solidFill>
+                  <a:srgbClr val="0C183A"/>
+                </a:solidFill>
+                <a:latin typeface="Aptos Display"/>
+              </a:rPr>
+              <a:t>Account and Analytics</a:t>
+            </a:r>
+          </a:p>
+          <a:p>
+            <a:pPr>
+              <a:spcAft>
+                <a:spcPts val="200"/>
+              </a:spcAft>
+            </a:pPr>
+            <a:r>
+              <a:rPr sz="1200">
+                <a:solidFill>
+                  <a:srgbClr val="2C3E50"/>
+                </a:solidFill>
+                <a:latin typeface="Aptos"/>
+              </a:rPr>
+              <a:t>Login, register, and profile pages</a:t>
+            </a:r>
+          </a:p>
+          <a:p>
+            <a:pPr>
+              <a:spcAft>
+                <a:spcPts val="200"/>
+              </a:spcAft>
+            </a:pPr>
+            <a:r>
+              <a:rPr sz="1200">
+                <a:solidFill>
+                  <a:srgbClr val="2C3E50"/>
+                </a:solidFill>
+                <a:latin typeface="Aptos"/>
+              </a:rPr>
+              <a:t>Password reset flow</a:t>
+            </a:r>
+          </a:p>
+          <a:p>
+            <a:pPr>
+              <a:spcAft>
+                <a:spcPts val="200"/>
+              </a:spcAft>
+            </a:pPr>
+            <a:r>
+              <a:rPr sz="1200">
+                <a:solidFill>
+                  <a:srgbClr val="2C3E50"/>
+                </a:solidFill>
+                <a:latin typeface="Aptos"/>
+              </a:rPr>
+              <a:t>Tracking events for behavior analytics</a:t>
+            </a:r>
+          </a:p>
+          <a:p>
+            <a:pPr>
+              <a:spcAft>
+                <a:spcPts val="200"/>
+              </a:spcAft>
+            </a:pPr>
+            <a:r>
+              <a:rPr sz="1200">
+                <a:solidFill>
+                  <a:srgbClr val="2C3E50"/>
+                </a:solidFill>
+                <a:latin typeface="Aptos"/>
+              </a:rPr>
+              <a:t>Avatar upload support</a:t>
+            </a:r>
+          </a:p>
+        </p:txBody>
+      </p:sp>
+      <p:sp>
+        <p:nvSpPr>
+          <p:cNvPr id="7" name="TextBox 6"/>
+          <p:cNvSpPr txBox="1"/>
           <p:nvPr/>
-        </p:nvPicPr>
-        <p:blipFill>
-          <a:blip r:embed="rId5"/>
-          <a:stretch>
-            <a:fillRect/>
-          </a:stretch>
-        </p:blipFill>
+        </p:nvSpPr>
         <p:spPr>
           <a:xfrm>
-            <a:off x="4663440" y="3108960"/>
-            <a:ext cx="3657600" cy="2057400"/>
+            <a:off x="502920" y="6400800"/>
+            <a:ext cx="10972800" cy="228600"/>
           </a:xfrm>
           <a:prstGeom prst="rect">
             <a:avLst/>
           </a:prstGeom>
+          <a:noFill/>
         </p:spPr>
-      </p:pic>
+        <p:txBody>
+          <a:bodyPr wrap="none">
+            <a:spAutoFit/>
+          </a:bodyPr>
+          <a:lstStyle/>
+          <a:p>
+            <a:pPr algn="r"/>
+            <a:r>
+              <a:rPr sz="900">
+                <a:solidFill>
+                  <a:srgbClr val="788291"/>
+                </a:solidFill>
+                <a:latin typeface="Aptos"/>
+              </a:rPr>
+              <a:t>The shop UI exists, but the feature is disabled for now</a:t>
+            </a:r>
+          </a:p>
+        </p:txBody>
+      </p:sp>
     </p:spTree>
   </p:cSld>
   <p:clrMapOvr>
@@ -4947,13 +6260,13 @@
 </p:sld>
 </file>
 
-<file path=ppt/slides/slide16.xml><?xml version="1.0" encoding="utf-8"?>
-<p:sld xmlns:a="http://schemas.openxmlformats.org/drawingml/2006/main" xmlns:p="http://schemas.openxmlformats.org/presentationml/2006/main" xmlns:r="http://schemas.openxmlformats.org/officeDocument/2006/relationships">
+<file path=ppt/slides/slide7.xml><?xml version="1.0" encoding="utf-8"?>
+<p:sld xmlns:a="http://schemas.openxmlformats.org/drawingml/2006/main" xmlns:r="http://schemas.openxmlformats.org/officeDocument/2006/relationships" xmlns:p="http://schemas.openxmlformats.org/presentationml/2006/main">
   <p:cSld>
     <p:bg>
       <p:bgPr>
         <a:solidFill>
-          <a:srgbClr val="FFFFFF"/>
+          <a:srgbClr val="F8FAFC"/>
         </a:solidFill>
         <a:effectLst/>
       </p:bgPr>
@@ -4964,7 +6277,14 @@
         <p:cNvGrpSpPr/>
         <p:nvPr/>
       </p:nvGrpSpPr>
-      <p:grpSpPr/>
+      <p:grpSpPr>
+        <a:xfrm>
+          <a:off x="0" y="0"/>
+          <a:ext cx="0" cy="0"/>
+          <a:chOff x="0" y="0"/>
+          <a:chExt cx="0" cy="0"/>
+        </a:xfrm>
+      </p:grpSpPr>
       <p:sp>
         <p:nvSpPr>
           <p:cNvPr id="2" name="Rectangle 1"/>
@@ -4974,18 +6294,16 @@
         <p:spPr>
           <a:xfrm>
             <a:off x="0" y="0"/>
-            <a:ext cx="9144000" cy="640080"/>
+            <a:ext cx="12191695" cy="347472"/>
           </a:xfrm>
           <a:prstGeom prst="rect">
             <a:avLst/>
           </a:prstGeom>
           <a:solidFill>
-            <a:srgbClr val="1F4E79"/>
+            <a:srgbClr val="0C183A"/>
           </a:solidFill>
           <a:ln>
-            <a:solidFill>
-              <a:srgbClr val="1F4E79"/>
-            </a:solidFill>
+            <a:noFill/>
           </a:ln>
         </p:spPr>
         <p:style>
@@ -5007,6 +6325,7 @@
           <a:lstStyle/>
           <a:p>
             <a:pPr algn="ctr"/>
+            <a:endParaRPr/>
           </a:p>
         </p:txBody>
       </p:sp>
@@ -5018,8 +6337,8 @@
         </p:nvSpPr>
         <p:spPr>
           <a:xfrm>
-            <a:off x="457200" y="91440"/>
-            <a:ext cx="8229600" cy="502920"/>
+            <a:off x="502920" y="502920"/>
+            <a:ext cx="10972800" cy="731520"/>
           </a:xfrm>
           <a:prstGeom prst="rect">
             <a:avLst/>
@@ -5032,115 +6351,353 @@
           </a:bodyPr>
           <a:lstStyle/>
           <a:p>
-            <a:pPr>
-              <a:defRPr sz="3600" b="1">
-                <a:solidFill>
-                  <a:srgbClr val="FFFFFF"/>
-                </a:solidFill>
-              </a:defRPr>
-            </a:pPr>
-            <a:r>
-              <a:t>Project Gallery - Set 3</a:t>
-            </a:r>
-          </a:p>
-        </p:txBody>
-      </p:sp>
-      <p:pic>
-        <p:nvPicPr>
-          <p:cNvPr id="4" name="Picture 3" descr="thumb9.jpg"/>
-          <p:cNvPicPr>
-            <a:picLocks noChangeAspect="1"/>
-          </p:cNvPicPr>
+            <a:r>
+              <a:rPr sz="2800" b="1">
+                <a:solidFill>
+                  <a:srgbClr val="0C183A"/>
+                </a:solidFill>
+                <a:latin typeface="Aptos Display"/>
+              </a:rPr>
+              <a:t>Routes and Pages</a:t>
+            </a:r>
+          </a:p>
+          <a:p>
+            <a:pPr>
+              <a:spcBef>
+                <a:spcPts val="400"/>
+              </a:spcBef>
+            </a:pPr>
+            <a:r>
+              <a:rPr sz="1200">
+                <a:solidFill>
+                  <a:srgbClr val="788291"/>
+                </a:solidFill>
+                <a:latin typeface="Aptos"/>
+              </a:rPr>
+              <a:t>Main frontend surfaces included in the Next.js app</a:t>
+            </a:r>
+          </a:p>
+        </p:txBody>
+      </p:sp>
+      <p:sp>
+        <p:nvSpPr>
+          <p:cNvPr id="4" name="Rectangle 3"/>
+          <p:cNvSpPr/>
           <p:nvPr/>
-        </p:nvPicPr>
-        <p:blipFill>
-          <a:blip r:embed="rId2"/>
-          <a:stretch>
-            <a:fillRect/>
-          </a:stretch>
-        </p:blipFill>
+        </p:nvSpPr>
         <p:spPr>
           <a:xfrm>
-            <a:off x="274320" y="822960"/>
-            <a:ext cx="3657600" cy="2057400"/>
+            <a:off x="640080" y="1234440"/>
+            <a:ext cx="5486400" cy="4526280"/>
           </a:xfrm>
           <a:prstGeom prst="rect">
             <a:avLst/>
           </a:prstGeom>
+          <a:solidFill>
+            <a:srgbClr val="FFFFFF"/>
+          </a:solidFill>
+          <a:ln>
+            <a:solidFill>
+              <a:srgbClr val="F5F7FA"/>
+            </a:solidFill>
+          </a:ln>
         </p:spPr>
-      </p:pic>
-      <p:pic>
-        <p:nvPicPr>
-          <p:cNvPr id="5" name="Picture 4" descr="thumb10.jpg"/>
-          <p:cNvPicPr>
-            <a:picLocks noChangeAspect="1"/>
-          </p:cNvPicPr>
+        <p:style>
+          <a:lnRef idx="1">
+            <a:schemeClr val="accent1"/>
+          </a:lnRef>
+          <a:fillRef idx="3">
+            <a:schemeClr val="accent1"/>
+          </a:fillRef>
+          <a:effectRef idx="2">
+            <a:schemeClr val="accent1"/>
+          </a:effectRef>
+          <a:fontRef idx="minor">
+            <a:schemeClr val="lt1"/>
+          </a:fontRef>
+        </p:style>
+        <p:txBody>
+          <a:bodyPr wrap="square" lIns="146304" tIns="109728" rIns="146304" rtlCol="0" anchor="ctr"/>
+          <a:lstStyle/>
+          <a:p>
+            <a:pPr algn="ctr"/>
+            <a:r>
+              <a:rPr sz="1600" b="1">
+                <a:solidFill>
+                  <a:srgbClr val="0C183A"/>
+                </a:solidFill>
+                <a:latin typeface="Aptos Display"/>
+              </a:rPr>
+              <a:t>Core Content and Engagement Pages</a:t>
+            </a:r>
+          </a:p>
+          <a:p>
+            <a:pPr>
+              <a:spcAft>
+                <a:spcPts val="200"/>
+              </a:spcAft>
+            </a:pPr>
+            <a:r>
+              <a:rPr sz="1200">
+                <a:solidFill>
+                  <a:srgbClr val="2C3E50"/>
+                </a:solidFill>
+                <a:latin typeface="Aptos"/>
+              </a:rPr>
+              <a:t>/ - home</a:t>
+            </a:r>
+          </a:p>
+          <a:p>
+            <a:pPr>
+              <a:spcAft>
+                <a:spcPts val="200"/>
+              </a:spcAft>
+            </a:pPr>
+            <a:r>
+              <a:rPr sz="1200">
+                <a:solidFill>
+                  <a:srgbClr val="2C3E50"/>
+                </a:solidFill>
+                <a:latin typeface="Aptos"/>
+              </a:rPr>
+              <a:t>/video/[id] - video detail</a:t>
+            </a:r>
+          </a:p>
+          <a:p>
+            <a:pPr>
+              <a:spcAft>
+                <a:spcPts val="200"/>
+              </a:spcAft>
+            </a:pPr>
+            <a:r>
+              <a:rPr sz="1200">
+                <a:solidFill>
+                  <a:srgbClr val="2C3E50"/>
+                </a:solidFill>
+                <a:latin typeface="Aptos"/>
+              </a:rPr>
+              <a:t>/category/[slug] - category view</a:t>
+            </a:r>
+          </a:p>
+          <a:p>
+            <a:pPr>
+              <a:spcAft>
+                <a:spcPts val="200"/>
+              </a:spcAft>
+            </a:pPr>
+            <a:r>
+              <a:rPr sz="1200">
+                <a:solidFill>
+                  <a:srgbClr val="2C3E50"/>
+                </a:solidFill>
+                <a:latin typeface="Aptos"/>
+              </a:rPr>
+              <a:t>/about, /contact</a:t>
+            </a:r>
+          </a:p>
+          <a:p>
+            <a:pPr>
+              <a:spcAft>
+                <a:spcPts val="200"/>
+              </a:spcAft>
+            </a:pPr>
+            <a:r>
+              <a:rPr sz="1200">
+                <a:solidFill>
+                  <a:srgbClr val="2C3E50"/>
+                </a:solidFill>
+                <a:latin typeface="Aptos"/>
+              </a:rPr>
+              <a:t>/shorts, /community, /live</a:t>
+            </a:r>
+          </a:p>
+          <a:p>
+            <a:pPr>
+              <a:spcAft>
+                <a:spcPts val="200"/>
+              </a:spcAft>
+            </a:pPr>
+            <a:r>
+              <a:rPr sz="1200">
+                <a:solidFill>
+                  <a:srgbClr val="2C3E50"/>
+                </a:solidFill>
+                <a:latin typeface="Aptos"/>
+              </a:rPr>
+              <a:t>/shop - planned, currently disabled</a:t>
+            </a:r>
+          </a:p>
+        </p:txBody>
+      </p:sp>
+      <p:sp>
+        <p:nvSpPr>
+          <p:cNvPr id="5" name="Rectangle 4"/>
+          <p:cNvSpPr/>
           <p:nvPr/>
-        </p:nvPicPr>
-        <p:blipFill>
-          <a:blip r:embed="rId3"/>
-          <a:stretch>
-            <a:fillRect/>
-          </a:stretch>
-        </p:blipFill>
+        </p:nvSpPr>
         <p:spPr>
           <a:xfrm>
-            <a:off x="4663440" y="822960"/>
-            <a:ext cx="3657600" cy="2057400"/>
+            <a:off x="6355080" y="1234440"/>
+            <a:ext cx="5257800" cy="4526280"/>
           </a:xfrm>
           <a:prstGeom prst="rect">
             <a:avLst/>
           </a:prstGeom>
+          <a:solidFill>
+            <a:srgbClr val="FAFCFF"/>
+          </a:solidFill>
+          <a:ln>
+            <a:solidFill>
+              <a:srgbClr val="F5F7FA"/>
+            </a:solidFill>
+          </a:ln>
         </p:spPr>
-      </p:pic>
-      <p:pic>
-        <p:nvPicPr>
-          <p:cNvPr id="6" name="Picture 5" descr="thumb11.jpg"/>
-          <p:cNvPicPr>
-            <a:picLocks noChangeAspect="1"/>
-          </p:cNvPicPr>
+        <p:style>
+          <a:lnRef idx="1">
+            <a:schemeClr val="accent1"/>
+          </a:lnRef>
+          <a:fillRef idx="3">
+            <a:schemeClr val="accent1"/>
+          </a:fillRef>
+          <a:effectRef idx="2">
+            <a:schemeClr val="accent1"/>
+          </a:effectRef>
+          <a:fontRef idx="minor">
+            <a:schemeClr val="lt1"/>
+          </a:fontRef>
+        </p:style>
+        <p:txBody>
+          <a:bodyPr wrap="square" lIns="146304" tIns="109728" rIns="146304" rtlCol="0" anchor="ctr"/>
+          <a:lstStyle/>
+          <a:p>
+            <a:pPr algn="ctr"/>
+            <a:r>
+              <a:rPr sz="1600" b="1">
+                <a:solidFill>
+                  <a:srgbClr val="0C183A"/>
+                </a:solidFill>
+                <a:latin typeface="Aptos Display"/>
+              </a:rPr>
+              <a:t>Account and Utility Pages</a:t>
+            </a:r>
+          </a:p>
+          <a:p>
+            <a:pPr>
+              <a:spcAft>
+                <a:spcPts val="200"/>
+              </a:spcAft>
+            </a:pPr>
+            <a:r>
+              <a:rPr sz="1200">
+                <a:solidFill>
+                  <a:srgbClr val="2C3E50"/>
+                </a:solidFill>
+                <a:latin typeface="Aptos"/>
+              </a:rPr>
+              <a:t>/login, /register</a:t>
+            </a:r>
+          </a:p>
+          <a:p>
+            <a:pPr>
+              <a:spcAft>
+                <a:spcPts val="200"/>
+              </a:spcAft>
+            </a:pPr>
+            <a:r>
+              <a:rPr sz="1200">
+                <a:solidFill>
+                  <a:srgbClr val="2C3E50"/>
+                </a:solidFill>
+                <a:latin typeface="Aptos"/>
+              </a:rPr>
+              <a:t>/forgot-password, /reset-password</a:t>
+            </a:r>
+          </a:p>
+          <a:p>
+            <a:pPr>
+              <a:spcAft>
+                <a:spcPts val="200"/>
+              </a:spcAft>
+            </a:pPr>
+            <a:r>
+              <a:rPr sz="1200">
+                <a:solidFill>
+                  <a:srgbClr val="2C3E50"/>
+                </a:solidFill>
+                <a:latin typeface="Aptos"/>
+              </a:rPr>
+              <a:t>/profile, /library, /search</a:t>
+            </a:r>
+          </a:p>
+          <a:p>
+            <a:pPr>
+              <a:spcAft>
+                <a:spcPts val="200"/>
+              </a:spcAft>
+            </a:pPr>
+            <a:r>
+              <a:rPr sz="1200">
+                <a:solidFill>
+                  <a:srgbClr val="2C3E50"/>
+                </a:solidFill>
+                <a:latin typeface="Aptos"/>
+              </a:rPr>
+              <a:t>/series, /privacy-policy, /terms-of-service</a:t>
+            </a:r>
+          </a:p>
+          <a:p>
+            <a:pPr>
+              <a:spcAft>
+                <a:spcPts val="200"/>
+              </a:spcAft>
+            </a:pPr>
+            <a:r>
+              <a:rPr sz="1200">
+                <a:solidFill>
+                  <a:srgbClr val="2C3E50"/>
+                </a:solidFill>
+                <a:latin typeface="Aptos"/>
+              </a:rPr>
+              <a:t>/api/*, /tracking, /django-test</a:t>
+            </a:r>
+          </a:p>
+        </p:txBody>
+      </p:sp>
+      <p:sp>
+        <p:nvSpPr>
+          <p:cNvPr id="6" name="TextBox 5"/>
+          <p:cNvSpPr txBox="1"/>
           <p:nvPr/>
-        </p:nvPicPr>
-        <p:blipFill>
-          <a:blip r:embed="rId4"/>
-          <a:stretch>
-            <a:fillRect/>
-          </a:stretch>
-        </p:blipFill>
+        </p:nvSpPr>
         <p:spPr>
           <a:xfrm>
-            <a:off x="274320" y="3108960"/>
-            <a:ext cx="3657600" cy="2057400"/>
+            <a:off x="502920" y="6400800"/>
+            <a:ext cx="10972800" cy="228600"/>
           </a:xfrm>
           <a:prstGeom prst="rect">
             <a:avLst/>
           </a:prstGeom>
+          <a:noFill/>
         </p:spPr>
-      </p:pic>
-      <p:pic>
-        <p:nvPicPr>
-          <p:cNvPr id="7" name="Picture 6" descr="thumb12.jpg"/>
-          <p:cNvPicPr>
-            <a:picLocks noChangeAspect="1"/>
-          </p:cNvPicPr>
-          <p:nvPr/>
-        </p:nvPicPr>
-        <p:blipFill>
-          <a:blip r:embed="rId5"/>
-          <a:stretch>
-            <a:fillRect/>
-          </a:stretch>
-        </p:blipFill>
-        <p:spPr>
-          <a:xfrm>
-            <a:off x="4663440" y="3108960"/>
-            <a:ext cx="3657600" cy="2057400"/>
-          </a:xfrm>
-          <a:prstGeom prst="rect">
-            <a:avLst/>
-          </a:prstGeom>
-        </p:spPr>
-      </p:pic>
+        <p:txBody>
+          <a:bodyPr wrap="none">
+            <a:spAutoFit/>
+          </a:bodyPr>
+          <a:lstStyle/>
+          <a:p>
+            <a:pPr algn="r"/>
+            <a:r>
+              <a:rPr sz="900">
+                <a:solidFill>
+                  <a:srgbClr val="788291"/>
+                </a:solidFill>
+                <a:latin typeface="Aptos"/>
+              </a:rPr>
+              <a:t>The app contains 20+ routes across content, account, and utility sections</a:t>
+            </a:r>
+          </a:p>
+        </p:txBody>
+      </p:sp>
     </p:spTree>
   </p:cSld>
   <p:clrMapOvr>
@@ -5149,13 +6706,13 @@
 </p:sld>
 </file>
 
-<file path=ppt/slides/slide17.xml><?xml version="1.0" encoding="utf-8"?>
-<p:sld xmlns:a="http://schemas.openxmlformats.org/drawingml/2006/main" xmlns:p="http://schemas.openxmlformats.org/presentationml/2006/main" xmlns:r="http://schemas.openxmlformats.org/officeDocument/2006/relationships">
+<file path=ppt/slides/slide8.xml><?xml version="1.0" encoding="utf-8"?>
+<p:sld xmlns:a="http://schemas.openxmlformats.org/drawingml/2006/main" xmlns:r="http://schemas.openxmlformats.org/officeDocument/2006/relationships" xmlns:p="http://schemas.openxmlformats.org/presentationml/2006/main">
   <p:cSld>
     <p:bg>
       <p:bgPr>
         <a:solidFill>
-          <a:srgbClr val="1F4E79"/>
+          <a:srgbClr val="F8FAFC"/>
         </a:solidFill>
         <a:effectLst/>
       </p:bgPr>
@@ -5166,17 +6723,68 @@
         <p:cNvGrpSpPr/>
         <p:nvPr/>
       </p:nvGrpSpPr>
-      <p:grpSpPr/>
-      <p:sp>
-        <p:nvSpPr>
-          <p:cNvPr id="2" name="TextBox 1"/>
+      <p:grpSpPr>
+        <a:xfrm>
+          <a:off x="0" y="0"/>
+          <a:ext cx="0" cy="0"/>
+          <a:chOff x="0" y="0"/>
+          <a:chExt cx="0" cy="0"/>
+        </a:xfrm>
+      </p:grpSpPr>
+      <p:sp>
+        <p:nvSpPr>
+          <p:cNvPr id="2" name="Rectangle 1"/>
+          <p:cNvSpPr/>
+          <p:nvPr/>
+        </p:nvSpPr>
+        <p:spPr>
+          <a:xfrm>
+            <a:off x="0" y="0"/>
+            <a:ext cx="12191695" cy="347472"/>
+          </a:xfrm>
+          <a:prstGeom prst="rect">
+            <a:avLst/>
+          </a:prstGeom>
+          <a:solidFill>
+            <a:srgbClr val="0C183A"/>
+          </a:solidFill>
+          <a:ln>
+            <a:noFill/>
+          </a:ln>
+        </p:spPr>
+        <p:style>
+          <a:lnRef idx="1">
+            <a:schemeClr val="accent1"/>
+          </a:lnRef>
+          <a:fillRef idx="3">
+            <a:schemeClr val="accent1"/>
+          </a:fillRef>
+          <a:effectRef idx="2">
+            <a:schemeClr val="accent1"/>
+          </a:effectRef>
+          <a:fontRef idx="minor">
+            <a:schemeClr val="lt1"/>
+          </a:fontRef>
+        </p:style>
+        <p:txBody>
+          <a:bodyPr rtlCol="0" anchor="ctr"/>
+          <a:lstStyle/>
+          <a:p>
+            <a:pPr algn="ctr"/>
+            <a:endParaRPr/>
+          </a:p>
+        </p:txBody>
+      </p:sp>
+      <p:sp>
+        <p:nvSpPr>
+          <p:cNvPr id="3" name="TextBox 2"/>
           <p:cNvSpPr txBox="1"/>
           <p:nvPr/>
         </p:nvSpPr>
         <p:spPr>
           <a:xfrm>
-            <a:off x="914400" y="2286000"/>
-            <a:ext cx="7315200" cy="1828800"/>
+            <a:off x="502920" y="502920"/>
+            <a:ext cx="10972800" cy="731520"/>
           </a:xfrm>
           <a:prstGeom prst="rect">
             <a:avLst/>
@@ -5184,34 +6792,285 @@
           <a:noFill/>
         </p:spPr>
         <p:txBody>
-          <a:bodyPr wrap="square">
+          <a:bodyPr wrap="none">
             <a:spAutoFit/>
           </a:bodyPr>
           <a:lstStyle/>
           <a:p>
-            <a:pPr algn="ctr">
-              <a:defRPr sz="6600" b="1">
-                <a:solidFill>
-                  <a:srgbClr val="FFFFFF"/>
-                </a:solidFill>
-              </a:defRPr>
-            </a:pPr>
-            <a:r>
-              <a:t>VlogHub</a:t>
-            </a:r>
-          </a:p>
-        </p:txBody>
-      </p:sp>
-      <p:sp>
-        <p:nvSpPr>
-          <p:cNvPr id="3" name="TextBox 2"/>
+            <a:r>
+              <a:rPr sz="2800" b="1">
+                <a:solidFill>
+                  <a:srgbClr val="0C183A"/>
+                </a:solidFill>
+                <a:latin typeface="Aptos Display"/>
+              </a:rPr>
+              <a:t>Frontend Structure</a:t>
+            </a:r>
+          </a:p>
+          <a:p>
+            <a:pPr>
+              <a:spcBef>
+                <a:spcPts val="400"/>
+              </a:spcBef>
+            </a:pPr>
+            <a:r>
+              <a:rPr sz="1200">
+                <a:solidFill>
+                  <a:srgbClr val="788291"/>
+                </a:solidFill>
+                <a:latin typeface="Aptos"/>
+              </a:rPr>
+              <a:t>How the UI is organized</a:t>
+            </a:r>
+          </a:p>
+        </p:txBody>
+      </p:sp>
+      <p:sp>
+        <p:nvSpPr>
+          <p:cNvPr id="4" name="Rectangle 3"/>
+          <p:cNvSpPr/>
+          <p:nvPr/>
+        </p:nvSpPr>
+        <p:spPr>
+          <a:xfrm>
+            <a:off x="640080" y="1234440"/>
+            <a:ext cx="5212080" cy="4526280"/>
+          </a:xfrm>
+          <a:prstGeom prst="rect">
+            <a:avLst/>
+          </a:prstGeom>
+          <a:solidFill>
+            <a:srgbClr val="FFFFFF"/>
+          </a:solidFill>
+          <a:ln>
+            <a:solidFill>
+              <a:srgbClr val="F5F7FA"/>
+            </a:solidFill>
+          </a:ln>
+        </p:spPr>
+        <p:style>
+          <a:lnRef idx="1">
+            <a:schemeClr val="accent1"/>
+          </a:lnRef>
+          <a:fillRef idx="3">
+            <a:schemeClr val="accent1"/>
+          </a:fillRef>
+          <a:effectRef idx="2">
+            <a:schemeClr val="accent1"/>
+          </a:effectRef>
+          <a:fontRef idx="minor">
+            <a:schemeClr val="lt1"/>
+          </a:fontRef>
+        </p:style>
+        <p:txBody>
+          <a:bodyPr wrap="square" lIns="146304" tIns="109728" rIns="146304" rtlCol="0" anchor="ctr"/>
+          <a:lstStyle/>
+          <a:p>
+            <a:pPr algn="ctr"/>
+            <a:r>
+              <a:rPr sz="1600" b="1">
+                <a:solidFill>
+                  <a:srgbClr val="0C183A"/>
+                </a:solidFill>
+                <a:latin typeface="Aptos Display"/>
+              </a:rPr>
+              <a:t>State and Utilities</a:t>
+            </a:r>
+          </a:p>
+          <a:p>
+            <a:pPr>
+              <a:spcAft>
+                <a:spcPts val="200"/>
+              </a:spcAft>
+            </a:pPr>
+            <a:r>
+              <a:rPr sz="1200">
+                <a:solidFill>
+                  <a:srgbClr val="2C3E50"/>
+                </a:solidFill>
+                <a:latin typeface="Aptos"/>
+              </a:rPr>
+              <a:t>userDataStore for authentication and profile state</a:t>
+            </a:r>
+          </a:p>
+          <a:p>
+            <a:pPr>
+              <a:spcAft>
+                <a:spcPts val="200"/>
+              </a:spcAft>
+            </a:pPr>
+            <a:r>
+              <a:rPr sz="1200">
+                <a:solidFill>
+                  <a:srgbClr val="2C3E50"/>
+                </a:solidFill>
+                <a:latin typeface="Aptos"/>
+              </a:rPr>
+              <a:t>shopStore for cart-related UI state</a:t>
+            </a:r>
+          </a:p>
+          <a:p>
+            <a:pPr>
+              <a:spcAft>
+                <a:spcPts val="200"/>
+              </a:spcAft>
+            </a:pPr>
+            <a:r>
+              <a:rPr sz="1200">
+                <a:solidFill>
+                  <a:srgbClr val="2C3E50"/>
+                </a:solidFill>
+                <a:latin typeface="Aptos"/>
+              </a:rPr>
+              <a:t>ThemeProvider for dark/light mode</a:t>
+            </a:r>
+          </a:p>
+          <a:p>
+            <a:pPr>
+              <a:spcAft>
+                <a:spcPts val="200"/>
+              </a:spcAft>
+            </a:pPr>
+            <a:r>
+              <a:rPr sz="1200">
+                <a:solidFill>
+                  <a:srgbClr val="2C3E50"/>
+                </a:solidFill>
+                <a:latin typeface="Aptos"/>
+              </a:rPr>
+              <a:t>lib/ contains API clients and helper utilities</a:t>
+            </a:r>
+          </a:p>
+        </p:txBody>
+      </p:sp>
+      <p:sp>
+        <p:nvSpPr>
+          <p:cNvPr id="5" name="Rectangle 4"/>
+          <p:cNvSpPr/>
+          <p:nvPr/>
+        </p:nvSpPr>
+        <p:spPr>
+          <a:xfrm>
+            <a:off x="6263640" y="1234440"/>
+            <a:ext cx="5303520" cy="4526280"/>
+          </a:xfrm>
+          <a:prstGeom prst="rect">
+            <a:avLst/>
+          </a:prstGeom>
+          <a:solidFill>
+            <a:srgbClr val="FAFCFF"/>
+          </a:solidFill>
+          <a:ln>
+            <a:solidFill>
+              <a:srgbClr val="F5F7FA"/>
+            </a:solidFill>
+          </a:ln>
+        </p:spPr>
+        <p:style>
+          <a:lnRef idx="1">
+            <a:schemeClr val="accent1"/>
+          </a:lnRef>
+          <a:fillRef idx="3">
+            <a:schemeClr val="accent1"/>
+          </a:fillRef>
+          <a:effectRef idx="2">
+            <a:schemeClr val="accent1"/>
+          </a:effectRef>
+          <a:fontRef idx="minor">
+            <a:schemeClr val="lt1"/>
+          </a:fontRef>
+        </p:style>
+        <p:txBody>
+          <a:bodyPr wrap="square" lIns="146304" tIns="109728" rIns="146304" rtlCol="0" anchor="ctr"/>
+          <a:lstStyle/>
+          <a:p>
+            <a:pPr algn="ctr"/>
+            <a:r>
+              <a:rPr sz="1600" b="1">
+                <a:solidFill>
+                  <a:srgbClr val="0C183A"/>
+                </a:solidFill>
+                <a:latin typeface="Aptos Display"/>
+              </a:rPr>
+              <a:t>Reusable Components</a:t>
+            </a:r>
+          </a:p>
+          <a:p>
+            <a:pPr>
+              <a:spcAft>
+                <a:spcPts val="200"/>
+              </a:spcAft>
+            </a:pPr>
+            <a:r>
+              <a:rPr sz="1200">
+                <a:solidFill>
+                  <a:srgbClr val="2C3E50"/>
+                </a:solidFill>
+                <a:latin typeface="Aptos"/>
+              </a:rPr>
+              <a:t>Navbar, MobileBottomNav, SearchOverlay</a:t>
+            </a:r>
+          </a:p>
+          <a:p>
+            <a:pPr>
+              <a:spcAft>
+                <a:spcPts val="200"/>
+              </a:spcAft>
+            </a:pPr>
+            <a:r>
+              <a:rPr sz="1200">
+                <a:solidFill>
+                  <a:srgbClr val="2C3E50"/>
+                </a:solidFill>
+                <a:latin typeface="Aptos"/>
+              </a:rPr>
+              <a:t>VideoPlayer, CommentSection, VideoCard</a:t>
+            </a:r>
+          </a:p>
+          <a:p>
+            <a:pPr>
+              <a:spcAft>
+                <a:spcPts val="200"/>
+              </a:spcAft>
+            </a:pPr>
+            <a:r>
+              <a:rPr sz="1200">
+                <a:solidFill>
+                  <a:srgbClr val="2C3E50"/>
+                </a:solidFill>
+                <a:latin typeface="Aptos"/>
+              </a:rPr>
+              <a:t>HeroSlider, ParallaxHero, FAQAccordion</a:t>
+            </a:r>
+          </a:p>
+          <a:p>
+            <a:pPr>
+              <a:spcAft>
+                <a:spcPts val="200"/>
+              </a:spcAft>
+            </a:pPr>
+            <a:r>
+              <a:rPr sz="1200">
+                <a:solidFill>
+                  <a:srgbClr val="2C3E50"/>
+                </a:solidFill>
+                <a:latin typeface="Aptos"/>
+              </a:rPr>
+              <a:t>LiveChatWindow, SuperChatTicker, ShopSection</a:t>
+            </a:r>
+          </a:p>
+        </p:txBody>
+      </p:sp>
+      <p:sp>
+        <p:nvSpPr>
+          <p:cNvPr id="6" name="TextBox 5"/>
           <p:cNvSpPr txBox="1"/>
           <p:nvPr/>
         </p:nvSpPr>
         <p:spPr>
           <a:xfrm>
-            <a:off x="914400" y="3840480"/>
-            <a:ext cx="7315200" cy="1371600"/>
+            <a:off x="502920" y="6400800"/>
+            <a:ext cx="10972800" cy="228600"/>
           </a:xfrm>
           <a:prstGeom prst="rect">
             <a:avLst/>
@@ -5219,59 +7078,20 @@
           <a:noFill/>
         </p:spPr>
         <p:txBody>
-          <a:bodyPr wrap="square">
-            <a:spAutoFit/>
-          </a:bodyPr>
-          <a:lstStyle/>
-          <a:p>
-            <a:pPr algn="ctr">
-              <a:defRPr sz="2800">
-                <a:solidFill>
-                  <a:srgbClr val="DCDCDC"/>
-                </a:solidFill>
-              </a:defRPr>
-            </a:pPr>
-            <a:r>
-              <a:t>A Modern Vlogging Platform</a:t>
-            </a:r>
-            <a:br/>
-            <a:r>
-              <a:t>Built with Next.js &amp; Django</a:t>
-            </a:r>
-          </a:p>
-        </p:txBody>
-      </p:sp>
-      <p:sp>
-        <p:nvSpPr>
-          <p:cNvPr id="4" name="TextBox 3"/>
-          <p:cNvSpPr txBox="1"/>
-          <p:nvPr/>
-        </p:nvSpPr>
-        <p:spPr>
-          <a:xfrm>
-            <a:off x="914400" y="5303520"/>
-            <a:ext cx="7315200" cy="914400"/>
-          </a:xfrm>
-          <a:prstGeom prst="rect">
-            <a:avLst/>
-          </a:prstGeom>
-          <a:noFill/>
-        </p:spPr>
-        <p:txBody>
           <a:bodyPr wrap="none">
             <a:spAutoFit/>
           </a:bodyPr>
           <a:lstStyle/>
           <a:p>
-            <a:pPr algn="ctr">
-              <a:defRPr sz="2000">
-                <a:solidFill>
-                  <a:srgbClr val="64C864"/>
-                </a:solidFill>
-              </a:defRPr>
-            </a:pPr>
-            <a:r>
-              <a:t>✓ Status: Running | 🚀 Active Development</a:t>
+            <a:pPr algn="r"/>
+            <a:r>
+              <a:rPr sz="900">
+                <a:solidFill>
+                  <a:srgbClr val="788291"/>
+                </a:solidFill>
+                <a:latin typeface="Aptos"/>
+              </a:rPr>
+              <a:t>The component layer is intentionally modular for scaling content pages</a:t>
             </a:r>
           </a:p>
         </p:txBody>
@@ -5284,13 +7104,13 @@
 </p:sld>
 </file>
 
-<file path=ppt/slides/slide2.xml><?xml version="1.0" encoding="utf-8"?>
-<p:sld xmlns:a="http://schemas.openxmlformats.org/drawingml/2006/main" xmlns:p="http://schemas.openxmlformats.org/presentationml/2006/main" xmlns:r="http://schemas.openxmlformats.org/officeDocument/2006/relationships">
+<file path=ppt/slides/slide9.xml><?xml version="1.0" encoding="utf-8"?>
+<p:sld xmlns:a="http://schemas.openxmlformats.org/drawingml/2006/main" xmlns:r="http://schemas.openxmlformats.org/officeDocument/2006/relationships" xmlns:p="http://schemas.openxmlformats.org/presentationml/2006/main">
   <p:cSld>
     <p:bg>
       <p:bgPr>
         <a:solidFill>
-          <a:srgbClr val="FFFFFF"/>
+          <a:srgbClr val="F8FAFC"/>
         </a:solidFill>
         <a:effectLst/>
       </p:bgPr>
@@ -5301,7 +7121,14 @@
         <p:cNvGrpSpPr/>
         <p:nvPr/>
       </p:nvGrpSpPr>
-      <p:grpSpPr/>
+      <p:grpSpPr>
+        <a:xfrm>
+          <a:off x="0" y="0"/>
+          <a:ext cx="0" cy="0"/>
+          <a:chOff x="0" y="0"/>
+          <a:chExt cx="0" cy="0"/>
+        </a:xfrm>
+      </p:grpSpPr>
       <p:sp>
         <p:nvSpPr>
           <p:cNvPr id="2" name="Rectangle 1"/>
@@ -5311,18 +7138,16 @@
         <p:spPr>
           <a:xfrm>
             <a:off x="0" y="0"/>
-            <a:ext cx="9144000" cy="731520"/>
+            <a:ext cx="12191695" cy="347472"/>
           </a:xfrm>
           <a:prstGeom prst="rect">
             <a:avLst/>
           </a:prstGeom>
           <a:solidFill>
-            <a:srgbClr val="1F4E79"/>
+            <a:srgbClr val="0C183A"/>
           </a:solidFill>
           <a:ln>
-            <a:solidFill>
-              <a:srgbClr val="1F4E79"/>
-            </a:solidFill>
+            <a:noFill/>
           </a:ln>
         </p:spPr>
         <p:style>
@@ -5344,6 +7169,7 @@
           <a:lstStyle/>
           <a:p>
             <a:pPr algn="ctr"/>
+            <a:endParaRPr/>
           </a:p>
         </p:txBody>
       </p:sp>
@@ -5355,8 +7181,8 @@
         </p:nvSpPr>
         <p:spPr>
           <a:xfrm>
-            <a:off x="457200" y="137160"/>
-            <a:ext cx="8229600" cy="548640"/>
+            <a:off x="502920" y="502920"/>
+            <a:ext cx="10972800" cy="731520"/>
           </a:xfrm>
           <a:prstGeom prst="rect">
             <a:avLst/>
@@ -5369,29 +7195,280 @@
           </a:bodyPr>
           <a:lstStyle/>
           <a:p>
-            <a:pPr>
-              <a:defRPr sz="4000" b="1">
-                <a:solidFill>
-                  <a:srgbClr val="FFFFFF"/>
-                </a:solidFill>
-              </a:defRPr>
-            </a:pPr>
-            <a:r>
-              <a:t>Executive Summary</a:t>
-            </a:r>
-          </a:p>
-        </p:txBody>
-      </p:sp>
-      <p:sp>
-        <p:nvSpPr>
-          <p:cNvPr id="4" name="TextBox 3"/>
+            <a:r>
+              <a:rPr sz="2800" b="1">
+                <a:solidFill>
+                  <a:srgbClr val="0C183A"/>
+                </a:solidFill>
+                <a:latin typeface="Aptos Display"/>
+              </a:rPr>
+              <a:t>Current Status and Deployment</a:t>
+            </a:r>
+          </a:p>
+          <a:p>
+            <a:pPr>
+              <a:spcBef>
+                <a:spcPts val="400"/>
+              </a:spcBef>
+            </a:pPr>
+            <a:r>
+              <a:rPr sz="1200">
+                <a:solidFill>
+                  <a:srgbClr val="788291"/>
+                </a:solidFill>
+                <a:latin typeface="Aptos"/>
+              </a:rPr>
+              <a:t>What is done now and how it is intended to run</a:t>
+            </a:r>
+          </a:p>
+        </p:txBody>
+      </p:sp>
+      <p:sp>
+        <p:nvSpPr>
+          <p:cNvPr id="4" name="Rectangle 3"/>
+          <p:cNvSpPr/>
+          <p:nvPr/>
+        </p:nvSpPr>
+        <p:spPr>
+          <a:xfrm>
+            <a:off x="640080" y="1234440"/>
+            <a:ext cx="5303520" cy="4526280"/>
+          </a:xfrm>
+          <a:prstGeom prst="rect">
+            <a:avLst/>
+          </a:prstGeom>
+          <a:solidFill>
+            <a:srgbClr val="FFFFFF"/>
+          </a:solidFill>
+          <a:ln>
+            <a:solidFill>
+              <a:srgbClr val="F5F7FA"/>
+            </a:solidFill>
+          </a:ln>
+        </p:spPr>
+        <p:style>
+          <a:lnRef idx="1">
+            <a:schemeClr val="accent1"/>
+          </a:lnRef>
+          <a:fillRef idx="3">
+            <a:schemeClr val="accent1"/>
+          </a:fillRef>
+          <a:effectRef idx="2">
+            <a:schemeClr val="accent1"/>
+          </a:effectRef>
+          <a:fontRef idx="minor">
+            <a:schemeClr val="lt1"/>
+          </a:fontRef>
+        </p:style>
+        <p:txBody>
+          <a:bodyPr wrap="square" lIns="146304" tIns="109728" rIns="146304" rtlCol="0" anchor="ctr"/>
+          <a:lstStyle/>
+          <a:p>
+            <a:pPr algn="ctr"/>
+            <a:r>
+              <a:rPr sz="1600" b="1">
+                <a:solidFill>
+                  <a:srgbClr val="0C183A"/>
+                </a:solidFill>
+                <a:latin typeface="Aptos Display"/>
+              </a:rPr>
+              <a:t>Completed / Active</a:t>
+            </a:r>
+          </a:p>
+          <a:p>
+            <a:pPr>
+              <a:spcAft>
+                <a:spcPts val="200"/>
+              </a:spcAft>
+            </a:pPr>
+            <a:r>
+              <a:rPr sz="1200">
+                <a:solidFill>
+                  <a:srgbClr val="2C3E50"/>
+                </a:solidFill>
+                <a:latin typeface="Aptos"/>
+              </a:rPr>
+              <a:t>Frontend app scaffold and major pages</a:t>
+            </a:r>
+          </a:p>
+          <a:p>
+            <a:pPr>
+              <a:spcAft>
+                <a:spcPts val="200"/>
+              </a:spcAft>
+            </a:pPr>
+            <a:r>
+              <a:rPr sz="1200">
+                <a:solidFill>
+                  <a:srgbClr val="2C3E50"/>
+                </a:solidFill>
+                <a:latin typeface="Aptos"/>
+              </a:rPr>
+              <a:t>Django API and authentication models</a:t>
+            </a:r>
+          </a:p>
+          <a:p>
+            <a:pPr>
+              <a:spcAft>
+                <a:spcPts val="200"/>
+              </a:spcAft>
+            </a:pPr>
+            <a:r>
+              <a:rPr sz="1200">
+                <a:solidFill>
+                  <a:srgbClr val="2C3E50"/>
+                </a:solidFill>
+                <a:latin typeface="Aptos"/>
+              </a:rPr>
+              <a:t>Profiles, comments, tracking, and password reset</a:t>
+            </a:r>
+          </a:p>
+          <a:p>
+            <a:pPr>
+              <a:spcAft>
+                <a:spcPts val="200"/>
+              </a:spcAft>
+            </a:pPr>
+            <a:r>
+              <a:rPr sz="1200">
+                <a:solidFill>
+                  <a:srgbClr val="2C3E50"/>
+                </a:solidFill>
+                <a:latin typeface="Aptos"/>
+              </a:rPr>
+              <a:t>Responsive UI and animation system</a:t>
+            </a:r>
+          </a:p>
+        </p:txBody>
+      </p:sp>
+      <p:sp>
+        <p:nvSpPr>
+          <p:cNvPr id="5" name="Rectangle 4"/>
+          <p:cNvSpPr/>
+          <p:nvPr/>
+        </p:nvSpPr>
+        <p:spPr>
+          <a:xfrm>
+            <a:off x="6263640" y="1234440"/>
+            <a:ext cx="5303520" cy="4526280"/>
+          </a:xfrm>
+          <a:prstGeom prst="rect">
+            <a:avLst/>
+          </a:prstGeom>
+          <a:solidFill>
+            <a:srgbClr val="FAFCFF"/>
+          </a:solidFill>
+          <a:ln>
+            <a:solidFill>
+              <a:srgbClr val="F5F7FA"/>
+            </a:solidFill>
+          </a:ln>
+        </p:spPr>
+        <p:style>
+          <a:lnRef idx="1">
+            <a:schemeClr val="accent1"/>
+          </a:lnRef>
+          <a:fillRef idx="3">
+            <a:schemeClr val="accent1"/>
+          </a:fillRef>
+          <a:effectRef idx="2">
+            <a:schemeClr val="accent1"/>
+          </a:effectRef>
+          <a:fontRef idx="minor">
+            <a:schemeClr val="lt1"/>
+          </a:fontRef>
+        </p:style>
+        <p:txBody>
+          <a:bodyPr wrap="square" lIns="146304" tIns="109728" rIns="146304" rtlCol="0" anchor="ctr"/>
+          <a:lstStyle/>
+          <a:p>
+            <a:pPr algn="ctr"/>
+            <a:r>
+              <a:rPr sz="1600" b="1">
+                <a:solidFill>
+                  <a:srgbClr val="0C183A"/>
+                </a:solidFill>
+                <a:latin typeface="Aptos Display"/>
+              </a:rPr>
+              <a:t>Deployment Plan</a:t>
+            </a:r>
+          </a:p>
+          <a:p>
+            <a:pPr>
+              <a:spcAft>
+                <a:spcPts val="200"/>
+              </a:spcAft>
+            </a:pPr>
+            <a:r>
+              <a:rPr sz="1200">
+                <a:solidFill>
+                  <a:srgbClr val="2C3E50"/>
+                </a:solidFill>
+                <a:latin typeface="Aptos"/>
+              </a:rPr>
+              <a:t>Backend: Render with gunicorn and collectstatic</a:t>
+            </a:r>
+          </a:p>
+          <a:p>
+            <a:pPr>
+              <a:spcAft>
+                <a:spcPts val="200"/>
+              </a:spcAft>
+            </a:pPr>
+            <a:r>
+              <a:rPr sz="1200">
+                <a:solidFill>
+                  <a:srgbClr val="2C3E50"/>
+                </a:solidFill>
+                <a:latin typeface="Aptos"/>
+              </a:rPr>
+              <a:t>Frontend: Vercel</a:t>
+            </a:r>
+          </a:p>
+          <a:p>
+            <a:pPr>
+              <a:spcAft>
+                <a:spcPts val="200"/>
+              </a:spcAft>
+            </a:pPr>
+            <a:r>
+              <a:rPr sz="1200">
+                <a:solidFill>
+                  <a:srgbClr val="2C3E50"/>
+                </a:solidFill>
+                <a:latin typeface="Aptos"/>
+              </a:rPr>
+              <a:t>Database: PostgreSQL in production</a:t>
+            </a:r>
+          </a:p>
+          <a:p>
+            <a:pPr>
+              <a:spcAft>
+                <a:spcPts val="200"/>
+              </a:spcAft>
+            </a:pPr>
+            <a:r>
+              <a:rPr sz="1200">
+                <a:solidFill>
+                  <a:srgbClr val="2C3E50"/>
+                </a:solidFill>
+                <a:latin typeface="Aptos"/>
+              </a:rPr>
+              <a:t>Environment variables manage API base URLs and database settings</a:t>
+            </a:r>
+          </a:p>
+        </p:txBody>
+      </p:sp>
+      <p:sp>
+        <p:nvSpPr>
+          <p:cNvPr id="6" name="TextBox 5"/>
           <p:cNvSpPr txBox="1"/>
           <p:nvPr/>
         </p:nvSpPr>
         <p:spPr>
           <a:xfrm>
-            <a:off x="640080" y="1097280"/>
-            <a:ext cx="7863840" cy="4846320"/>
+            <a:off x="502920" y="6400800"/>
+            <a:ext cx="10972800" cy="228600"/>
           </a:xfrm>
           <a:prstGeom prst="rect">
             <a:avLst/>
@@ -5399,2365 +7476,20 @@
           <a:noFill/>
         </p:spPr>
         <p:txBody>
-          <a:bodyPr wrap="square">
-            <a:spAutoFit/>
-          </a:bodyPr>
-          <a:lstStyle/>
-          <a:p>
-            <a:pPr>
-              <a:spcBef>
-                <a:spcPts val="600"/>
-              </a:spcBef>
-              <a:spcAft>
-                <a:spcPts val="600"/>
-              </a:spcAft>
-              <a:defRPr sz="1800">
-                <a:solidFill>
-                  <a:srgbClr val="333333"/>
-                </a:solidFill>
-              </a:defRPr>
-            </a:pPr>
-            <a:r>
-              <a:t>✓ Full-stack web application for vloggers</a:t>
-            </a:r>
-          </a:p>
-          <a:p>
-            <a:pPr>
-              <a:spcBef>
-                <a:spcPts val="600"/>
-              </a:spcBef>
-              <a:spcAft>
-                <a:spcPts val="600"/>
-              </a:spcAft>
-              <a:defRPr sz="1800">
-                <a:solidFill>
-                  <a:srgbClr val="333333"/>
-                </a:solidFill>
-              </a:defRPr>
-            </a:pPr>
-            <a:r>
-              <a:t>✓ Frontend: Next.js 16.2.1 with React 19.2.4</a:t>
-            </a:r>
-          </a:p>
-          <a:p>
-            <a:pPr>
-              <a:spcBef>
-                <a:spcPts val="600"/>
-              </a:spcBef>
-              <a:spcAft>
-                <a:spcPts val="600"/>
-              </a:spcAft>
-              <a:defRPr sz="1800">
-                <a:solidFill>
-                  <a:srgbClr val="333333"/>
-                </a:solidFill>
-              </a:defRPr>
-            </a:pPr>
-            <a:r>
-              <a:t>✓ Backend: Django 6.0.4 with REST API</a:t>
-            </a:r>
-          </a:p>
-          <a:p>
-            <a:pPr>
-              <a:spcBef>
-                <a:spcPts val="600"/>
-              </a:spcBef>
-              <a:spcAft>
-                <a:spcPts val="600"/>
-              </a:spcAft>
-              <a:defRPr sz="1800">
-                <a:solidFill>
-                  <a:srgbClr val="333333"/>
-                </a:solidFill>
-              </a:defRPr>
-            </a:pPr>
-            <a:r>
-              <a:t>✓ 20+ interactive pages &amp; routes</a:t>
-            </a:r>
-          </a:p>
-          <a:p>
-            <a:pPr>
-              <a:spcBef>
-                <a:spcPts val="600"/>
-              </a:spcBef>
-              <a:spcAft>
-                <a:spcPts val="600"/>
-              </a:spcAft>
-              <a:defRPr sz="1800">
-                <a:solidFill>
-                  <a:srgbClr val="333333"/>
-                </a:solidFill>
-              </a:defRPr>
-            </a:pPr>
-            <a:r>
-              <a:t>✓ OAuth integration (Google &amp; Apple)</a:t>
-            </a:r>
-          </a:p>
-          <a:p>
-            <a:pPr>
-              <a:spcBef>
-                <a:spcPts val="600"/>
-              </a:spcBef>
-              <a:spcAft>
-                <a:spcPts val="600"/>
-              </a:spcAft>
-              <a:defRPr sz="1800">
-                <a:solidFill>
-                  <a:srgbClr val="333333"/>
-                </a:solidFill>
-              </a:defRPr>
-            </a:pPr>
-            <a:r>
-              <a:t>✓ Real-time analytics &amp; tracking system</a:t>
-            </a:r>
-          </a:p>
-          <a:p>
-            <a:pPr>
-              <a:spcBef>
-                <a:spcPts val="600"/>
-              </a:spcBef>
-              <a:spcAft>
-                <a:spcPts val="600"/>
-              </a:spcAft>
-              <a:defRPr sz="1800">
-                <a:solidFill>
-                  <a:srgbClr val="333333"/>
-                </a:solidFill>
-              </a:defRPr>
-            </a:pPr>
-            <a:r>
-              <a:t>✓ E-commerce merch store (ready)</a:t>
-            </a:r>
-          </a:p>
-          <a:p>
-            <a:pPr>
-              <a:spcBef>
-                <a:spcPts val="600"/>
-              </a:spcBef>
-              <a:spcAft>
-                <a:spcPts val="600"/>
-              </a:spcAft>
-              <a:defRPr sz="1800">
-                <a:solidFill>
-                  <a:srgbClr val="333333"/>
-                </a:solidFill>
-              </a:defRPr>
-            </a:pPr>
-            <a:r>
-              <a:t>✓ Live streaming with Super Chat</a:t>
-            </a:r>
-          </a:p>
-        </p:txBody>
-      </p:sp>
-    </p:spTree>
-  </p:cSld>
-  <p:clrMapOvr>
-    <a:masterClrMapping/>
-  </p:clrMapOvr>
-</p:sld>
-</file>
-
-<file path=ppt/slides/slide3.xml><?xml version="1.0" encoding="utf-8"?>
-<p:sld xmlns:a="http://schemas.openxmlformats.org/drawingml/2006/main" xmlns:p="http://schemas.openxmlformats.org/presentationml/2006/main" xmlns:r="http://schemas.openxmlformats.org/officeDocument/2006/relationships">
-  <p:cSld>
-    <p:bg>
-      <p:bgPr>
-        <a:solidFill>
-          <a:srgbClr val="FFFFFF"/>
-        </a:solidFill>
-        <a:effectLst/>
-      </p:bgPr>
-    </p:bg>
-    <p:spTree>
-      <p:nvGrpSpPr>
-        <p:cNvPr id="1" name=""/>
-        <p:cNvGrpSpPr/>
-        <p:nvPr/>
-      </p:nvGrpSpPr>
-      <p:grpSpPr/>
-      <p:sp>
-        <p:nvSpPr>
-          <p:cNvPr id="2" name="Rectangle 1"/>
-          <p:cNvSpPr/>
-          <p:nvPr/>
-        </p:nvSpPr>
-        <p:spPr>
-          <a:xfrm>
-            <a:off x="0" y="0"/>
-            <a:ext cx="9144000" cy="731520"/>
-          </a:xfrm>
-          <a:prstGeom prst="rect">
-            <a:avLst/>
-          </a:prstGeom>
-          <a:solidFill>
-            <a:srgbClr val="1F4E79"/>
-          </a:solidFill>
-          <a:ln>
-            <a:solidFill>
-              <a:srgbClr val="1F4E79"/>
-            </a:solidFill>
-          </a:ln>
-        </p:spPr>
-        <p:style>
-          <a:lnRef idx="1">
-            <a:schemeClr val="accent1"/>
-          </a:lnRef>
-          <a:fillRef idx="3">
-            <a:schemeClr val="accent1"/>
-          </a:fillRef>
-          <a:effectRef idx="2">
-            <a:schemeClr val="accent1"/>
-          </a:effectRef>
-          <a:fontRef idx="minor">
-            <a:schemeClr val="lt1"/>
-          </a:fontRef>
-        </p:style>
-        <p:txBody>
-          <a:bodyPr rtlCol="0" anchor="ctr"/>
-          <a:lstStyle/>
-          <a:p>
-            <a:pPr algn="ctr"/>
-          </a:p>
-        </p:txBody>
-      </p:sp>
-      <p:sp>
-        <p:nvSpPr>
-          <p:cNvPr id="3" name="TextBox 2"/>
-          <p:cNvSpPr txBox="1"/>
-          <p:nvPr/>
-        </p:nvSpPr>
-        <p:spPr>
-          <a:xfrm>
-            <a:off x="457200" y="137160"/>
-            <a:ext cx="8229600" cy="548640"/>
-          </a:xfrm>
-          <a:prstGeom prst="rect">
-            <a:avLst/>
-          </a:prstGeom>
-          <a:noFill/>
-        </p:spPr>
-        <p:txBody>
           <a:bodyPr wrap="none">
             <a:spAutoFit/>
           </a:bodyPr>
           <a:lstStyle/>
           <a:p>
-            <a:pPr>
-              <a:defRPr sz="4000" b="1">
-                <a:solidFill>
-                  <a:srgbClr val="FFFFFF"/>
-                </a:solidFill>
-              </a:defRPr>
-            </a:pPr>
-            <a:r>
-              <a:t>Architecture</a:t>
-            </a:r>
-          </a:p>
-        </p:txBody>
-      </p:sp>
-      <p:sp>
-        <p:nvSpPr>
-          <p:cNvPr id="4" name="TextBox 3"/>
-          <p:cNvSpPr txBox="1"/>
-          <p:nvPr/>
-        </p:nvSpPr>
-        <p:spPr>
-          <a:xfrm>
-            <a:off x="640080" y="1097280"/>
-            <a:ext cx="7863840" cy="4846320"/>
-          </a:xfrm>
-          <a:prstGeom prst="rect">
-            <a:avLst/>
-          </a:prstGeom>
-          <a:noFill/>
-        </p:spPr>
-        <p:txBody>
-          <a:bodyPr wrap="square">
-            <a:spAutoFit/>
-          </a:bodyPr>
-          <a:lstStyle/>
-          <a:p>
-            <a:pPr>
-              <a:spcBef>
-                <a:spcPts val="600"/>
-              </a:spcBef>
-              <a:spcAft>
-                <a:spcPts val="600"/>
-              </a:spcAft>
-              <a:defRPr sz="1800">
-                <a:solidFill>
-                  <a:srgbClr val="333333"/>
-                </a:solidFill>
-              </a:defRPr>
-            </a:pPr>
-            <a:r>
-              <a:t>• Frontend: Next.js App Router with TypeScript</a:t>
-            </a:r>
-          </a:p>
-          <a:p>
-            <a:pPr>
-              <a:spcBef>
-                <a:spcPts val="600"/>
-              </a:spcBef>
-              <a:spcAft>
-                <a:spcPts val="600"/>
-              </a:spcAft>
-              <a:defRPr sz="1800">
-                <a:solidFill>
-                  <a:srgbClr val="333333"/>
-                </a:solidFill>
-              </a:defRPr>
-            </a:pPr>
-            <a:r>
-              <a:t>• Backend: Django REST Framework API</a:t>
-            </a:r>
-          </a:p>
-          <a:p>
-            <a:pPr>
-              <a:spcBef>
-                <a:spcPts val="600"/>
-              </a:spcBef>
-              <a:spcAft>
-                <a:spcPts val="600"/>
-              </a:spcAft>
-              <a:defRPr sz="1800">
-                <a:solidFill>
-                  <a:srgbClr val="333333"/>
-                </a:solidFill>
-              </a:defRPr>
-            </a:pPr>
-            <a:r>
-              <a:t>• Database: SQLite (dev) / PostgreSQL (prod)</a:t>
-            </a:r>
-          </a:p>
-          <a:p>
-            <a:pPr>
-              <a:spcBef>
-                <a:spcPts val="600"/>
-              </a:spcBef>
-              <a:spcAft>
-                <a:spcPts val="600"/>
-              </a:spcAft>
-              <a:defRPr sz="1800">
-                <a:solidFill>
-                  <a:srgbClr val="333333"/>
-                </a:solidFill>
-              </a:defRPr>
-            </a:pPr>
-            <a:r>
-              <a:t>• State Management: Zustand stores</a:t>
-            </a:r>
-          </a:p>
-          <a:p>
-            <a:pPr>
-              <a:spcBef>
-                <a:spcPts val="600"/>
-              </a:spcBef>
-              <a:spcAft>
-                <a:spcPts val="600"/>
-              </a:spcAft>
-              <a:defRPr sz="1800">
-                <a:solidFill>
-                  <a:srgbClr val="333333"/>
-                </a:solidFill>
-              </a:defRPr>
-            </a:pPr>
-            <a:r>
-              <a:t>• Styling: Tailwind CSS 4 + Framer Motion</a:t>
-            </a:r>
-          </a:p>
-          <a:p>
-            <a:pPr>
-              <a:spcBef>
-                <a:spcPts val="600"/>
-              </a:spcBef>
-              <a:spcAft>
-                <a:spcPts val="600"/>
-              </a:spcAft>
-              <a:defRPr sz="1800">
-                <a:solidFill>
-                  <a:srgbClr val="333333"/>
-                </a:solidFill>
-              </a:defRPr>
-            </a:pPr>
-            <a:r>
-              <a:t>• Authentication: JWT + OAuth (Google/Apple)</a:t>
-            </a:r>
-          </a:p>
-          <a:p>
-            <a:pPr>
-              <a:spcBef>
-                <a:spcPts val="600"/>
-              </a:spcBef>
-              <a:spcAft>
-                <a:spcPts val="600"/>
-              </a:spcAft>
-              <a:defRPr sz="1800">
-                <a:solidFill>
-                  <a:srgbClr val="333333"/>
-                </a:solidFill>
-              </a:defRPr>
-            </a:pPr>
-            <a:r>
-              <a:t>• Deployment: Vercel (frontend) + Render (backend)</a:t>
-            </a:r>
-          </a:p>
-          <a:p>
-            <a:pPr>
-              <a:spcBef>
-                <a:spcPts val="600"/>
-              </a:spcBef>
-              <a:spcAft>
-                <a:spcPts val="600"/>
-              </a:spcAft>
-              <a:defRPr sz="1800">
-                <a:solidFill>
-                  <a:srgbClr val="333333"/>
-                </a:solidFill>
-              </a:defRPr>
-            </a:pPr>
-            <a:r>
-              <a:t>• Real-time: WebSocket ready for live features</a:t>
-            </a:r>
-          </a:p>
-        </p:txBody>
-      </p:sp>
-    </p:spTree>
-  </p:cSld>
-  <p:clrMapOvr>
-    <a:masterClrMapping/>
-  </p:clrMapOvr>
-</p:sld>
-</file>
-
-<file path=ppt/slides/slide4.xml><?xml version="1.0" encoding="utf-8"?>
-<p:sld xmlns:a="http://schemas.openxmlformats.org/drawingml/2006/main" xmlns:p="http://schemas.openxmlformats.org/presentationml/2006/main" xmlns:r="http://schemas.openxmlformats.org/officeDocument/2006/relationships">
-  <p:cSld>
-    <p:bg>
-      <p:bgPr>
-        <a:solidFill>
-          <a:srgbClr val="FFFFFF"/>
-        </a:solidFill>
-        <a:effectLst/>
-      </p:bgPr>
-    </p:bg>
-    <p:spTree>
-      <p:nvGrpSpPr>
-        <p:cNvPr id="1" name=""/>
-        <p:cNvGrpSpPr/>
-        <p:nvPr/>
-      </p:nvGrpSpPr>
-      <p:grpSpPr/>
-      <p:sp>
-        <p:nvSpPr>
-          <p:cNvPr id="2" name="Rectangle 1"/>
-          <p:cNvSpPr/>
-          <p:nvPr/>
-        </p:nvSpPr>
-        <p:spPr>
-          <a:xfrm>
-            <a:off x="0" y="0"/>
-            <a:ext cx="9144000" cy="731520"/>
-          </a:xfrm>
-          <a:prstGeom prst="rect">
-            <a:avLst/>
-          </a:prstGeom>
-          <a:solidFill>
-            <a:srgbClr val="1F4E79"/>
-          </a:solidFill>
-          <a:ln>
-            <a:solidFill>
-              <a:srgbClr val="1F4E79"/>
-            </a:solidFill>
-          </a:ln>
-        </p:spPr>
-        <p:style>
-          <a:lnRef idx="1">
-            <a:schemeClr val="accent1"/>
-          </a:lnRef>
-          <a:fillRef idx="3">
-            <a:schemeClr val="accent1"/>
-          </a:fillRef>
-          <a:effectRef idx="2">
-            <a:schemeClr val="accent1"/>
-          </a:effectRef>
-          <a:fontRef idx="minor">
-            <a:schemeClr val="lt1"/>
-          </a:fontRef>
-        </p:style>
-        <p:txBody>
-          <a:bodyPr rtlCol="0" anchor="ctr"/>
-          <a:lstStyle/>
-          <a:p>
-            <a:pPr algn="ctr"/>
-          </a:p>
-        </p:txBody>
-      </p:sp>
-      <p:sp>
-        <p:nvSpPr>
-          <p:cNvPr id="3" name="TextBox 2"/>
-          <p:cNvSpPr txBox="1"/>
-          <p:nvPr/>
-        </p:nvSpPr>
-        <p:spPr>
-          <a:xfrm>
-            <a:off x="457200" y="137160"/>
-            <a:ext cx="8229600" cy="548640"/>
-          </a:xfrm>
-          <a:prstGeom prst="rect">
-            <a:avLst/>
-          </a:prstGeom>
-          <a:noFill/>
-        </p:spPr>
-        <p:txBody>
-          <a:bodyPr wrap="none">
-            <a:spAutoFit/>
-          </a:bodyPr>
-          <a:lstStyle/>
-          <a:p>
-            <a:pPr>
-              <a:defRPr sz="4000" b="1">
-                <a:solidFill>
-                  <a:srgbClr val="FFFFFF"/>
-                </a:solidFill>
-              </a:defRPr>
-            </a:pPr>
-            <a:r>
-              <a:t>Technology Stack</a:t>
-            </a:r>
-          </a:p>
-        </p:txBody>
-      </p:sp>
-      <p:sp>
-        <p:nvSpPr>
-          <p:cNvPr id="4" name="TextBox 3"/>
-          <p:cNvSpPr txBox="1"/>
-          <p:nvPr/>
-        </p:nvSpPr>
-        <p:spPr>
-          <a:xfrm>
-            <a:off x="274320" y="914400"/>
-            <a:ext cx="4114800" cy="5029200"/>
-          </a:xfrm>
-          <a:prstGeom prst="rect">
-            <a:avLst/>
-          </a:prstGeom>
-          <a:noFill/>
-        </p:spPr>
-        <p:txBody>
-          <a:bodyPr wrap="square">
-            <a:spAutoFit/>
-          </a:bodyPr>
-          <a:lstStyle/>
-          <a:p>
-            <a:pPr>
-              <a:defRPr sz="2200" b="1">
-                <a:solidFill>
-                  <a:srgbClr val="C00000"/>
-                </a:solidFill>
-              </a:defRPr>
-            </a:pPr>
-            <a:r>
-              <a:t>Frontend</a:t>
-            </a:r>
-          </a:p>
-          <a:p>
-            <a:pPr>
-              <a:spcBef>
-                <a:spcPts val="400"/>
-              </a:spcBef>
-              <a:defRPr sz="1400">
-                <a:solidFill>
-                  <a:srgbClr val="333333"/>
-                </a:solidFill>
-              </a:defRPr>
-            </a:pPr>
-            <a:r>
-              <a:t>• Next.js 16.2.1</a:t>
-            </a:r>
-          </a:p>
-          <a:p>
-            <a:pPr>
-              <a:spcBef>
-                <a:spcPts val="400"/>
-              </a:spcBef>
-              <a:defRPr sz="1400">
-                <a:solidFill>
-                  <a:srgbClr val="333333"/>
-                </a:solidFill>
-              </a:defRPr>
-            </a:pPr>
-            <a:r>
-              <a:t>• React 19.2.4</a:t>
-            </a:r>
-          </a:p>
-          <a:p>
-            <a:pPr>
-              <a:spcBef>
-                <a:spcPts val="400"/>
-              </a:spcBef>
-              <a:defRPr sz="1400">
-                <a:solidFill>
-                  <a:srgbClr val="333333"/>
-                </a:solidFill>
-              </a:defRPr>
-            </a:pPr>
-            <a:r>
-              <a:t>• TypeScript 5</a:t>
-            </a:r>
-          </a:p>
-          <a:p>
-            <a:pPr>
-              <a:spcBef>
-                <a:spcPts val="400"/>
-              </a:spcBef>
-              <a:defRPr sz="1400">
-                <a:solidFill>
-                  <a:srgbClr val="333333"/>
-                </a:solidFill>
-              </a:defRPr>
-            </a:pPr>
-            <a:r>
-              <a:t>• Tailwind CSS 4</a:t>
-            </a:r>
-          </a:p>
-          <a:p>
-            <a:pPr>
-              <a:spcBef>
-                <a:spcPts val="400"/>
-              </a:spcBef>
-              <a:defRPr sz="1400">
-                <a:solidFill>
-                  <a:srgbClr val="333333"/>
-                </a:solidFill>
-              </a:defRPr>
-            </a:pPr>
-            <a:r>
-              <a:t>• Framer Motion</a:t>
-            </a:r>
-          </a:p>
-          <a:p>
-            <a:pPr>
-              <a:spcBef>
-                <a:spcPts val="400"/>
-              </a:spcBef>
-              <a:defRPr sz="1400">
-                <a:solidFill>
-                  <a:srgbClr val="333333"/>
-                </a:solidFill>
-              </a:defRPr>
-            </a:pPr>
-            <a:r>
-              <a:t>• Zustand</a:t>
-            </a:r>
-          </a:p>
-          <a:p>
-            <a:pPr>
-              <a:spcBef>
-                <a:spcPts val="400"/>
-              </a:spcBef>
-              <a:defRPr sz="1400">
-                <a:solidFill>
-                  <a:srgbClr val="333333"/>
-                </a:solidFill>
-              </a:defRPr>
-            </a:pPr>
-            <a:r>
-              <a:t>• Radix UI</a:t>
-            </a:r>
-          </a:p>
-        </p:txBody>
-      </p:sp>
-      <p:sp>
-        <p:nvSpPr>
-          <p:cNvPr id="5" name="TextBox 4"/>
-          <p:cNvSpPr txBox="1"/>
-          <p:nvPr/>
-        </p:nvSpPr>
-        <p:spPr>
-          <a:xfrm>
-            <a:off x="4754880" y="914400"/>
-            <a:ext cx="4114800" cy="5029200"/>
-          </a:xfrm>
-          <a:prstGeom prst="rect">
-            <a:avLst/>
-          </a:prstGeom>
-          <a:noFill/>
-        </p:spPr>
-        <p:txBody>
-          <a:bodyPr wrap="square">
-            <a:spAutoFit/>
-          </a:bodyPr>
-          <a:lstStyle/>
-          <a:p>
-            <a:pPr>
-              <a:defRPr sz="2200" b="1">
-                <a:solidFill>
-                  <a:srgbClr val="C00000"/>
-                </a:solidFill>
-              </a:defRPr>
-            </a:pPr>
-            <a:r>
-              <a:t>Backend</a:t>
-            </a:r>
-          </a:p>
-          <a:p>
-            <a:pPr>
-              <a:spcBef>
-                <a:spcPts val="400"/>
-              </a:spcBef>
-              <a:defRPr sz="1400">
-                <a:solidFill>
-                  <a:srgbClr val="333333"/>
-                </a:solidFill>
-              </a:defRPr>
-            </a:pPr>
-            <a:r>
-              <a:t>• Django 6.0.4</a:t>
-            </a:r>
-          </a:p>
-          <a:p>
-            <a:pPr>
-              <a:spcBef>
-                <a:spcPts val="400"/>
-              </a:spcBef>
-              <a:defRPr sz="1400">
-                <a:solidFill>
-                  <a:srgbClr val="333333"/>
-                </a:solidFill>
-              </a:defRPr>
-            </a:pPr>
-            <a:r>
-              <a:t>• Python 3.14</a:t>
-            </a:r>
-          </a:p>
-          <a:p>
-            <a:pPr>
-              <a:spcBef>
-                <a:spcPts val="400"/>
-              </a:spcBef>
-              <a:defRPr sz="1400">
-                <a:solidFill>
-                  <a:srgbClr val="333333"/>
-                </a:solidFill>
-              </a:defRPr>
-            </a:pPr>
-            <a:r>
-              <a:t>• Django REST</a:t>
-            </a:r>
-          </a:p>
-          <a:p>
-            <a:pPr>
-              <a:spcBef>
-                <a:spcPts val="400"/>
-              </a:spcBef>
-              <a:defRPr sz="1400">
-                <a:solidFill>
-                  <a:srgbClr val="333333"/>
-                </a:solidFill>
-              </a:defRPr>
-            </a:pPr>
-            <a:r>
-              <a:t>• PostgreSQL</a:t>
-            </a:r>
-          </a:p>
-          <a:p>
-            <a:pPr>
-              <a:spcBef>
-                <a:spcPts val="400"/>
-              </a:spcBef>
-              <a:defRPr sz="1400">
-                <a:solidFill>
-                  <a:srgbClr val="333333"/>
-                </a:solidFill>
-              </a:defRPr>
-            </a:pPr>
-            <a:r>
-              <a:t>• JWT Auth</a:t>
-            </a:r>
-          </a:p>
-          <a:p>
-            <a:pPr>
-              <a:spcBef>
-                <a:spcPts val="400"/>
-              </a:spcBef>
-              <a:defRPr sz="1400">
-                <a:solidFill>
-                  <a:srgbClr val="333333"/>
-                </a:solidFill>
-              </a:defRPr>
-            </a:pPr>
-            <a:r>
-              <a:t>• Google OAuth 2.0</a:t>
-            </a:r>
-          </a:p>
-          <a:p>
-            <a:pPr>
-              <a:spcBef>
-                <a:spcPts val="400"/>
-              </a:spcBef>
-              <a:defRPr sz="1400">
-                <a:solidFill>
-                  <a:srgbClr val="333333"/>
-                </a:solidFill>
-              </a:defRPr>
-            </a:pPr>
-            <a:r>
-              <a:t>• Apple Sign-In</a:t>
-            </a:r>
-          </a:p>
-        </p:txBody>
-      </p:sp>
-    </p:spTree>
-  </p:cSld>
-  <p:clrMapOvr>
-    <a:masterClrMapping/>
-  </p:clrMapOvr>
-</p:sld>
-</file>
-
-<file path=ppt/slides/slide5.xml><?xml version="1.0" encoding="utf-8"?>
-<p:sld xmlns:a="http://schemas.openxmlformats.org/drawingml/2006/main" xmlns:p="http://schemas.openxmlformats.org/presentationml/2006/main" xmlns:r="http://schemas.openxmlformats.org/officeDocument/2006/relationships">
-  <p:cSld>
-    <p:bg>
-      <p:bgPr>
-        <a:solidFill>
-          <a:srgbClr val="FFFFFF"/>
-        </a:solidFill>
-        <a:effectLst/>
-      </p:bgPr>
-    </p:bg>
-    <p:spTree>
-      <p:nvGrpSpPr>
-        <p:cNvPr id="1" name=""/>
-        <p:cNvGrpSpPr/>
-        <p:nvPr/>
-      </p:nvGrpSpPr>
-      <p:grpSpPr/>
-      <p:sp>
-        <p:nvSpPr>
-          <p:cNvPr id="2" name="Rectangle 1"/>
-          <p:cNvSpPr/>
-          <p:nvPr/>
-        </p:nvSpPr>
-        <p:spPr>
-          <a:xfrm>
-            <a:off x="0" y="0"/>
-            <a:ext cx="9144000" cy="731520"/>
-          </a:xfrm>
-          <a:prstGeom prst="rect">
-            <a:avLst/>
-          </a:prstGeom>
-          <a:solidFill>
-            <a:srgbClr val="1F4E79"/>
-          </a:solidFill>
-          <a:ln>
-            <a:solidFill>
-              <a:srgbClr val="1F4E79"/>
-            </a:solidFill>
-          </a:ln>
-        </p:spPr>
-        <p:style>
-          <a:lnRef idx="1">
-            <a:schemeClr val="accent1"/>
-          </a:lnRef>
-          <a:fillRef idx="3">
-            <a:schemeClr val="accent1"/>
-          </a:fillRef>
-          <a:effectRef idx="2">
-            <a:schemeClr val="accent1"/>
-          </a:effectRef>
-          <a:fontRef idx="minor">
-            <a:schemeClr val="lt1"/>
-          </a:fontRef>
-        </p:style>
-        <p:txBody>
-          <a:bodyPr rtlCol="0" anchor="ctr"/>
-          <a:lstStyle/>
-          <a:p>
-            <a:pPr algn="ctr"/>
-          </a:p>
-        </p:txBody>
-      </p:sp>
-      <p:sp>
-        <p:nvSpPr>
-          <p:cNvPr id="3" name="TextBox 2"/>
-          <p:cNvSpPr txBox="1"/>
-          <p:nvPr/>
-        </p:nvSpPr>
-        <p:spPr>
-          <a:xfrm>
-            <a:off x="457200" y="137160"/>
-            <a:ext cx="8229600" cy="548640"/>
-          </a:xfrm>
-          <a:prstGeom prst="rect">
-            <a:avLst/>
-          </a:prstGeom>
-          <a:noFill/>
-        </p:spPr>
-        <p:txBody>
-          <a:bodyPr wrap="none">
-            <a:spAutoFit/>
-          </a:bodyPr>
-          <a:lstStyle/>
-          <a:p>
-            <a:pPr>
-              <a:defRPr sz="4000" b="1">
-                <a:solidFill>
-                  <a:srgbClr val="FFFFFF"/>
-                </a:solidFill>
-              </a:defRPr>
-            </a:pPr>
-            <a:r>
-              <a:t>Database Schema</a:t>
-            </a:r>
-          </a:p>
-        </p:txBody>
-      </p:sp>
-      <p:sp>
-        <p:nvSpPr>
-          <p:cNvPr id="4" name="TextBox 3"/>
-          <p:cNvSpPr txBox="1"/>
-          <p:nvPr/>
-        </p:nvSpPr>
-        <p:spPr>
-          <a:xfrm>
-            <a:off x="640080" y="1097280"/>
-            <a:ext cx="7863840" cy="4846320"/>
-          </a:xfrm>
-          <a:prstGeom prst="rect">
-            <a:avLst/>
-          </a:prstGeom>
-          <a:noFill/>
-        </p:spPr>
-        <p:txBody>
-          <a:bodyPr wrap="square">
-            <a:spAutoFit/>
-          </a:bodyPr>
-          <a:lstStyle/>
-          <a:p>
-            <a:pPr>
-              <a:spcBef>
-                <a:spcPts val="600"/>
-              </a:spcBef>
-              <a:spcAft>
-                <a:spcPts val="600"/>
-              </a:spcAft>
-              <a:defRPr sz="1800">
-                <a:solidFill>
-                  <a:srgbClr val="333333"/>
-                </a:solidFill>
-              </a:defRPr>
-            </a:pPr>
-            <a:r>
-              <a:t>🔹 User → Extended profile with avatars</a:t>
-            </a:r>
-          </a:p>
-          <a:p>
-            <a:pPr>
-              <a:spcBef>
-                <a:spcPts val="600"/>
-              </a:spcBef>
-              <a:spcAft>
-                <a:spcPts val="600"/>
-              </a:spcAft>
-              <a:defRPr sz="1800">
-                <a:solidFill>
-                  <a:srgbClr val="333333"/>
-                </a:solidFill>
-              </a:defRPr>
-            </a:pPr>
-            <a:r>
-              <a:t>🔹 Video → Full metadata (title, description, URL)</a:t>
-            </a:r>
-          </a:p>
-          <a:p>
-            <a:pPr>
-              <a:spcBef>
-                <a:spcPts val="600"/>
-              </a:spcBef>
-              <a:spcAft>
-                <a:spcPts val="600"/>
-              </a:spcAft>
-              <a:defRPr sz="1800">
-                <a:solidFill>
-                  <a:srgbClr val="333333"/>
-                </a:solidFill>
-              </a:defRPr>
-            </a:pPr>
-            <a:r>
-              <a:t>🔹 Comment → Nested comment threads</a:t>
-            </a:r>
-          </a:p>
-          <a:p>
-            <a:pPr>
-              <a:spcBef>
-                <a:spcPts val="600"/>
-              </a:spcBef>
-              <a:spcAft>
-                <a:spcPts val="600"/>
-              </a:spcAft>
-              <a:defRPr sz="1800">
-                <a:solidFill>
-                  <a:srgbClr val="333333"/>
-                </a:solidFill>
-              </a:defRPr>
-            </a:pPr>
-            <a:r>
-              <a:t>🔹 TrackingEvent → User behavior analytics</a:t>
-            </a:r>
-          </a:p>
-          <a:p>
-            <a:pPr>
-              <a:spcBef>
-                <a:spcPts val="600"/>
-              </a:spcBef>
-              <a:spcAft>
-                <a:spcPts val="600"/>
-              </a:spcAft>
-              <a:defRPr sz="1800">
-                <a:solidFill>
-                  <a:srgbClr val="333333"/>
-                </a:solidFill>
-              </a:defRPr>
-            </a:pPr>
-            <a:r>
-              <a:t>🔹 UserVideoState → Like/Dislike interactions</a:t>
-            </a:r>
-          </a:p>
-          <a:p>
-            <a:pPr>
-              <a:spcBef>
-                <a:spcPts val="600"/>
-              </a:spcBef>
-              <a:spcAft>
-                <a:spcPts val="600"/>
-              </a:spcAft>
-              <a:defRPr sz="1800">
-                <a:solidFill>
-                  <a:srgbClr val="333333"/>
-                </a:solidFill>
-              </a:defRPr>
-            </a:pPr>
-            <a:r>
-              <a:t>🔹 PasswordResetToken → Secure password recovery</a:t>
-            </a:r>
-          </a:p>
-          <a:p>
-            <a:pPr>
-              <a:spcBef>
-                <a:spcPts val="600"/>
-              </a:spcBef>
-              <a:spcAft>
-                <a:spcPts val="600"/>
-              </a:spcAft>
-              <a:defRPr sz="1800">
-                <a:solidFill>
-                  <a:srgbClr val="333333"/>
-                </a:solidFill>
-              </a:defRPr>
-            </a:pPr>
-            <a:r>
-              <a:t>Total: 6 models with optimized indexes</a:t>
-            </a:r>
-          </a:p>
-          <a:p>
-            <a:pPr>
-              <a:spcBef>
-                <a:spcPts val="600"/>
-              </a:spcBef>
-              <a:spcAft>
-                <a:spcPts val="600"/>
-              </a:spcAft>
-              <a:defRPr sz="1800">
-                <a:solidFill>
-                  <a:srgbClr val="333333"/>
-                </a:solidFill>
-              </a:defRPr>
-            </a:pPr>
-            <a:r>
-              <a:t>Status: Ready for production PostgreSQL</a:t>
-            </a:r>
-          </a:p>
-        </p:txBody>
-      </p:sp>
-    </p:spTree>
-  </p:cSld>
-  <p:clrMapOvr>
-    <a:masterClrMapping/>
-  </p:clrMapOvr>
-</p:sld>
-</file>
-
-<file path=ppt/slides/slide6.xml><?xml version="1.0" encoding="utf-8"?>
-<p:sld xmlns:a="http://schemas.openxmlformats.org/drawingml/2006/main" xmlns:p="http://schemas.openxmlformats.org/presentationml/2006/main" xmlns:r="http://schemas.openxmlformats.org/officeDocument/2006/relationships">
-  <p:cSld>
-    <p:bg>
-      <p:bgPr>
-        <a:solidFill>
-          <a:srgbClr val="FFFFFF"/>
-        </a:solidFill>
-        <a:effectLst/>
-      </p:bgPr>
-    </p:bg>
-    <p:spTree>
-      <p:nvGrpSpPr>
-        <p:cNvPr id="1" name=""/>
-        <p:cNvGrpSpPr/>
-        <p:nvPr/>
-      </p:nvGrpSpPr>
-      <p:grpSpPr/>
-      <p:sp>
-        <p:nvSpPr>
-          <p:cNvPr id="2" name="Rectangle 1"/>
-          <p:cNvSpPr/>
-          <p:nvPr/>
-        </p:nvSpPr>
-        <p:spPr>
-          <a:xfrm>
-            <a:off x="0" y="0"/>
-            <a:ext cx="9144000" cy="731520"/>
-          </a:xfrm>
-          <a:prstGeom prst="rect">
-            <a:avLst/>
-          </a:prstGeom>
-          <a:solidFill>
-            <a:srgbClr val="1F4E79"/>
-          </a:solidFill>
-          <a:ln>
-            <a:solidFill>
-              <a:srgbClr val="1F4E79"/>
-            </a:solidFill>
-          </a:ln>
-        </p:spPr>
-        <p:style>
-          <a:lnRef idx="1">
-            <a:schemeClr val="accent1"/>
-          </a:lnRef>
-          <a:fillRef idx="3">
-            <a:schemeClr val="accent1"/>
-          </a:fillRef>
-          <a:effectRef idx="2">
-            <a:schemeClr val="accent1"/>
-          </a:effectRef>
-          <a:fontRef idx="minor">
-            <a:schemeClr val="lt1"/>
-          </a:fontRef>
-        </p:style>
-        <p:txBody>
-          <a:bodyPr rtlCol="0" anchor="ctr"/>
-          <a:lstStyle/>
-          <a:p>
-            <a:pPr algn="ctr"/>
-          </a:p>
-        </p:txBody>
-      </p:sp>
-      <p:sp>
-        <p:nvSpPr>
-          <p:cNvPr id="3" name="TextBox 2"/>
-          <p:cNvSpPr txBox="1"/>
-          <p:nvPr/>
-        </p:nvSpPr>
-        <p:spPr>
-          <a:xfrm>
-            <a:off x="457200" y="137160"/>
-            <a:ext cx="8229600" cy="548640"/>
-          </a:xfrm>
-          <a:prstGeom prst="rect">
-            <a:avLst/>
-          </a:prstGeom>
-          <a:noFill/>
-        </p:spPr>
-        <p:txBody>
-          <a:bodyPr wrap="none">
-            <a:spAutoFit/>
-          </a:bodyPr>
-          <a:lstStyle/>
-          <a:p>
-            <a:pPr>
-              <a:defRPr sz="4000" b="1">
-                <a:solidFill>
-                  <a:srgbClr val="FFFFFF"/>
-                </a:solidFill>
-              </a:defRPr>
-            </a:pPr>
-            <a:r>
-              <a:t>Frontend Pages (Phase 1)</a:t>
-            </a:r>
-          </a:p>
-        </p:txBody>
-      </p:sp>
-      <p:sp>
-        <p:nvSpPr>
-          <p:cNvPr id="4" name="TextBox 3"/>
-          <p:cNvSpPr txBox="1"/>
-          <p:nvPr/>
-        </p:nvSpPr>
-        <p:spPr>
-          <a:xfrm>
-            <a:off x="274320" y="914400"/>
-            <a:ext cx="4114800" cy="5029200"/>
-          </a:xfrm>
-          <a:prstGeom prst="rect">
-            <a:avLst/>
-          </a:prstGeom>
-          <a:noFill/>
-        </p:spPr>
-        <p:txBody>
-          <a:bodyPr wrap="square">
-            <a:spAutoFit/>
-          </a:bodyPr>
-          <a:lstStyle/>
-          <a:p>
-            <a:pPr>
-              <a:defRPr sz="2200" b="1">
-                <a:solidFill>
-                  <a:srgbClr val="C00000"/>
-                </a:solidFill>
-              </a:defRPr>
-            </a:pPr>
-            <a:r>
-              <a:t>Core Content</a:t>
-            </a:r>
-          </a:p>
-          <a:p>
-            <a:pPr>
-              <a:spcBef>
-                <a:spcPts val="400"/>
-              </a:spcBef>
-              <a:defRPr sz="1400">
-                <a:solidFill>
-                  <a:srgbClr val="333333"/>
-                </a:solidFill>
-              </a:defRPr>
-            </a:pPr>
-            <a:r>
-              <a:t>✓ Home Page</a:t>
-            </a:r>
-          </a:p>
-          <a:p>
-            <a:pPr>
-              <a:spcBef>
-                <a:spcPts val="400"/>
-              </a:spcBef>
-              <a:defRPr sz="1400">
-                <a:solidFill>
-                  <a:srgbClr val="333333"/>
-                </a:solidFill>
-              </a:defRPr>
-            </a:pPr>
-            <a:r>
-              <a:t>✓ Video Detail Player</a:t>
-            </a:r>
-          </a:p>
-          <a:p>
-            <a:pPr>
-              <a:spcBef>
-                <a:spcPts val="400"/>
-              </a:spcBef>
-              <a:defRPr sz="1400">
-                <a:solidFill>
-                  <a:srgbClr val="333333"/>
-                </a:solidFill>
-              </a:defRPr>
-            </a:pPr>
-            <a:r>
-              <a:t>✓ Category View</a:t>
-            </a:r>
-          </a:p>
-          <a:p>
-            <a:pPr>
-              <a:spcBef>
-                <a:spcPts val="400"/>
-              </a:spcBef>
-              <a:defRPr sz="1400">
-                <a:solidFill>
-                  <a:srgbClr val="333333"/>
-                </a:solidFill>
-              </a:defRPr>
-            </a:pPr>
-            <a:r>
-              <a:t>✓ About Page</a:t>
-            </a:r>
-          </a:p>
-          <a:p>
-            <a:pPr>
-              <a:spcBef>
-                <a:spcPts val="400"/>
-              </a:spcBef>
-              <a:defRPr sz="1400">
-                <a:solidFill>
-                  <a:srgbClr val="333333"/>
-                </a:solidFill>
-              </a:defRPr>
-            </a:pPr>
-            <a:r>
-              <a:t>✓ Contact Page</a:t>
-            </a:r>
-          </a:p>
-        </p:txBody>
-      </p:sp>
-      <p:sp>
-        <p:nvSpPr>
-          <p:cNvPr id="5" name="TextBox 4"/>
-          <p:cNvSpPr txBox="1"/>
-          <p:nvPr/>
-        </p:nvSpPr>
-        <p:spPr>
-          <a:xfrm>
-            <a:off x="4754880" y="914400"/>
-            <a:ext cx="4114800" cy="5029200"/>
-          </a:xfrm>
-          <a:prstGeom prst="rect">
-            <a:avLst/>
-          </a:prstGeom>
-          <a:noFill/>
-        </p:spPr>
-        <p:txBody>
-          <a:bodyPr wrap="square">
-            <a:spAutoFit/>
-          </a:bodyPr>
-          <a:lstStyle/>
-          <a:p>
-            <a:pPr>
-              <a:defRPr sz="2200" b="1">
-                <a:solidFill>
-                  <a:srgbClr val="C00000"/>
-                </a:solidFill>
-              </a:defRPr>
-            </a:pPr>
-            <a:r>
-              <a:t>Engagement</a:t>
-            </a:r>
-          </a:p>
-          <a:p>
-            <a:pPr>
-              <a:spcBef>
-                <a:spcPts val="400"/>
-              </a:spcBef>
-              <a:defRPr sz="1400">
-                <a:solidFill>
-                  <a:srgbClr val="333333"/>
-                </a:solidFill>
-              </a:defRPr>
-            </a:pPr>
-            <a:r>
-              <a:t>✓ Shorts Feed</a:t>
-            </a:r>
-          </a:p>
-          <a:p>
-            <a:pPr>
-              <a:spcBef>
-                <a:spcPts val="400"/>
-              </a:spcBef>
-              <a:defRPr sz="1400">
-                <a:solidFill>
-                  <a:srgbClr val="333333"/>
-                </a:solidFill>
-              </a:defRPr>
-            </a:pPr>
-            <a:r>
-              <a:t>✓ Community/Blog</a:t>
-            </a:r>
-          </a:p>
-          <a:p>
-            <a:pPr>
-              <a:spcBef>
-                <a:spcPts val="400"/>
-              </a:spcBef>
-              <a:defRPr sz="1400">
-                <a:solidFill>
-                  <a:srgbClr val="333333"/>
-                </a:solidFill>
-              </a:defRPr>
-            </a:pPr>
-            <a:r>
-              <a:t>✓ Live Streaming</a:t>
-            </a:r>
-          </a:p>
-          <a:p>
-            <a:pPr>
-              <a:spcBef>
-                <a:spcPts val="400"/>
-              </a:spcBef>
-              <a:defRPr sz="1400">
-                <a:solidFill>
-                  <a:srgbClr val="333333"/>
-                </a:solidFill>
-              </a:defRPr>
-            </a:pPr>
-            <a:r>
-              <a:t>✓ Creator Shop</a:t>
-            </a:r>
-          </a:p>
-          <a:p>
-            <a:pPr>
-              <a:spcBef>
-                <a:spcPts val="400"/>
-              </a:spcBef>
-              <a:defRPr sz="1400">
-                <a:solidFill>
-                  <a:srgbClr val="333333"/>
-                </a:solidFill>
-              </a:defRPr>
-            </a:pPr>
-            <a:r>
-              <a:t>✓ Search Results</a:t>
-            </a:r>
-          </a:p>
-        </p:txBody>
-      </p:sp>
-    </p:spTree>
-  </p:cSld>
-  <p:clrMapOvr>
-    <a:masterClrMapping/>
-  </p:clrMapOvr>
-</p:sld>
-</file>
-
-<file path=ppt/slides/slide7.xml><?xml version="1.0" encoding="utf-8"?>
-<p:sld xmlns:a="http://schemas.openxmlformats.org/drawingml/2006/main" xmlns:p="http://schemas.openxmlformats.org/presentationml/2006/main" xmlns:r="http://schemas.openxmlformats.org/officeDocument/2006/relationships">
-  <p:cSld>
-    <p:bg>
-      <p:bgPr>
-        <a:solidFill>
-          <a:srgbClr val="FFFFFF"/>
-        </a:solidFill>
-        <a:effectLst/>
-      </p:bgPr>
-    </p:bg>
-    <p:spTree>
-      <p:nvGrpSpPr>
-        <p:cNvPr id="1" name=""/>
-        <p:cNvGrpSpPr/>
-        <p:nvPr/>
-      </p:nvGrpSpPr>
-      <p:grpSpPr/>
-      <p:sp>
-        <p:nvSpPr>
-          <p:cNvPr id="2" name="Rectangle 1"/>
-          <p:cNvSpPr/>
-          <p:nvPr/>
-        </p:nvSpPr>
-        <p:spPr>
-          <a:xfrm>
-            <a:off x="0" y="0"/>
-            <a:ext cx="9144000" cy="731520"/>
-          </a:xfrm>
-          <a:prstGeom prst="rect">
-            <a:avLst/>
-          </a:prstGeom>
-          <a:solidFill>
-            <a:srgbClr val="1F4E79"/>
-          </a:solidFill>
-          <a:ln>
-            <a:solidFill>
-              <a:srgbClr val="1F4E79"/>
-            </a:solidFill>
-          </a:ln>
-        </p:spPr>
-        <p:style>
-          <a:lnRef idx="1">
-            <a:schemeClr val="accent1"/>
-          </a:lnRef>
-          <a:fillRef idx="3">
-            <a:schemeClr val="accent1"/>
-          </a:fillRef>
-          <a:effectRef idx="2">
-            <a:schemeClr val="accent1"/>
-          </a:effectRef>
-          <a:fontRef idx="minor">
-            <a:schemeClr val="lt1"/>
-          </a:fontRef>
-        </p:style>
-        <p:txBody>
-          <a:bodyPr rtlCol="0" anchor="ctr"/>
-          <a:lstStyle/>
-          <a:p>
-            <a:pPr algn="ctr"/>
-          </a:p>
-        </p:txBody>
-      </p:sp>
-      <p:sp>
-        <p:nvSpPr>
-          <p:cNvPr id="3" name="TextBox 2"/>
-          <p:cNvSpPr txBox="1"/>
-          <p:nvPr/>
-        </p:nvSpPr>
-        <p:spPr>
-          <a:xfrm>
-            <a:off x="457200" y="137160"/>
-            <a:ext cx="8229600" cy="548640"/>
-          </a:xfrm>
-          <a:prstGeom prst="rect">
-            <a:avLst/>
-          </a:prstGeom>
-          <a:noFill/>
-        </p:spPr>
-        <p:txBody>
-          <a:bodyPr wrap="none">
-            <a:spAutoFit/>
-          </a:bodyPr>
-          <a:lstStyle/>
-          <a:p>
-            <a:pPr>
-              <a:defRPr sz="4000" b="1">
-                <a:solidFill>
-                  <a:srgbClr val="FFFFFF"/>
-                </a:solidFill>
-              </a:defRPr>
-            </a:pPr>
-            <a:r>
-              <a:t>Frontend Pages (Phase 2)</a:t>
-            </a:r>
-          </a:p>
-        </p:txBody>
-      </p:sp>
-      <p:sp>
-        <p:nvSpPr>
-          <p:cNvPr id="4" name="TextBox 3"/>
-          <p:cNvSpPr txBox="1"/>
-          <p:nvPr/>
-        </p:nvSpPr>
-        <p:spPr>
-          <a:xfrm>
-            <a:off x="274320" y="914400"/>
-            <a:ext cx="4114800" cy="5029200"/>
-          </a:xfrm>
-          <a:prstGeom prst="rect">
-            <a:avLst/>
-          </a:prstGeom>
-          <a:noFill/>
-        </p:spPr>
-        <p:txBody>
-          <a:bodyPr wrap="square">
-            <a:spAutoFit/>
-          </a:bodyPr>
-          <a:lstStyle/>
-          <a:p>
-            <a:pPr>
-              <a:defRPr sz="2200" b="1">
-                <a:solidFill>
-                  <a:srgbClr val="C00000"/>
-                </a:solidFill>
-              </a:defRPr>
-            </a:pPr>
-            <a:r>
-              <a:t>User Account</a:t>
-            </a:r>
-          </a:p>
-          <a:p>
-            <a:pPr>
-              <a:spcBef>
-                <a:spcPts val="400"/>
-              </a:spcBef>
-              <a:defRPr sz="1400">
-                <a:solidFill>
-                  <a:srgbClr val="333333"/>
-                </a:solidFill>
-              </a:defRPr>
-            </a:pPr>
-            <a:r>
-              <a:t>✓ Login / Register</a:t>
-            </a:r>
-          </a:p>
-          <a:p>
-            <a:pPr>
-              <a:spcBef>
-                <a:spcPts val="400"/>
-              </a:spcBef>
-              <a:defRPr sz="1400">
-                <a:solidFill>
-                  <a:srgbClr val="333333"/>
-                </a:solidFill>
-              </a:defRPr>
-            </a:pPr>
-            <a:r>
-              <a:t>✓ Password Recovery</a:t>
-            </a:r>
-          </a:p>
-          <a:p>
-            <a:pPr>
-              <a:spcBef>
-                <a:spcPts val="400"/>
-              </a:spcBef>
-              <a:defRPr sz="1400">
-                <a:solidFill>
-                  <a:srgbClr val="333333"/>
-                </a:solidFill>
-              </a:defRPr>
-            </a:pPr>
-            <a:r>
-              <a:t>✓ User Profile</a:t>
-            </a:r>
-          </a:p>
-          <a:p>
-            <a:pPr>
-              <a:spcBef>
-                <a:spcPts val="400"/>
-              </a:spcBef>
-              <a:defRPr sz="1400">
-                <a:solidFill>
-                  <a:srgbClr val="333333"/>
-                </a:solidFill>
-              </a:defRPr>
-            </a:pPr>
-            <a:r>
-              <a:t>✓ Watch Later Library</a:t>
-            </a:r>
-          </a:p>
-          <a:p>
-            <a:pPr>
-              <a:spcBef>
-                <a:spcPts val="400"/>
-              </a:spcBef>
-              <a:defRPr sz="1400">
-                <a:solidFill>
-                  <a:srgbClr val="333333"/>
-                </a:solidFill>
-              </a:defRPr>
-            </a:pPr>
-            <a:r>
-              <a:t>✓ Series/Playlists</a:t>
-            </a:r>
-          </a:p>
-        </p:txBody>
-      </p:sp>
-      <p:sp>
-        <p:nvSpPr>
-          <p:cNvPr id="5" name="TextBox 4"/>
-          <p:cNvSpPr txBox="1"/>
-          <p:nvPr/>
-        </p:nvSpPr>
-        <p:spPr>
-          <a:xfrm>
-            <a:off x="4754880" y="914400"/>
-            <a:ext cx="4114800" cy="5029200"/>
-          </a:xfrm>
-          <a:prstGeom prst="rect">
-            <a:avLst/>
-          </a:prstGeom>
-          <a:noFill/>
-        </p:spPr>
-        <p:txBody>
-          <a:bodyPr wrap="square">
-            <a:spAutoFit/>
-          </a:bodyPr>
-          <a:lstStyle/>
-          <a:p>
-            <a:pPr>
-              <a:defRPr sz="2200" b="1">
-                <a:solidFill>
-                  <a:srgbClr val="C00000"/>
-                </a:solidFill>
-              </a:defRPr>
-            </a:pPr>
-            <a:r>
-              <a:t>Legal &amp; Other</a:t>
-            </a:r>
-          </a:p>
-          <a:p>
-            <a:pPr>
-              <a:spcBef>
-                <a:spcPts val="400"/>
-              </a:spcBef>
-              <a:defRPr sz="1400">
-                <a:solidFill>
-                  <a:srgbClr val="333333"/>
-                </a:solidFill>
-              </a:defRPr>
-            </a:pPr>
-            <a:r>
-              <a:t>✓ Privacy Policy</a:t>
-            </a:r>
-          </a:p>
-          <a:p>
-            <a:pPr>
-              <a:spcBef>
-                <a:spcPts val="400"/>
-              </a:spcBef>
-              <a:defRPr sz="1400">
-                <a:solidFill>
-                  <a:srgbClr val="333333"/>
-                </a:solidFill>
-              </a:defRPr>
-            </a:pPr>
-            <a:r>
-              <a:t>✓ Terms of Service</a:t>
-            </a:r>
-          </a:p>
-          <a:p>
-            <a:pPr>
-              <a:spcBef>
-                <a:spcPts val="400"/>
-              </a:spcBef>
-              <a:defRPr sz="1400">
-                <a:solidFill>
-                  <a:srgbClr val="333333"/>
-                </a:solidFill>
-              </a:defRPr>
-            </a:pPr>
-            <a:r>
-              <a:t>✓ API Proxy Routes</a:t>
-            </a:r>
-          </a:p>
-          <a:p>
-            <a:pPr>
-              <a:spcBef>
-                <a:spcPts val="400"/>
-              </a:spcBef>
-              <a:defRPr sz="1400">
-                <a:solidFill>
-                  <a:srgbClr val="333333"/>
-                </a:solidFill>
-              </a:defRPr>
-            </a:pPr>
-            <a:r>
-              <a:t>✓ Backend Testing</a:t>
-            </a:r>
-          </a:p>
-          <a:p>
-            <a:pPr>
-              <a:spcBef>
-                <a:spcPts val="400"/>
-              </a:spcBef>
-              <a:defRPr sz="1400">
-                <a:solidFill>
-                  <a:srgbClr val="333333"/>
-                </a:solidFill>
-              </a:defRPr>
-            </a:pPr>
-            <a:r>
-              <a:t>✓ Error Handling</a:t>
-            </a:r>
-          </a:p>
-        </p:txBody>
-      </p:sp>
-    </p:spTree>
-  </p:cSld>
-  <p:clrMapOvr>
-    <a:masterClrMapping/>
-  </p:clrMapOvr>
-</p:sld>
-</file>
-
-<file path=ppt/slides/slide8.xml><?xml version="1.0" encoding="utf-8"?>
-<p:sld xmlns:a="http://schemas.openxmlformats.org/drawingml/2006/main" xmlns:p="http://schemas.openxmlformats.org/presentationml/2006/main" xmlns:r="http://schemas.openxmlformats.org/officeDocument/2006/relationships">
-  <p:cSld>
-    <p:bg>
-      <p:bgPr>
-        <a:solidFill>
-          <a:srgbClr val="FFFFFF"/>
-        </a:solidFill>
-        <a:effectLst/>
-      </p:bgPr>
-    </p:bg>
-    <p:spTree>
-      <p:nvGrpSpPr>
-        <p:cNvPr id="1" name=""/>
-        <p:cNvGrpSpPr/>
-        <p:nvPr/>
-      </p:nvGrpSpPr>
-      <p:grpSpPr/>
-      <p:sp>
-        <p:nvSpPr>
-          <p:cNvPr id="2" name="Rectangle 1"/>
-          <p:cNvSpPr/>
-          <p:nvPr/>
-        </p:nvSpPr>
-        <p:spPr>
-          <a:xfrm>
-            <a:off x="0" y="0"/>
-            <a:ext cx="9144000" cy="731520"/>
-          </a:xfrm>
-          <a:prstGeom prst="rect">
-            <a:avLst/>
-          </a:prstGeom>
-          <a:solidFill>
-            <a:srgbClr val="1F4E79"/>
-          </a:solidFill>
-          <a:ln>
-            <a:solidFill>
-              <a:srgbClr val="1F4E79"/>
-            </a:solidFill>
-          </a:ln>
-        </p:spPr>
-        <p:style>
-          <a:lnRef idx="1">
-            <a:schemeClr val="accent1"/>
-          </a:lnRef>
-          <a:fillRef idx="3">
-            <a:schemeClr val="accent1"/>
-          </a:fillRef>
-          <a:effectRef idx="2">
-            <a:schemeClr val="accent1"/>
-          </a:effectRef>
-          <a:fontRef idx="minor">
-            <a:schemeClr val="lt1"/>
-          </a:fontRef>
-        </p:style>
-        <p:txBody>
-          <a:bodyPr rtlCol="0" anchor="ctr"/>
-          <a:lstStyle/>
-          <a:p>
-            <a:pPr algn="ctr"/>
-          </a:p>
-        </p:txBody>
-      </p:sp>
-      <p:sp>
-        <p:nvSpPr>
-          <p:cNvPr id="3" name="TextBox 2"/>
-          <p:cNvSpPr txBox="1"/>
-          <p:nvPr/>
-        </p:nvSpPr>
-        <p:spPr>
-          <a:xfrm>
-            <a:off x="457200" y="137160"/>
-            <a:ext cx="8229600" cy="548640"/>
-          </a:xfrm>
-          <a:prstGeom prst="rect">
-            <a:avLst/>
-          </a:prstGeom>
-          <a:noFill/>
-        </p:spPr>
-        <p:txBody>
-          <a:bodyPr wrap="none">
-            <a:spAutoFit/>
-          </a:bodyPr>
-          <a:lstStyle/>
-          <a:p>
-            <a:pPr>
-              <a:defRPr sz="4000" b="1">
-                <a:solidFill>
-                  <a:srgbClr val="FFFFFF"/>
-                </a:solidFill>
-              </a:defRPr>
-            </a:pPr>
-            <a:r>
-              <a:t>Key Features</a:t>
-            </a:r>
-          </a:p>
-        </p:txBody>
-      </p:sp>
-      <p:sp>
-        <p:nvSpPr>
-          <p:cNvPr id="4" name="TextBox 3"/>
-          <p:cNvSpPr txBox="1"/>
-          <p:nvPr/>
-        </p:nvSpPr>
-        <p:spPr>
-          <a:xfrm>
-            <a:off x="640080" y="1097280"/>
-            <a:ext cx="7863840" cy="4846320"/>
-          </a:xfrm>
-          <a:prstGeom prst="rect">
-            <a:avLst/>
-          </a:prstGeom>
-          <a:noFill/>
-        </p:spPr>
-        <p:txBody>
-          <a:bodyPr wrap="square">
-            <a:spAutoFit/>
-          </a:bodyPr>
-          <a:lstStyle/>
-          <a:p>
-            <a:pPr>
-              <a:spcBef>
-                <a:spcPts val="600"/>
-              </a:spcBef>
-              <a:spcAft>
-                <a:spcPts val="600"/>
-              </a:spcAft>
-              <a:defRPr sz="1800">
-                <a:solidFill>
-                  <a:srgbClr val="333333"/>
-                </a:solidFill>
-              </a:defRPr>
-            </a:pPr>
-            <a:r>
-              <a:t>🎥 Video Management: Upload, metadata, categorization</a:t>
-            </a:r>
-          </a:p>
-          <a:p>
-            <a:pPr>
-              <a:spcBef>
-                <a:spcPts val="600"/>
-              </a:spcBef>
-              <a:spcAft>
-                <a:spcPts val="600"/>
-              </a:spcAft>
-              <a:defRPr sz="1800">
-                <a:solidFill>
-                  <a:srgbClr val="333333"/>
-                </a:solidFill>
-              </a:defRPr>
-            </a:pPr>
-            <a:r>
-              <a:t>🔐 Security: Email/OAuth authentication + JWT</a:t>
-            </a:r>
-          </a:p>
-          <a:p>
-            <a:pPr>
-              <a:spcBef>
-                <a:spcPts val="600"/>
-              </a:spcBef>
-              <a:spcAft>
-                <a:spcPts val="600"/>
-              </a:spcAft>
-              <a:defRPr sz="1800">
-                <a:solidFill>
-                  <a:srgbClr val="333333"/>
-                </a:solidFill>
-              </a:defRPr>
-            </a:pPr>
-            <a:r>
-              <a:t>💬 Social: Comments, likes, shares, watch later</a:t>
-            </a:r>
-          </a:p>
-          <a:p>
-            <a:pPr>
-              <a:spcBef>
-                <a:spcPts val="600"/>
-              </a:spcBef>
-              <a:spcAft>
-                <a:spcPts val="600"/>
-              </a:spcAft>
-              <a:defRPr sz="1800">
-                <a:solidFill>
-                  <a:srgbClr val="333333"/>
-                </a:solidFill>
-              </a:defRPr>
-            </a:pPr>
-            <a:r>
-              <a:t>📊 Analytics: Watch progress, interactions, views</a:t>
-            </a:r>
-          </a:p>
-          <a:p>
-            <a:pPr>
-              <a:spcBef>
-                <a:spcPts val="600"/>
-              </a:spcBef>
-              <a:spcAft>
-                <a:spcPts val="600"/>
-              </a:spcAft>
-              <a:defRPr sz="1800">
-                <a:solidFill>
-                  <a:srgbClr val="333333"/>
-                </a:solidFill>
-              </a:defRPr>
-            </a:pPr>
-            <a:r>
-              <a:t>🛍️ Monetization: Merch shop, live super chat</a:t>
-            </a:r>
-          </a:p>
-          <a:p>
-            <a:pPr>
-              <a:spcBef>
-                <a:spcPts val="600"/>
-              </a:spcBef>
-              <a:spcAft>
-                <a:spcPts val="600"/>
-              </a:spcAft>
-              <a:defRPr sz="1800">
-                <a:solidFill>
-                  <a:srgbClr val="333333"/>
-                </a:solidFill>
-              </a:defRPr>
-            </a:pPr>
-            <a:r>
-              <a:t>🎨 UX: Dark/light themes, mobile responsive</a:t>
-            </a:r>
-          </a:p>
-          <a:p>
-            <a:pPr>
-              <a:spcBef>
-                <a:spcPts val="600"/>
-              </a:spcBef>
-              <a:spcAft>
-                <a:spcPts val="600"/>
-              </a:spcAft>
-              <a:defRPr sz="1800">
-                <a:solidFill>
-                  <a:srgbClr val="333333"/>
-                </a:solidFill>
-              </a:defRPr>
-            </a:pPr>
-            <a:r>
-              <a:t>⚡ Performance: Turbopack, database indexing</a:t>
-            </a:r>
-          </a:p>
-          <a:p>
-            <a:pPr>
-              <a:spcBef>
-                <a:spcPts val="600"/>
-              </a:spcBef>
-              <a:spcAft>
-                <a:spcPts val="600"/>
-              </a:spcAft>
-              <a:defRPr sz="1800">
-                <a:solidFill>
-                  <a:srgbClr val="333333"/>
-                </a:solidFill>
-              </a:defRPr>
-            </a:pPr>
-            <a:r>
-              <a:t>🌐 Scalability: Production-ready architecture</a:t>
-            </a:r>
-          </a:p>
-        </p:txBody>
-      </p:sp>
-    </p:spTree>
-  </p:cSld>
-  <p:clrMapOvr>
-    <a:masterClrMapping/>
-  </p:clrMapOvr>
-</p:sld>
-</file>
-
-<file path=ppt/slides/slide9.xml><?xml version="1.0" encoding="utf-8"?>
-<p:sld xmlns:a="http://schemas.openxmlformats.org/drawingml/2006/main" xmlns:p="http://schemas.openxmlformats.org/presentationml/2006/main" xmlns:r="http://schemas.openxmlformats.org/officeDocument/2006/relationships">
-  <p:cSld>
-    <p:bg>
-      <p:bgPr>
-        <a:solidFill>
-          <a:srgbClr val="FFFFFF"/>
-        </a:solidFill>
-        <a:effectLst/>
-      </p:bgPr>
-    </p:bg>
-    <p:spTree>
-      <p:nvGrpSpPr>
-        <p:cNvPr id="1" name=""/>
-        <p:cNvGrpSpPr/>
-        <p:nvPr/>
-      </p:nvGrpSpPr>
-      <p:grpSpPr/>
-      <p:sp>
-        <p:nvSpPr>
-          <p:cNvPr id="2" name="Rectangle 1"/>
-          <p:cNvSpPr/>
-          <p:nvPr/>
-        </p:nvSpPr>
-        <p:spPr>
-          <a:xfrm>
-            <a:off x="0" y="0"/>
-            <a:ext cx="9144000" cy="731520"/>
-          </a:xfrm>
-          <a:prstGeom prst="rect">
-            <a:avLst/>
-          </a:prstGeom>
-          <a:solidFill>
-            <a:srgbClr val="1F4E79"/>
-          </a:solidFill>
-          <a:ln>
-            <a:solidFill>
-              <a:srgbClr val="1F4E79"/>
-            </a:solidFill>
-          </a:ln>
-        </p:spPr>
-        <p:style>
-          <a:lnRef idx="1">
-            <a:schemeClr val="accent1"/>
-          </a:lnRef>
-          <a:fillRef idx="3">
-            <a:schemeClr val="accent1"/>
-          </a:fillRef>
-          <a:effectRef idx="2">
-            <a:schemeClr val="accent1"/>
-          </a:effectRef>
-          <a:fontRef idx="minor">
-            <a:schemeClr val="lt1"/>
-          </a:fontRef>
-        </p:style>
-        <p:txBody>
-          <a:bodyPr rtlCol="0" anchor="ctr"/>
-          <a:lstStyle/>
-          <a:p>
-            <a:pPr algn="ctr"/>
-          </a:p>
-        </p:txBody>
-      </p:sp>
-      <p:sp>
-        <p:nvSpPr>
-          <p:cNvPr id="3" name="TextBox 2"/>
-          <p:cNvSpPr txBox="1"/>
-          <p:nvPr/>
-        </p:nvSpPr>
-        <p:spPr>
-          <a:xfrm>
-            <a:off x="457200" y="137160"/>
-            <a:ext cx="8229600" cy="548640"/>
-          </a:xfrm>
-          <a:prstGeom prst="rect">
-            <a:avLst/>
-          </a:prstGeom>
-          <a:noFill/>
-        </p:spPr>
-        <p:txBody>
-          <a:bodyPr wrap="none">
-            <a:spAutoFit/>
-          </a:bodyPr>
-          <a:lstStyle/>
-          <a:p>
-            <a:pPr>
-              <a:defRPr sz="4000" b="1">
-                <a:solidFill>
-                  <a:srgbClr val="FFFFFF"/>
-                </a:solidFill>
-              </a:defRPr>
-            </a:pPr>
-            <a:r>
-              <a:t>API Endpoints</a:t>
-            </a:r>
-          </a:p>
-        </p:txBody>
-      </p:sp>
-      <p:sp>
-        <p:nvSpPr>
-          <p:cNvPr id="4" name="TextBox 3"/>
-          <p:cNvSpPr txBox="1"/>
-          <p:nvPr/>
-        </p:nvSpPr>
-        <p:spPr>
-          <a:xfrm>
-            <a:off x="274320" y="914400"/>
-            <a:ext cx="4114800" cy="5029200"/>
-          </a:xfrm>
-          <a:prstGeom prst="rect">
-            <a:avLst/>
-          </a:prstGeom>
-          <a:noFill/>
-        </p:spPr>
-        <p:txBody>
-          <a:bodyPr wrap="square">
-            <a:spAutoFit/>
-          </a:bodyPr>
-          <a:lstStyle/>
-          <a:p>
-            <a:pPr>
-              <a:defRPr sz="2200" b="1">
-                <a:solidFill>
-                  <a:srgbClr val="C00000"/>
-                </a:solidFill>
-              </a:defRPr>
-            </a:pPr>
-            <a:r>
-              <a:t>Authentication</a:t>
-            </a:r>
-          </a:p>
-          <a:p>
-            <a:pPr>
-              <a:spcBef>
-                <a:spcPts val="400"/>
-              </a:spcBef>
-              <a:defRPr sz="1400">
-                <a:solidFill>
-                  <a:srgbClr val="333333"/>
-                </a:solidFill>
-              </a:defRPr>
-            </a:pPr>
-            <a:r>
-              <a:t>• POST /auth/register</a:t>
-            </a:r>
-          </a:p>
-          <a:p>
-            <a:pPr>
-              <a:spcBef>
-                <a:spcPts val="400"/>
-              </a:spcBef>
-              <a:defRPr sz="1400">
-                <a:solidFill>
-                  <a:srgbClr val="333333"/>
-                </a:solidFill>
-              </a:defRPr>
-            </a:pPr>
-            <a:r>
-              <a:t>• POST /auth/login</a:t>
-            </a:r>
-          </a:p>
-          <a:p>
-            <a:pPr>
-              <a:spcBef>
-                <a:spcPts val="400"/>
-              </a:spcBef>
-              <a:defRPr sz="1400">
-                <a:solidFill>
-                  <a:srgbClr val="333333"/>
-                </a:solidFill>
-              </a:defRPr>
-            </a:pPr>
-            <a:r>
-              <a:t>• POST /auth/google</a:t>
-            </a:r>
-          </a:p>
-          <a:p>
-            <a:pPr>
-              <a:spcBef>
-                <a:spcPts val="400"/>
-              </a:spcBef>
-              <a:defRPr sz="1400">
-                <a:solidFill>
-                  <a:srgbClr val="333333"/>
-                </a:solidFill>
-              </a:defRPr>
-            </a:pPr>
-            <a:r>
-              <a:t>• POST /auth/apple</a:t>
-            </a:r>
-          </a:p>
-          <a:p>
-            <a:pPr>
-              <a:spcBef>
-                <a:spcPts val="400"/>
-              </a:spcBef>
-              <a:defRPr sz="1400">
-                <a:solidFill>
-                  <a:srgbClr val="333333"/>
-                </a:solidFill>
-              </a:defRPr>
-            </a:pPr>
-            <a:r>
-              <a:t>• POST /auth/forgot-password</a:t>
-            </a:r>
-          </a:p>
-          <a:p>
-            <a:pPr>
-              <a:spcBef>
-                <a:spcPts val="400"/>
-              </a:spcBef>
-              <a:defRPr sz="1400">
-                <a:solidFill>
-                  <a:srgbClr val="333333"/>
-                </a:solidFill>
-              </a:defRPr>
-            </a:pPr>
-            <a:r>
-              <a:t>• POST /auth/reset-password</a:t>
-            </a:r>
-          </a:p>
-        </p:txBody>
-      </p:sp>
-      <p:sp>
-        <p:nvSpPr>
-          <p:cNvPr id="5" name="TextBox 4"/>
-          <p:cNvSpPr txBox="1"/>
-          <p:nvPr/>
-        </p:nvSpPr>
-        <p:spPr>
-          <a:xfrm>
-            <a:off x="4754880" y="914400"/>
-            <a:ext cx="4114800" cy="5029200"/>
-          </a:xfrm>
-          <a:prstGeom prst="rect">
-            <a:avLst/>
-          </a:prstGeom>
-          <a:noFill/>
-        </p:spPr>
-        <p:txBody>
-          <a:bodyPr wrap="square">
-            <a:spAutoFit/>
-          </a:bodyPr>
-          <a:lstStyle/>
-          <a:p>
-            <a:pPr>
-              <a:defRPr sz="2200" b="1">
-                <a:solidFill>
-                  <a:srgbClr val="C00000"/>
-                </a:solidFill>
-              </a:defRPr>
-            </a:pPr>
-            <a:r>
-              <a:t>Content &amp; Tracking</a:t>
-            </a:r>
-          </a:p>
-          <a:p>
-            <a:pPr>
-              <a:spcBef>
-                <a:spcPts val="400"/>
-              </a:spcBef>
-              <a:defRPr sz="1400">
-                <a:solidFill>
-                  <a:srgbClr val="333333"/>
-                </a:solidFill>
-              </a:defRPr>
-            </a:pPr>
-            <a:r>
-              <a:t>• GET/POST /videos</a:t>
-            </a:r>
-          </a:p>
-          <a:p>
-            <a:pPr>
-              <a:spcBef>
-                <a:spcPts val="400"/>
-              </a:spcBef>
-              <a:defRPr sz="1400">
-                <a:solidFill>
-                  <a:srgbClr val="333333"/>
-                </a:solidFill>
-              </a:defRPr>
-            </a:pPr>
-            <a:r>
-              <a:t>• GET/POST /videos/[id]/comments</a:t>
-            </a:r>
-          </a:p>
-          <a:p>
-            <a:pPr>
-              <a:spcBef>
-                <a:spcPts val="400"/>
-              </a:spcBef>
-              <a:defRPr sz="1400">
-                <a:solidFill>
-                  <a:srgbClr val="333333"/>
-                </a:solidFill>
-              </a:defRPr>
-            </a:pPr>
-            <a:r>
-              <a:t>• GET /videos/trending</a:t>
-            </a:r>
-          </a:p>
-          <a:p>
-            <a:pPr>
-              <a:spcBef>
-                <a:spcPts val="400"/>
-              </a:spcBef>
-              <a:defRPr sz="1400">
-                <a:solidFill>
-                  <a:srgbClr val="333333"/>
-                </a:solidFill>
-              </a:defRPr>
-            </a:pPr>
-            <a:r>
-              <a:t>• GET /categories</a:t>
-            </a:r>
-          </a:p>
-          <a:p>
-            <a:pPr>
-              <a:spcBef>
-                <a:spcPts val="400"/>
-              </a:spcBef>
-              <a:defRPr sz="1400">
-                <a:solidFill>
-                  <a:srgbClr val="333333"/>
-                </a:solidFill>
-              </a:defRPr>
-            </a:pPr>
-            <a:r>
-              <a:t>• POST /tracking/event</a:t>
-            </a:r>
-          </a:p>
-          <a:p>
-            <a:pPr>
-              <a:spcBef>
-                <a:spcPts val="400"/>
-              </a:spcBef>
-              <a:defRPr sz="1400">
-                <a:solidFill>
-                  <a:srgbClr val="333333"/>
-                </a:solidFill>
-              </a:defRPr>
-            </a:pPr>
-            <a:r>
-              <a:t>• GET /tracking/stats</a:t>
+            <a:pPr algn="r"/>
+            <a:r>
+              <a:rPr sz="900">
+                <a:solidFill>
+                  <a:srgbClr val="788291"/>
+                </a:solidFill>
+                <a:latin typeface="Aptos"/>
+              </a:rPr>
+              <a:t>Development currently runs on localhost:3000 and localhost:8000</a:t>
             </a:r>
           </a:p>
         </p:txBody>
